--- a/results/slides/SiLU_class_presentation.pptx
+++ b/results/slides/SiLU_class_presentation.pptx
@@ -1041,7 +1041,7 @@
           <a:p>
             <a:r>
               <a:rPr lang="en-US" dirty="0"/>
-              <a:t>The professor's objection: hand-typing '1 cycle' into gem5. Now run_gem5.py computes latency from the Quartus delay and the clock. Multi-cycle: ceil(d/T). Pipelined: smallest N with d/N + 0.3 ns &lt;= T (0.3 ns is an assumption).</a:t>
+              <a:t>A hand-typed '1 cycle' in gem5 would disconnect synthesis from simulation. Now run_gem5.py computes latency from the Quartus delay and the clock. Multi-cycle: ceil(d/T). Pipelined: smallest N with d/N + 0.3 ns &lt;= T (0.3 ns is an assumption).</a:t>
             </a:r>
             <a:endParaRPr lang="en-US" dirty="0"/>
           </a:p>
@@ -2111,8 +2111,8 @@
         </p:nvSpPr>
         <p:spPr>
           <a:xfrm>
-            <a:off x="640080" y="4114800"/>
-            <a:ext cx="7863840" cy="365760"/>
+            <a:off x="640080" y="3931920"/>
+            <a:ext cx="7863840" cy="640080"/>
           </a:xfrm>
           <a:prstGeom prst="rect">
             <a:avLst/>
@@ -2136,7 +2136,24 @@
                 <a:ea typeface="Calibri" pitchFamily="34" charset="-122"/>
                 <a:cs typeface="Calibri" pitchFamily="34" charset="-120"/>
               </a:rPr>
-              <a:t>Ayush Krishna · B.Tech Electronics &amp; VLSI, VIT Vellore · BAEVD202 Computer Architecture</a:t>
+              <a:t>First Author · Second Author · Third Author · Fourth Author · Fifth Author</a:t>
+            </a:r>
+            <a:endParaRPr lang="en-US" sz="1400" dirty="0"/>
+          </a:p>
+          <a:p>
+            <a:pPr indent="0" marL="0">
+              <a:buNone/>
+            </a:pPr>
+            <a:r>
+              <a:rPr lang="en-US" sz="1400" dirty="0">
+                <a:solidFill>
+                  <a:srgbClr val="BFD4F2"/>
+                </a:solidFill>
+                <a:latin typeface="Calibri" pitchFamily="34" charset="0"/>
+                <a:ea typeface="Calibri" pitchFamily="34" charset="-122"/>
+                <a:cs typeface="Calibri" pitchFamily="34" charset="-120"/>
+              </a:rPr>
+              <a:t>Department of Electronics Engineering, University Name</a:t>
             </a:r>
             <a:endParaRPr lang="en-US" sz="1400" dirty="0"/>
           </a:p>
@@ -4482,7 +4499,7 @@
                 <a:ea typeface="Calibri" pitchFamily="34" charset="-122"/>
                 <a:cs typeface="Calibri" pitchFamily="34" charset="-120"/>
               </a:rPr>
-              <a:t>github.com/normie2099/SiLU-Architecture</a:t>
+              <a:t>Project repository: &lt;link&gt;</a:t>
             </a:r>
             <a:endParaRPr lang="en-US" sz="1200" dirty="0"/>
           </a:p>

--- a/results/slides/SiLU_class_presentation.pptx
+++ b/results/slides/SiLU_class_presentation.pptx
@@ -17,9 +17,10 @@
     <p:sldId id="265" r:id="rId11"/>
     <p:sldId id="266" r:id="rId12"/>
     <p:sldId id="267" r:id="rId13"/>
+    <p:sldId id="268" r:id="rId14"/>
   </p:sldIdLst>
   <p:notesMasterIdLst>
-    <p:notesMasterId r:id="rId14"/>
+    <p:notesMasterId r:id="rId15"/>
   </p:notesMasterIdLst>
   <p:sldSz cx="9144000" cy="5143500"/>
   <p:notesSz cx="5143500" cy="9144000"/>
@@ -601,7 +602,7 @@
           <a:p>
             <a:r>
               <a:rPr lang="en-US" dirty="0"/>
-              <a:t>57/57 SiLU modules replaced, 969 calls confirmed. COCO128, 128 images: relative comparison only, not a published mAP. 8.8% of inputs outside [-4,4].</a:t>
+              <a:t>Alignment: OoO custom loop 1.0 to 4.0 cycles by alignment. Cache: table 21.0 -&gt; 28.5 in-order at 512 B; fine at 1 kB+.</a:t>
             </a:r>
             <a:endParaRPr lang="en-US" dirty="0"/>
           </a:p>
@@ -689,7 +690,7 @@
           <a:p>
             <a:r>
               <a:rPr lang="en-US" dirty="0"/>
-              <a:t>YOLOv8n 4.37 GMAC, 13.9 M SiLU elements, 315 MACs per activation. Cycles/MAC from conv layer, cycles/activation from shuffled loop at 500 MHz. Estimate, not a simulation of YOLOv8n.</a:t>
+              <a:t>57/57 SiLU modules replaced, 969 calls confirmed. COCO128, 128 images: relative comparison only, not a published mAP. 8.8% of inputs outside [-4,4].</a:t>
             </a:r>
             <a:endParaRPr lang="en-US" dirty="0"/>
           </a:p>
@@ -777,7 +778,7 @@
           <a:p>
             <a:r>
               <a:rPr lang="en-US" dirty="0"/>
-              <a:t>Close with honest limits and future work (GPU/Vortex comparison).</a:t>
+              <a:t>YOLOv8n 4.37 GMAC, 13.9 M SiLU elements, 315 MACs per activation. Cycles/MAC from conv layer, cycles/activation from shuffled loop at 500 MHz. Estimate, not a simulation of YOLOv8n.</a:t>
             </a:r>
             <a:endParaRPr lang="en-US" dirty="0"/>
           </a:p>
@@ -801,6 +802,94 @@
             <a:fld id="{F7021451-1387-4CA6-816F-3879F97B5CBC}" type="slidenum">
               <a:rPr lang="en-US"/>
               <a:t>12</a:t>
+            </a:fld>
+            <a:endParaRPr lang="en-US"/>
+          </a:p>
+        </p:txBody>
+      </p:sp>
+    </p:spTree>
+    <p:extLst>
+      <p:ext uri="{BB962C8B-B14F-4D97-AF65-F5344CB8AC3E}">
+        <p14:creationId xmlns:p14="http://schemas.microsoft.com/office/powerpoint/2010/main" val="1024086991"/>
+      </p:ext>
+    </p:extLst>
+  </p:cSld>
+  <p:clrMapOvr>
+    <a:masterClrMapping/>
+  </p:clrMapOvr>
+</p:notes>
+</file>
+
+<file path=ppt/notesSlides/notesSlide13.xml><?xml version="1.0" encoding="utf-8"?>
+<p:notes xmlns:a="http://schemas.openxmlformats.org/drawingml/2006/main" xmlns:r="http://schemas.openxmlformats.org/officeDocument/2006/relationships" xmlns:p="http://schemas.openxmlformats.org/presentationml/2006/main">
+  <p:cSld>
+    <p:spTree>
+      <p:nvGrpSpPr>
+        <p:cNvPr id="1" name=""/>
+        <p:cNvGrpSpPr/>
+        <p:nvPr/>
+      </p:nvGrpSpPr>
+      <p:grpSpPr>
+        <a:xfrm>
+          <a:off x="0" y="0"/>
+          <a:ext cx="0" cy="0"/>
+          <a:chOff x="0" y="0"/>
+          <a:chExt cx="0" cy="0"/>
+        </a:xfrm>
+      </p:grpSpPr>
+      <p:sp>
+        <p:nvSpPr>
+          <p:cNvPr id="2" name="Slide Image Placeholder 1"/>
+          <p:cNvSpPr>
+            <a:spLocks noGrp="1" noRot="1" noChangeAspect="1"/>
+          </p:cNvSpPr>
+          <p:nvPr>
+            <p:ph type="sldImg"/>
+          </p:nvPr>
+        </p:nvSpPr>
+        <p:spPr/>
+      </p:sp>
+      <p:sp>
+        <p:nvSpPr>
+          <p:cNvPr id="3" name="Notes Placeholder 2"/>
+          <p:cNvSpPr>
+            <a:spLocks noGrp="1"/>
+          </p:cNvSpPr>
+          <p:nvPr>
+            <p:ph type="body" idx="1"/>
+          </p:nvPr>
+        </p:nvSpPr>
+        <p:spPr/>
+        <p:txBody>
+          <a:bodyPr/>
+          <a:lstStyle/>
+          <a:p>
+            <a:r>
+              <a:rPr lang="en-US" dirty="0"/>
+              <a:t>Close with honest limits and future work (GPU/Vortex comparison).</a:t>
+            </a:r>
+            <a:endParaRPr lang="en-US" dirty="0"/>
+          </a:p>
+        </p:txBody>
+      </p:sp>
+      <p:sp>
+        <p:nvSpPr>
+          <p:cNvPr id="4" name="Slide Number Placeholder 3"/>
+          <p:cNvSpPr>
+            <a:spLocks noGrp="1"/>
+          </p:cNvSpPr>
+          <p:nvPr>
+            <p:ph type="sldNum" sz="quarter" idx="10"/>
+          </p:nvPr>
+        </p:nvSpPr>
+        <p:spPr/>
+        <p:txBody>
+          <a:bodyPr/>
+          <a:lstStyle/>
+          <a:p>
+            <a:fld id="{F7021451-1387-4CA6-816F-3879F97B5CBC}" type="slidenum">
+              <a:rPr lang="en-US"/>
+              <a:t>13</a:t>
             </a:fld>
             <a:endParaRPr lang="en-US"/>
           </a:p>
@@ -953,7 +1042,7 @@
           <a:p>
             <a:r>
               <a:rPr lang="en-US" dirty="0"/>
-              <a:t>Spagnolo, Perri, Corsonello, ISVLSI 2025. Q6.10 fixed point, constants 384 and 38. Max error and mean error over (-4,4).</a:t>
+              <a:t>Maps every concept to the experiment and the measured result. E1..E7 are the experiment IDs in the report and repo.</a:t>
             </a:r>
             <a:endParaRPr lang="en-US" dirty="0"/>
           </a:p>
@@ -1041,7 +1130,7 @@
           <a:p>
             <a:r>
               <a:rPr lang="en-US" dirty="0"/>
-              <a:t>A hand-typed '1 cycle' in gem5 would disconnect synthesis from simulation. Now run_gem5.py computes latency from the Quartus delay and the clock. Multi-cycle: ceil(d/T). Pipelined: smallest N with d/N + 0.3 ns &lt;= T (0.3 ns is an assumption).</a:t>
+              <a:t>Spagnolo, Perri, Corsonello, ISVLSI 2025. Q6.10 fixed point, constants 384 and 38. Max error and mean error over (-4,4).</a:t>
             </a:r>
             <a:endParaRPr lang="en-US" dirty="0"/>
           </a:p>
@@ -1129,7 +1218,7 @@
           <a:p>
             <a:r>
               <a:rPr lang="en-US" dirty="0"/>
-              <a:t>Table: one loop of 1024 inputs in [-4,4), 20 passes, 100 MHz, latency 1. The 10.8x headline was a loop number vs the weakest baseline. Only 2.4x/3.7x vs integer f4.</a:t>
+              <a:t>A hand-typed '1 cycle' in gem5 would disconnect synthesis from simulation. Now run_gem5.py computes latency from the Quartus delay and the clock. Multi-cycle: ceil(d/T). Pipelined: smallest N with d/N + 0.3 ns &lt;= T (0.3 ns is an assumption).</a:t>
             </a:r>
             <a:endParaRPr lang="en-US" dirty="0"/>
           </a:p>
@@ -1217,7 +1306,7 @@
           <a:p>
             <a:r>
               <a:rPr lang="en-US" dirty="0"/>
-              <a:t>In-order: flat to latency 4 then one-for-one. OoO pipelined hides 16 cycles, unpipelined exposes all of it: structural hazard.</a:t>
+              <a:t>Table: one loop of 1024 inputs in [-4,4), 20 passes, 100 MHz, latency 1. The 10.8x headline was a loop number vs the weakest baseline. Only 2.4x/3.7x vs integer f4.</a:t>
             </a:r>
             <a:endParaRPr lang="en-US" dirty="0"/>
           </a:p>
@@ -1305,7 +1394,7 @@
           <a:p>
             <a:r>
               <a:rPr lang="en-US" dirty="0"/>
-              <a:t>At 1 GHz in-order: 1.1x (12-stage) to 1.4x (9-cycle multi-cycle) vs integer f4. Above 123 MHz the FPGA delay is extrapolated.</a:t>
+              <a:t>In-order: flat to latency 4 then one-for-one. OoO pipelined hides 16 cycles, unpipelined exposes all of it: structural hazard.</a:t>
             </a:r>
             <a:endParaRPr lang="en-US" dirty="0"/>
           </a:p>
@@ -1393,7 +1482,7 @@
           <a:p>
             <a:r>
               <a:rPr lang="en-US" dirty="0"/>
-              <a:t>Software f4 is a compare chain. Sorted inputs are perfectly predictable. Shuffled: 0.41 mispredicts per activation, +3.4 cycles in-order, +5.4 OoO.</a:t>
+              <a:t>At 1 GHz in-order: 1.1x (12-stage) to 1.4x (9-cycle multi-cycle) vs integer f4. Above 123 MHz the FPGA delay is extrapolated.</a:t>
             </a:r>
             <a:endParaRPr lang="en-US" dirty="0"/>
           </a:p>
@@ -1481,7 +1570,7 @@
           <a:p>
             <a:r>
               <a:rPr lang="en-US" dirty="0"/>
-              <a:t>Alignment: OoO custom loop 1.0 to 4.0 cycles by alignment. Cache: table 21.0 -&gt; 28.5 in-order at 512 B; fine at 1 kB+.</a:t>
+              <a:t>Software f4 is a compare chain. Sorted inputs are perfectly predictable. Shuffled: 0.41 mispredicts per activation, +3.4 cycles in-order, +5.4 OoO.</a:t>
             </a:r>
             <a:endParaRPr lang="en-US" dirty="0"/>
           </a:p>
@@ -2136,7 +2225,7 @@
                 <a:ea typeface="Calibri" pitchFamily="34" charset="-122"/>
                 <a:cs typeface="Calibri" pitchFamily="34" charset="-120"/>
               </a:rPr>
-              <a:t>First Author · Second Author · Third Author · Fourth Author · Fifth Author</a:t>
+              <a:t>Ayush Krishna · Vrinda Pandey · Tanvee Chintala · Chandni Srivastava · Eswar Sesha Sai</a:t>
             </a:r>
             <a:endParaRPr lang="en-US" sz="1400" dirty="0"/>
           </a:p>
@@ -2153,7 +2242,7 @@
                 <a:ea typeface="Calibri" pitchFamily="34" charset="-122"/>
                 <a:cs typeface="Calibri" pitchFamily="34" charset="-120"/>
               </a:rPr>
-              <a:t>Department of Electronics Engineering, University Name</a:t>
+              <a:t>School of Electronics Engineering, Vellore Institute of Technology</a:t>
             </a:r>
             <a:endParaRPr lang="en-US" sz="1400" dirty="0"/>
           </a:p>
@@ -2219,6 +2308,349 @@
                 <a:ea typeface="Cambria" pitchFamily="34" charset="-122"/>
                 <a:cs typeface="Cambria" pitchFamily="34" charset="-120"/>
               </a:rPr>
+              <a:t>Controls: code placement and cache pressure</a:t>
+            </a:r>
+            <a:endParaRPr lang="en-US" sz="2600" dirty="0"/>
+          </a:p>
+        </p:txBody>
+      </p:sp>
+      <p:pic>
+        <p:nvPicPr>
+          <p:cNvPr id="4" name="Image 0" descr="Cycles per activation vs L1D size">    </p:cNvPr>
+          <p:cNvPicPr>
+            <a:picLocks noChangeAspect="1"/>
+          </p:cNvPicPr>
+          <p:nvPr/>
+        </p:nvPicPr>
+        <p:blipFill>
+          <a:blip r:embed="rId1"/>
+          <a:stretch>
+            <a:fillRect/>
+          </a:stretch>
+        </p:blipFill>
+        <p:spPr>
+          <a:xfrm>
+            <a:off x="457200" y="1097280"/>
+            <a:ext cx="5394960" cy="2103120"/>
+          </a:xfrm>
+          <a:prstGeom prst="rect">
+            <a:avLst/>
+          </a:prstGeom>
+        </p:spPr>
+      </p:pic>
+      <p:sp>
+        <p:nvSpPr>
+          <p:cNvPr id="5" name="stat card"/>
+          <p:cNvSpPr/>
+          <p:nvPr/>
+        </p:nvSpPr>
+        <p:spPr>
+          <a:xfrm>
+            <a:off x="6126480" y="1097280"/>
+            <a:ext cx="2560320" cy="1234440"/>
+          </a:xfrm>
+          <a:prstGeom prst="rect">
+            <a:avLst/>
+          </a:prstGeom>
+          <a:solidFill>
+            <a:srgbClr val="EEF2F8"/>
+          </a:solidFill>
+          <a:ln w="12700">
+            <a:solidFill>
+              <a:srgbClr val="EEF2F8"/>
+            </a:solidFill>
+            <a:prstDash val="solid"/>
+          </a:ln>
+        </p:spPr>
+      </p:sp>
+      <p:sp>
+        <p:nvSpPr>
+          <p:cNvPr id="6" name="Text 2"/>
+          <p:cNvSpPr txBox="1"/>
+          <p:nvPr/>
+        </p:nvSpPr>
+        <p:spPr>
+          <a:xfrm>
+            <a:off x="6263640" y="1207008"/>
+            <a:ext cx="2286000" cy="640080"/>
+          </a:xfrm>
+          <a:prstGeom prst="rect">
+            <a:avLst/>
+          </a:prstGeom>
+          <a:noFill/>
+          <a:ln/>
+        </p:spPr>
+        <p:txBody>
+          <a:bodyPr wrap="square" lIns="0" tIns="0" rIns="0" bIns="0" rtlCol="0" anchor="t"/>
+          <a:lstStyle/>
+          <a:p>
+            <a:pPr indent="0" marL="0">
+              <a:buNone/>
+            </a:pPr>
+            <a:r>
+              <a:rPr lang="en-US" sz="3200" b="1" dirty="0">
+                <a:solidFill>
+                  <a:srgbClr val="EB6834"/>
+                </a:solidFill>
+                <a:latin typeface="Cambria" pitchFamily="34" charset="0"/>
+                <a:ea typeface="Cambria" pitchFamily="34" charset="-122"/>
+                <a:cs typeface="Cambria" pitchFamily="34" charset="-120"/>
+              </a:rPr>
+              <a:t>1–4 cycles</a:t>
+            </a:r>
+            <a:endParaRPr lang="en-US" sz="3200" dirty="0"/>
+          </a:p>
+        </p:txBody>
+      </p:sp>
+      <p:sp>
+        <p:nvSpPr>
+          <p:cNvPr id="7" name="Text 3"/>
+          <p:cNvSpPr txBox="1"/>
+          <p:nvPr/>
+        </p:nvSpPr>
+        <p:spPr>
+          <a:xfrm>
+            <a:off x="6263640" y="1847088"/>
+            <a:ext cx="2286000" cy="457200"/>
+          </a:xfrm>
+          <a:prstGeom prst="rect">
+            <a:avLst/>
+          </a:prstGeom>
+          <a:noFill/>
+          <a:ln/>
+        </p:spPr>
+        <p:txBody>
+          <a:bodyPr wrap="square" lIns="0" tIns="0" rIns="0" bIns="0" rtlCol="0" anchor="t"/>
+          <a:lstStyle/>
+          <a:p>
+            <a:pPr indent="0" marL="0">
+              <a:buNone/>
+            </a:pPr>
+            <a:r>
+              <a:rPr lang="en-US" sz="1200" dirty="0">
+                <a:solidFill>
+                  <a:srgbClr val="5B6577"/>
+                </a:solidFill>
+                <a:latin typeface="Calibri" pitchFamily="34" charset="0"/>
+                <a:ea typeface="Calibri" pitchFamily="34" charset="-122"/>
+                <a:cs typeface="Calibri" pitchFamily="34" charset="-120"/>
+              </a:rPr>
+              <a:t>OoO instruction loop swings with code alignment alone</a:t>
+            </a:r>
+            <a:endParaRPr lang="en-US" sz="1200" dirty="0"/>
+          </a:p>
+        </p:txBody>
+      </p:sp>
+      <p:sp>
+        <p:nvSpPr>
+          <p:cNvPr id="8" name="Text 4"/>
+          <p:cNvSpPr txBox="1"/>
+          <p:nvPr/>
+        </p:nvSpPr>
+        <p:spPr>
+          <a:xfrm>
+            <a:off x="457200" y="3383280"/>
+            <a:ext cx="8229600" cy="1371600"/>
+          </a:xfrm>
+          <a:prstGeom prst="rect">
+            <a:avLst/>
+          </a:prstGeom>
+          <a:noFill/>
+          <a:ln/>
+        </p:spPr>
+        <p:txBody>
+          <a:bodyPr wrap="square" lIns="0" tIns="0" rIns="0" bIns="0" rtlCol="0" anchor="t"/>
+          <a:lstStyle/>
+          <a:p>
+            <a:pPr indent="0" marL="0">
+              <a:spcAft>
+                <a:spcPts val="400"/>
+              </a:spcAft>
+              <a:buNone/>
+            </a:pPr>
+            <a:r>
+              <a:rPr lang="en-US" sz="1400" b="1" dirty="0">
+                <a:solidFill>
+                  <a:srgbClr val="14213D"/>
+                </a:solidFill>
+                <a:latin typeface="Calibri" pitchFamily="34" charset="0"/>
+                <a:ea typeface="Calibri" pitchFamily="34" charset="-122"/>
+                <a:cs typeface="Calibri" pitchFamily="34" charset="-120"/>
+              </a:rPr>
+              <a:t>Placement noise</a:t>
+            </a:r>
+            <a:endParaRPr lang="en-US" sz="1400" dirty="0"/>
+          </a:p>
+          <a:p>
+            <a:pPr indent="0" marL="0">
+              <a:spcAft>
+                <a:spcPts val="400"/>
+              </a:spcAft>
+              <a:buNone/>
+            </a:pPr>
+            <a:r>
+              <a:rPr lang="en-US" sz="1400" dirty="0">
+                <a:solidFill>
+                  <a:srgbClr val="1F2937"/>
+                </a:solidFill>
+                <a:latin typeface="Calibri" pitchFamily="34" charset="0"/>
+                <a:ea typeface="Calibri" pitchFamily="34" charset="-122"/>
+                <a:cs typeface="Calibri" pitchFamily="34" charset="-120"/>
+              </a:rPr>
+              <a:t>Differences of ±1–3 cycles between cheap variants are not conclusions. Only expf is cleanly separated in the conv layer.</a:t>
+            </a:r>
+            <a:endParaRPr lang="en-US" sz="1400" dirty="0"/>
+          </a:p>
+          <a:p>
+            <a:pPr indent="0" marL="0">
+              <a:spcAft>
+                <a:spcPts val="400"/>
+              </a:spcAft>
+              <a:buNone/>
+            </a:pPr>
+            <a:r>
+              <a:rPr lang="en-US" sz="1400" b="1" dirty="0">
+                <a:solidFill>
+                  <a:srgbClr val="14213D"/>
+                </a:solidFill>
+                <a:latin typeface="Calibri" pitchFamily="34" charset="0"/>
+                <a:ea typeface="Calibri" pitchFamily="34" charset="-122"/>
+                <a:cs typeface="Calibri" pitchFamily="34" charset="-120"/>
+              </a:rPr>
+              <a:t>Cache</a:t>
+            </a:r>
+            <a:endParaRPr lang="en-US" sz="1400" dirty="0"/>
+          </a:p>
+          <a:p>
+            <a:pPr indent="0" marL="0">
+              <a:spcAft>
+                <a:spcPts val="400"/>
+              </a:spcAft>
+              <a:buNone/>
+            </a:pPr>
+            <a:r>
+              <a:rPr lang="en-US" sz="1400" dirty="0">
+                <a:solidFill>
+                  <a:srgbClr val="1F2937"/>
+                </a:solidFill>
+                <a:latin typeface="Calibri" pitchFamily="34" charset="0"/>
+                <a:ea typeface="Calibri" pitchFamily="34" charset="-122"/>
+                <a:cs typeface="Calibri" pitchFamily="34" charset="-120"/>
+              </a:rPr>
+              <a:t>Shrinking L1D to 512 B costs the table 35% in-order, 21% OoO; ≥1 kB costs ≤3%. The win over the table is mainly instruction count.</a:t>
+            </a:r>
+            <a:endParaRPr lang="en-US" sz="1400" dirty="0"/>
+          </a:p>
+        </p:txBody>
+      </p:sp>
+      <p:sp>
+        <p:nvSpPr>
+          <p:cNvPr id="25" name="Slide Number Placeholder 0"/>
+          <p:cNvSpPr>
+            <a:spLocks noGrp="1"/>
+          </p:cNvSpPr>
+          <p:nvPr>
+            <p:ph type="sldNum" sz="quarter" idx="4294967295"/>
+          </p:nvPr>
+        </p:nvSpPr>
+        <p:spPr>
+          <a:xfrm>
+            <a:off x="8412480" y="4754880"/>
+            <a:ext cx="457200" cy="274320"/>
+          </a:xfrm>
+          <a:prstGeom prst="rect">
+            <a:avLst/>
+          </a:prstGeom>
+          <a:extLst>
+            <a:ext uri="{C572A759-6A51-4108-AA02-DFA0A04FC94B}">
+              <ma14:wrappingTextBoxFlag xmlns:ma14="http://schemas.microsoft.com/office/mac/drawingml/2011/main" val="0"/>
+            </a:ext>
+          </a:extLst>
+        </p:spPr>
+        <p:txBody>
+          <a:bodyPr/>
+          <a:lstStyle>
+            <a:lvl1pPr>
+              <a:defRPr sz="1000">
+                <a:solidFill>
+                  <a:srgbClr val="5B6577"/>
+                </a:solidFill>
+                <a:latin typeface="Calibri"/>
+                <a:ea typeface="Calibri"/>
+                <a:cs typeface="Calibri"/>
+              </a:defRPr>
+            </a:lvl1pPr>
+          </a:lstStyle>
+          <a:p>
+            <a:pPr algn="l"/>
+            <a:fld id="{F7021451-1387-4CA6-816F-3879F97B5CBC}" type="slidenum">
+              <a:rPr b="0" lang="en-US"/>
+              <a:t>10</a:t>
+            </a:fld>
+            <a:endParaRPr lang="en-US"/>
+          </a:p>
+        </p:txBody>
+      </p:sp>
+    </p:spTree>
+  </p:cSld>
+  <p:clrMapOvr>
+    <a:masterClrMapping/>
+  </p:clrMapOvr>
+</p:sld>
+</file>
+
+<file path=ppt/slides/slide11.xml><?xml version="1.0" encoding="utf-8"?>
+<p:sld xmlns:a="http://schemas.openxmlformats.org/drawingml/2006/main" xmlns:r="http://schemas.openxmlformats.org/officeDocument/2006/relationships" xmlns:p="http://schemas.openxmlformats.org/presentationml/2006/main">
+  <p:cSld name="Slide 11">
+    <p:spTree>
+      <p:nvGrpSpPr>
+        <p:cNvPr id="1" name=""/>
+        <p:cNvGrpSpPr/>
+        <p:nvPr/>
+      </p:nvGrpSpPr>
+      <p:grpSpPr>
+        <a:xfrm>
+          <a:off x="0" y="0"/>
+          <a:ext cx="0" cy="0"/>
+          <a:chOff x="0" y="0"/>
+          <a:chExt cx="0" cy="0"/>
+        </a:xfrm>
+      </p:grpSpPr>
+      <p:sp>
+        <p:nvSpPr>
+          <p:cNvPr id="2" name="Text 0"/>
+          <p:cNvSpPr/>
+          <p:nvPr>
+            <p:ph idx="100" type="title" hasCustomPrompt="1"/>
+          </p:nvPr>
+        </p:nvSpPr>
+        <p:spPr>
+          <a:xfrm>
+            <a:off x="457200" y="274320"/>
+            <a:ext cx="8229600" cy="731520"/>
+          </a:xfrm>
+          <a:prstGeom prst="rect">
+            <a:avLst/>
+          </a:prstGeom>
+          <a:noFill/>
+          <a:ln/>
+        </p:spPr>
+        <p:txBody>
+          <a:bodyPr wrap="square" lIns="0" tIns="0" rIns="0" bIns="0" rtlCol="0" anchor="ctr"/>
+          <a:lstStyle/>
+          <a:p>
+            <a:pPr algn="l" indent="0" marL="0">
+              <a:buNone/>
+            </a:pPr>
+            <a:r>
+              <a:rPr lang="en-US" sz="2600" b="1" dirty="0">
+                <a:solidFill>
+                  <a:srgbClr val="14213D"/>
+                </a:solidFill>
+                <a:latin typeface="Cambria" pitchFamily="34" charset="0"/>
+                <a:ea typeface="Cambria" pitchFamily="34" charset="-122"/>
+                <a:cs typeface="Cambria" pitchFamily="34" charset="-120"/>
+              </a:rPr>
               <a:t>In YOLOv8n: accuracy cost is within noise</a:t>
             </a:r>
             <a:endParaRPr lang="en-US" sz="2600" dirty="0"/>
@@ -2227,7 +2659,7 @@
       </p:sp>
       <p:graphicFrame>
         <p:nvGraphicFramePr>
-          <p:cNvPr id="11" name="Table 0"/>
+          <p:cNvPr id="12" name="Table 0"/>
           <p:cNvGraphicFramePr>
             <a:graphicFrameLocks noGrp="1"/>
           </p:cNvGraphicFramePr>
@@ -3723,7 +4155,7 @@
             <a:pPr algn="l"/>
             <a:fld id="{F7021451-1387-4CA6-816F-3879F97B5CBC}" type="slidenum">
               <a:rPr b="0" lang="en-US"/>
-              <a:t>10</a:t>
+              <a:t>11</a:t>
             </a:fld>
             <a:endParaRPr lang="en-US"/>
           </a:p>
@@ -3737,9 +4169,9 @@
 </p:sld>
 </file>
 
-<file path=ppt/slides/slide11.xml><?xml version="1.0" encoding="utf-8"?>
+<file path=ppt/slides/slide12.xml><?xml version="1.0" encoding="utf-8"?>
 <p:sld xmlns:a="http://schemas.openxmlformats.org/drawingml/2006/main" xmlns:r="http://schemas.openxmlformats.org/officeDocument/2006/relationships" xmlns:p="http://schemas.openxmlformats.org/presentationml/2006/main">
-  <p:cSld name="Slide 11">
+  <p:cSld name="Slide 12">
     <p:spTree>
       <p:nvGrpSpPr>
         <p:cNvPr id="1" name=""/>
@@ -4209,7 +4641,7 @@
             <a:pPr algn="l"/>
             <a:fld id="{F7021451-1387-4CA6-816F-3879F97B5CBC}" type="slidenum">
               <a:rPr b="0" lang="en-US"/>
-              <a:t>11</a:t>
+              <a:t>12</a:t>
             </a:fld>
             <a:endParaRPr lang="en-US"/>
           </a:p>
@@ -4223,9 +4655,9 @@
 </p:sld>
 </file>
 
-<file path=ppt/slides/slide12.xml><?xml version="1.0" encoding="utf-8"?>
+<file path=ppt/slides/slide13.xml><?xml version="1.0" encoding="utf-8"?>
 <p:sld xmlns:a="http://schemas.openxmlformats.org/drawingml/2006/main" xmlns:r="http://schemas.openxmlformats.org/officeDocument/2006/relationships" xmlns:p="http://schemas.openxmlformats.org/presentationml/2006/main">
-  <p:cSld name="Slide 12">
+  <p:cSld name="Slide 13">
     <p:bg>
       <p:bgPr>
         <a:solidFill>
@@ -5203,669 +5635,1628 @@
                 <a:ea typeface="Cambria" pitchFamily="34" charset="-122"/>
                 <a:cs typeface="Cambria" pitchFamily="34" charset="-120"/>
               </a:rPr>
-              <a:t>The approximation: six segments, no multiplier</a:t>
+              <a:t>Where each architecture concept shows up</a:t>
             </a:r>
             <a:endParaRPr lang="en-US" sz="2600" dirty="0"/>
           </a:p>
         </p:txBody>
       </p:sp>
-      <p:sp>
-        <p:nvSpPr>
-          <p:cNvPr id="4" name="equation panel"/>
-          <p:cNvSpPr/>
-          <p:nvPr/>
-        </p:nvSpPr>
-        <p:spPr>
-          <a:xfrm>
-            <a:off x="457200" y="1188720"/>
-            <a:ext cx="4572000" cy="3200400"/>
-          </a:xfrm>
-          <a:prstGeom prst="rect">
-            <a:avLst/>
-          </a:prstGeom>
-          <a:solidFill>
-            <a:srgbClr val="EEF2F8"/>
-          </a:solidFill>
-          <a:ln w="12700">
-            <a:solidFill>
-              <a:srgbClr val="EEF2F8"/>
-            </a:solidFill>
-            <a:prstDash val="solid"/>
-          </a:ln>
-        </p:spPr>
-      </p:sp>
-      <p:sp>
-        <p:nvSpPr>
-          <p:cNvPr id="5" name="Text 2"/>
-          <p:cNvSpPr txBox="1"/>
-          <p:nvPr/>
-        </p:nvSpPr>
-        <p:spPr>
-          <a:xfrm>
-            <a:off x="685800" y="1371600"/>
-            <a:ext cx="4206240" cy="2194560"/>
-          </a:xfrm>
-          <a:prstGeom prst="rect">
-            <a:avLst/>
-          </a:prstGeom>
-          <a:noFill/>
-          <a:ln/>
-        </p:spPr>
-        <p:txBody>
-          <a:bodyPr wrap="square" lIns="0" tIns="0" rIns="0" bIns="0" rtlCol="0" anchor="t"/>
-          <a:lstStyle/>
-          <a:p>
-            <a:pPr indent="0" marL="0">
-              <a:spcAft>
-                <a:spcPts val="600"/>
-              </a:spcAft>
-              <a:buNone/>
-            </a:pPr>
-            <a:r>
-              <a:rPr lang="en-US" sz="1500" dirty="0">
-                <a:solidFill>
-                  <a:srgbClr val="1F2937"/>
-                </a:solidFill>
-                <a:latin typeface="Courier New" pitchFamily="34" charset="0"/>
-                <a:ea typeface="Courier New" pitchFamily="34" charset="-122"/>
-                <a:cs typeface="Courier New" pitchFamily="34" charset="-120"/>
-              </a:rPr>
-              <a:t>x ≤ −4:        0</a:t>
-            </a:r>
-            <a:endParaRPr lang="en-US" sz="1500" dirty="0"/>
-          </a:p>
-          <a:p>
-            <a:pPr indent="0" marL="0">
-              <a:spcAft>
-                <a:spcPts val="600"/>
-              </a:spcAft>
-              <a:buNone/>
-            </a:pPr>
-            <a:r>
-              <a:rPr lang="en-US" sz="1500" dirty="0">
-                <a:solidFill>
-                  <a:srgbClr val="1F2937"/>
-                </a:solidFill>
-                <a:latin typeface="Courier New" pitchFamily="34" charset="0"/>
-                <a:ea typeface="Courier New" pitchFamily="34" charset="-122"/>
-                <a:cs typeface="Courier New" pitchFamily="34" charset="-120"/>
-              </a:rPr>
-              <a:t>−4 &lt; x ≤ −1:   −x/16 − 0.375</a:t>
-            </a:r>
-            <a:endParaRPr lang="en-US" sz="1500" dirty="0"/>
-          </a:p>
-          <a:p>
-            <a:pPr indent="0" marL="0">
-              <a:spcAft>
-                <a:spcPts val="600"/>
-              </a:spcAft>
-              <a:buNone/>
-            </a:pPr>
-            <a:r>
-              <a:rPr lang="en-US" sz="1500" dirty="0">
-                <a:solidFill>
-                  <a:srgbClr val="1F2937"/>
-                </a:solidFill>
-                <a:latin typeface="Courier New" pitchFamily="34" charset="0"/>
-                <a:ea typeface="Courier New" pitchFamily="34" charset="-122"/>
-                <a:cs typeface="Courier New" pitchFamily="34" charset="-120"/>
-              </a:rPr>
-              <a:t>−1 &lt; x ≤ 0:    x/4 − 0.037</a:t>
-            </a:r>
-            <a:endParaRPr lang="en-US" sz="1500" dirty="0"/>
-          </a:p>
-          <a:p>
-            <a:pPr indent="0" marL="0">
-              <a:spcAft>
-                <a:spcPts val="600"/>
-              </a:spcAft>
-              <a:buNone/>
-            </a:pPr>
-            <a:r>
-              <a:rPr lang="en-US" sz="1500" dirty="0">
-                <a:solidFill>
-                  <a:srgbClr val="1F2937"/>
-                </a:solidFill>
-                <a:latin typeface="Courier New" pitchFamily="34" charset="0"/>
-                <a:ea typeface="Courier New" pitchFamily="34" charset="-122"/>
-                <a:cs typeface="Courier New" pitchFamily="34" charset="-120"/>
-              </a:rPr>
-              <a:t>0 &lt; x ≤ 1:     3x/4 − 0.037</a:t>
-            </a:r>
-            <a:endParaRPr lang="en-US" sz="1500" dirty="0"/>
-          </a:p>
-          <a:p>
-            <a:pPr indent="0" marL="0">
-              <a:spcAft>
-                <a:spcPts val="600"/>
-              </a:spcAft>
-              <a:buNone/>
-            </a:pPr>
-            <a:r>
-              <a:rPr lang="en-US" sz="1500" dirty="0">
-                <a:solidFill>
-                  <a:srgbClr val="1F2937"/>
-                </a:solidFill>
-                <a:latin typeface="Courier New" pitchFamily="34" charset="0"/>
-                <a:ea typeface="Courier New" pitchFamily="34" charset="-122"/>
-                <a:cs typeface="Courier New" pitchFamily="34" charset="-120"/>
-              </a:rPr>
-              <a:t>1 &lt; x ≤ 4:     x + x/16 − 0.375</a:t>
-            </a:r>
-            <a:endParaRPr lang="en-US" sz="1500" dirty="0"/>
-          </a:p>
-          <a:p>
-            <a:pPr indent="0" marL="0">
-              <a:spcAft>
-                <a:spcPts val="600"/>
-              </a:spcAft>
-              <a:buNone/>
-            </a:pPr>
-            <a:r>
-              <a:rPr lang="en-US" sz="1500" dirty="0">
-                <a:solidFill>
-                  <a:srgbClr val="1F2937"/>
-                </a:solidFill>
-                <a:latin typeface="Courier New" pitchFamily="34" charset="0"/>
-                <a:ea typeface="Courier New" pitchFamily="34" charset="-122"/>
-                <a:cs typeface="Courier New" pitchFamily="34" charset="-120"/>
-              </a:rPr>
-              <a:t>x &gt; 4:         x</a:t>
-            </a:r>
-            <a:endParaRPr lang="en-US" sz="1500" dirty="0"/>
-          </a:p>
-        </p:txBody>
-      </p:sp>
-      <p:sp>
-        <p:nvSpPr>
-          <p:cNvPr id="6" name="Text 3"/>
-          <p:cNvSpPr txBox="1"/>
-          <p:nvPr/>
-        </p:nvSpPr>
-        <p:spPr>
-          <a:xfrm>
-            <a:off x="685800" y="3657600"/>
-            <a:ext cx="4114800" cy="640080"/>
-          </a:xfrm>
-          <a:prstGeom prst="rect">
-            <a:avLst/>
-          </a:prstGeom>
-          <a:noFill/>
-          <a:ln/>
-        </p:spPr>
-        <p:txBody>
-          <a:bodyPr wrap="square" lIns="0" tIns="0" rIns="0" bIns="0" rtlCol="0" anchor="t"/>
-          <a:lstStyle/>
-          <a:p>
-            <a:pPr indent="0" marL="0">
-              <a:buNone/>
-            </a:pPr>
-            <a:r>
-              <a:rPr lang="en-US" sz="1400" dirty="0">
-                <a:solidFill>
-                  <a:srgbClr val="5B6577"/>
-                </a:solidFill>
-                <a:latin typeface="Calibri" pitchFamily="34" charset="0"/>
-                <a:ea typeface="Calibri" pitchFamily="34" charset="-122"/>
-                <a:cs typeface="Calibri" pitchFamily="34" charset="-120"/>
-              </a:rPr>
-              <a:t>Divisions are arithmetic shifts. No multiplier, no table, no memory.</a:t>
-            </a:r>
-            <a:endParaRPr lang="en-US" sz="1400" dirty="0"/>
-          </a:p>
-        </p:txBody>
-      </p:sp>
-      <p:sp>
-        <p:nvSpPr>
-          <p:cNvPr id="7" name="stat card"/>
-          <p:cNvSpPr/>
-          <p:nvPr/>
-        </p:nvSpPr>
-        <p:spPr>
-          <a:xfrm>
-            <a:off x="5394960" y="1188720"/>
-            <a:ext cx="1600200" cy="1234440"/>
-          </a:xfrm>
-          <a:prstGeom prst="rect">
-            <a:avLst/>
-          </a:prstGeom>
-          <a:solidFill>
-            <a:srgbClr val="EEF2F8"/>
-          </a:solidFill>
-          <a:ln w="12700">
-            <a:solidFill>
-              <a:srgbClr val="EEF2F8"/>
-            </a:solidFill>
-            <a:prstDash val="solid"/>
-          </a:ln>
-        </p:spPr>
-      </p:sp>
-      <p:sp>
-        <p:nvSpPr>
-          <p:cNvPr id="8" name="Text 5"/>
-          <p:cNvSpPr txBox="1"/>
-          <p:nvPr/>
-        </p:nvSpPr>
-        <p:spPr>
-          <a:xfrm>
-            <a:off x="5532120" y="1298448"/>
-            <a:ext cx="1325880" cy="640080"/>
-          </a:xfrm>
-          <a:prstGeom prst="rect">
-            <a:avLst/>
-          </a:prstGeom>
-          <a:noFill/>
-          <a:ln/>
-        </p:spPr>
-        <p:txBody>
-          <a:bodyPr wrap="square" lIns="0" tIns="0" rIns="0" bIns="0" rtlCol="0" anchor="t"/>
-          <a:lstStyle/>
-          <a:p>
-            <a:pPr indent="0" marL="0">
-              <a:buNone/>
-            </a:pPr>
-            <a:r>
-              <a:rPr lang="en-US" sz="3200" b="1" dirty="0">
-                <a:solidFill>
-                  <a:srgbClr val="2A78D6"/>
-                </a:solidFill>
-                <a:latin typeface="Cambria" pitchFamily="34" charset="0"/>
-                <a:ea typeface="Cambria" pitchFamily="34" charset="-122"/>
-                <a:cs typeface="Cambria" pitchFamily="34" charset="-120"/>
-              </a:rPr>
-              <a:t>0.028</a:t>
-            </a:r>
-            <a:endParaRPr lang="en-US" sz="3200" dirty="0"/>
-          </a:p>
-        </p:txBody>
-      </p:sp>
-      <p:sp>
-        <p:nvSpPr>
-          <p:cNvPr id="9" name="Text 6"/>
-          <p:cNvSpPr txBox="1"/>
-          <p:nvPr/>
-        </p:nvSpPr>
-        <p:spPr>
-          <a:xfrm>
-            <a:off x="5532120" y="1938528"/>
-            <a:ext cx="1325880" cy="457200"/>
-          </a:xfrm>
-          <a:prstGeom prst="rect">
-            <a:avLst/>
-          </a:prstGeom>
-          <a:noFill/>
-          <a:ln/>
-        </p:spPr>
-        <p:txBody>
-          <a:bodyPr wrap="square" lIns="0" tIns="0" rIns="0" bIns="0" rtlCol="0" anchor="t"/>
-          <a:lstStyle/>
-          <a:p>
-            <a:pPr indent="0" marL="0">
-              <a:buNone/>
-            </a:pPr>
-            <a:r>
-              <a:rPr lang="en-US" sz="1200" dirty="0">
-                <a:solidFill>
-                  <a:srgbClr val="5B6577"/>
-                </a:solidFill>
-                <a:latin typeface="Calibri" pitchFamily="34" charset="0"/>
-                <a:ea typeface="Calibri" pitchFamily="34" charset="-122"/>
-                <a:cs typeface="Calibri" pitchFamily="34" charset="-120"/>
-              </a:rPr>
-              <a:t>mean abs. error on (−4,4)</a:t>
-            </a:r>
-            <a:endParaRPr lang="en-US" sz="1200" dirty="0"/>
-          </a:p>
-        </p:txBody>
-      </p:sp>
-      <p:sp>
-        <p:nvSpPr>
-          <p:cNvPr id="10" name="stat card"/>
-          <p:cNvSpPr/>
-          <p:nvPr/>
-        </p:nvSpPr>
-        <p:spPr>
-          <a:xfrm>
-            <a:off x="7086600" y="1188720"/>
-            <a:ext cx="1600200" cy="1234440"/>
-          </a:xfrm>
-          <a:prstGeom prst="rect">
-            <a:avLst/>
-          </a:prstGeom>
-          <a:solidFill>
-            <a:srgbClr val="EEF2F8"/>
-          </a:solidFill>
-          <a:ln w="12700">
-            <a:solidFill>
-              <a:srgbClr val="EEF2F8"/>
-            </a:solidFill>
-            <a:prstDash val="solid"/>
-          </a:ln>
-        </p:spPr>
-      </p:sp>
-      <p:sp>
-        <p:nvSpPr>
-          <p:cNvPr id="11" name="Text 8"/>
-          <p:cNvSpPr txBox="1"/>
-          <p:nvPr/>
-        </p:nvSpPr>
-        <p:spPr>
-          <a:xfrm>
-            <a:off x="7223760" y="1298448"/>
-            <a:ext cx="1325880" cy="640080"/>
-          </a:xfrm>
-          <a:prstGeom prst="rect">
-            <a:avLst/>
-          </a:prstGeom>
-          <a:noFill/>
-          <a:ln/>
-        </p:spPr>
-        <p:txBody>
-          <a:bodyPr wrap="square" lIns="0" tIns="0" rIns="0" bIns="0" rtlCol="0" anchor="t"/>
-          <a:lstStyle/>
-          <a:p>
-            <a:pPr indent="0" marL="0">
-              <a:buNone/>
-            </a:pPr>
-            <a:r>
-              <a:rPr lang="en-US" sz="3200" b="1" dirty="0">
-                <a:solidFill>
-                  <a:srgbClr val="EB6834"/>
-                </a:solidFill>
-                <a:latin typeface="Cambria" pitchFamily="34" charset="0"/>
-                <a:ea typeface="Cambria" pitchFamily="34" charset="-122"/>
-                <a:cs typeface="Cambria" pitchFamily="34" charset="-120"/>
-              </a:rPr>
-              <a:t>0.072</a:t>
-            </a:r>
-            <a:endParaRPr lang="en-US" sz="3200" dirty="0"/>
-          </a:p>
-        </p:txBody>
-      </p:sp>
-      <p:sp>
-        <p:nvSpPr>
-          <p:cNvPr id="12" name="Text 9"/>
-          <p:cNvSpPr txBox="1"/>
-          <p:nvPr/>
-        </p:nvSpPr>
-        <p:spPr>
-          <a:xfrm>
-            <a:off x="7223760" y="1938528"/>
-            <a:ext cx="1325880" cy="457200"/>
-          </a:xfrm>
-          <a:prstGeom prst="rect">
-            <a:avLst/>
-          </a:prstGeom>
-          <a:noFill/>
-          <a:ln/>
-        </p:spPr>
-        <p:txBody>
-          <a:bodyPr wrap="square" lIns="0" tIns="0" rIns="0" bIns="0" rtlCol="0" anchor="t"/>
-          <a:lstStyle/>
-          <a:p>
-            <a:pPr indent="0" marL="0">
-              <a:buNone/>
-            </a:pPr>
-            <a:r>
-              <a:rPr lang="en-US" sz="1200" dirty="0">
-                <a:solidFill>
-                  <a:srgbClr val="5B6577"/>
-                </a:solidFill>
-                <a:latin typeface="Calibri" pitchFamily="34" charset="0"/>
-                <a:ea typeface="Calibri" pitchFamily="34" charset="-122"/>
-                <a:cs typeface="Calibri" pitchFamily="34" charset="-120"/>
-              </a:rPr>
-              <a:t>max error at the edges</a:t>
-            </a:r>
-            <a:endParaRPr lang="en-US" sz="1200" dirty="0"/>
-          </a:p>
-        </p:txBody>
-      </p:sp>
-      <p:sp>
-        <p:nvSpPr>
-          <p:cNvPr id="13" name="stat card"/>
-          <p:cNvSpPr/>
-          <p:nvPr/>
-        </p:nvSpPr>
-        <p:spPr>
-          <a:xfrm>
-            <a:off x="5394960" y="2606040"/>
-            <a:ext cx="1600200" cy="1234440"/>
-          </a:xfrm>
-          <a:prstGeom prst="rect">
-            <a:avLst/>
-          </a:prstGeom>
-          <a:solidFill>
-            <a:srgbClr val="EEF2F8"/>
-          </a:solidFill>
-          <a:ln w="12700">
-            <a:solidFill>
-              <a:srgbClr val="EEF2F8"/>
-            </a:solidFill>
-            <a:prstDash val="solid"/>
-          </a:ln>
-        </p:spPr>
-      </p:sp>
-      <p:sp>
-        <p:nvSpPr>
-          <p:cNvPr id="14" name="Text 11"/>
-          <p:cNvSpPr txBox="1"/>
-          <p:nvPr/>
-        </p:nvSpPr>
-        <p:spPr>
-          <a:xfrm>
-            <a:off x="5532120" y="2715768"/>
-            <a:ext cx="1325880" cy="640080"/>
-          </a:xfrm>
-          <a:prstGeom prst="rect">
-            <a:avLst/>
-          </a:prstGeom>
-          <a:noFill/>
-          <a:ln/>
-        </p:spPr>
-        <p:txBody>
-          <a:bodyPr wrap="square" lIns="0" tIns="0" rIns="0" bIns="0" rtlCol="0" anchor="t"/>
-          <a:lstStyle/>
-          <a:p>
-            <a:pPr indent="0" marL="0">
-              <a:buNone/>
-            </a:pPr>
-            <a:r>
-              <a:rPr lang="en-US" sz="3200" b="1" dirty="0">
-                <a:solidFill>
-                  <a:srgbClr val="1BAF7A"/>
-                </a:solidFill>
-                <a:latin typeface="Cambria" pitchFamily="34" charset="0"/>
-                <a:ea typeface="Cambria" pitchFamily="34" charset="-122"/>
-                <a:cs typeface="Cambria" pitchFamily="34" charset="-120"/>
-              </a:rPr>
-              <a:t>191</a:t>
-            </a:r>
-            <a:endParaRPr lang="en-US" sz="3200" dirty="0"/>
-          </a:p>
-        </p:txBody>
-      </p:sp>
-      <p:sp>
-        <p:nvSpPr>
-          <p:cNvPr id="15" name="Text 12"/>
-          <p:cNvSpPr txBox="1"/>
-          <p:nvPr/>
-        </p:nvSpPr>
-        <p:spPr>
-          <a:xfrm>
-            <a:off x="5532120" y="3355848"/>
-            <a:ext cx="1325880" cy="457200"/>
-          </a:xfrm>
-          <a:prstGeom prst="rect">
-            <a:avLst/>
-          </a:prstGeom>
-          <a:noFill/>
-          <a:ln/>
-        </p:spPr>
-        <p:txBody>
-          <a:bodyPr wrap="square" lIns="0" tIns="0" rIns="0" bIns="0" rtlCol="0" anchor="t"/>
-          <a:lstStyle/>
-          <a:p>
-            <a:pPr indent="0" marL="0">
-              <a:buNone/>
-            </a:pPr>
-            <a:r>
-              <a:rPr lang="en-US" sz="1200" dirty="0">
-                <a:solidFill>
-                  <a:srgbClr val="5B6577"/>
-                </a:solidFill>
-                <a:latin typeface="Calibri" pitchFamily="34" charset="0"/>
-                <a:ea typeface="Calibri" pitchFamily="34" charset="-122"/>
-                <a:cs typeface="Calibri" pitchFamily="34" charset="-120"/>
-              </a:rPr>
-              <a:t>logic elements, 0 multipliers</a:t>
-            </a:r>
-            <a:endParaRPr lang="en-US" sz="1200" dirty="0"/>
-          </a:p>
-        </p:txBody>
-      </p:sp>
-      <p:sp>
-        <p:nvSpPr>
-          <p:cNvPr id="16" name="stat card"/>
-          <p:cNvSpPr/>
-          <p:nvPr/>
-        </p:nvSpPr>
-        <p:spPr>
-          <a:xfrm>
-            <a:off x="7086600" y="2606040"/>
-            <a:ext cx="1600200" cy="1234440"/>
-          </a:xfrm>
-          <a:prstGeom prst="rect">
-            <a:avLst/>
-          </a:prstGeom>
-          <a:solidFill>
-            <a:srgbClr val="EEF2F8"/>
-          </a:solidFill>
-          <a:ln w="12700">
-            <a:solidFill>
-              <a:srgbClr val="EEF2F8"/>
-            </a:solidFill>
-            <a:prstDash val="solid"/>
-          </a:ln>
-        </p:spPr>
-      </p:sp>
-      <p:sp>
-        <p:nvSpPr>
-          <p:cNvPr id="17" name="Text 14"/>
-          <p:cNvSpPr txBox="1"/>
-          <p:nvPr/>
-        </p:nvSpPr>
-        <p:spPr>
-          <a:xfrm>
-            <a:off x="7223760" y="2715768"/>
-            <a:ext cx="1325880" cy="640080"/>
-          </a:xfrm>
-          <a:prstGeom prst="rect">
-            <a:avLst/>
-          </a:prstGeom>
-          <a:noFill/>
-          <a:ln/>
-        </p:spPr>
-        <p:txBody>
-          <a:bodyPr wrap="square" lIns="0" tIns="0" rIns="0" bIns="0" rtlCol="0" anchor="t"/>
-          <a:lstStyle/>
-          <a:p>
-            <a:pPr indent="0" marL="0">
-              <a:buNone/>
-            </a:pPr>
-            <a:r>
-              <a:rPr lang="en-US" sz="2600" b="1" dirty="0">
-                <a:solidFill>
-                  <a:srgbClr val="2A78D6"/>
-                </a:solidFill>
-                <a:latin typeface="Cambria" pitchFamily="34" charset="0"/>
-                <a:ea typeface="Cambria" pitchFamily="34" charset="-122"/>
-                <a:cs typeface="Cambria" pitchFamily="34" charset="-120"/>
-              </a:rPr>
-              <a:t>8.06 ns</a:t>
-            </a:r>
-            <a:endParaRPr lang="en-US" sz="2600" dirty="0"/>
-          </a:p>
-        </p:txBody>
-      </p:sp>
-      <p:sp>
-        <p:nvSpPr>
-          <p:cNvPr id="18" name="Text 15"/>
-          <p:cNvSpPr txBox="1"/>
-          <p:nvPr/>
-        </p:nvSpPr>
-        <p:spPr>
-          <a:xfrm>
-            <a:off x="7223760" y="3355848"/>
-            <a:ext cx="1325880" cy="457200"/>
-          </a:xfrm>
-          <a:prstGeom prst="rect">
-            <a:avLst/>
-          </a:prstGeom>
-          <a:noFill/>
-          <a:ln/>
-        </p:spPr>
-        <p:txBody>
-          <a:bodyPr wrap="square" lIns="0" tIns="0" rIns="0" bIns="0" rtlCol="0" anchor="t"/>
-          <a:lstStyle/>
-          <a:p>
-            <a:pPr indent="0" marL="0">
-              <a:buNone/>
-            </a:pPr>
-            <a:r>
-              <a:rPr lang="en-US" sz="1200" dirty="0">
-                <a:solidFill>
-                  <a:srgbClr val="5B6577"/>
-                </a:solidFill>
-                <a:latin typeface="Calibri" pitchFamily="34" charset="0"/>
-                <a:ea typeface="Calibri" pitchFamily="34" charset="-122"/>
-                <a:cs typeface="Calibri" pitchFamily="34" charset="-120"/>
-              </a:rPr>
-              <a:t>data delay (Quartus)</a:t>
-            </a:r>
-            <a:endParaRPr lang="en-US" sz="1200" dirty="0"/>
-          </a:p>
-        </p:txBody>
-      </p:sp>
-      <p:sp>
-        <p:nvSpPr>
-          <p:cNvPr id="19" name="Text 16"/>
-          <p:cNvSpPr txBox="1"/>
-          <p:nvPr/>
-        </p:nvSpPr>
-        <p:spPr>
-          <a:xfrm>
-            <a:off x="5394960" y="4023360"/>
-            <a:ext cx="3291840" cy="640080"/>
-          </a:xfrm>
-          <a:prstGeom prst="rect">
-            <a:avLst/>
-          </a:prstGeom>
-          <a:noFill/>
-          <a:ln/>
-        </p:spPr>
-        <p:txBody>
-          <a:bodyPr wrap="square" lIns="0" tIns="0" rIns="0" bIns="0" rtlCol="0" anchor="t"/>
-          <a:lstStyle/>
-          <a:p>
-            <a:pPr indent="0" marL="0">
-              <a:buNone/>
-            </a:pPr>
-            <a:r>
-              <a:rPr lang="en-US" sz="1300" dirty="0">
-                <a:solidFill>
-                  <a:srgbClr val="5B6577"/>
-                </a:solidFill>
-                <a:latin typeface="Calibri" pitchFamily="34" charset="0"/>
-                <a:ea typeface="Calibri" pitchFamily="34" charset="-122"/>
-                <a:cs typeface="Calibri" pitchFamily="34" charset="-120"/>
-              </a:rPr>
-              <a:t>Checked on all 65,536 inputs: RTL, C, PyTorch and the gem5 instruction agree with the golden model, 0 mismatches.</a:t>
-            </a:r>
-            <a:endParaRPr lang="en-US" sz="1300" dirty="0"/>
-          </a:p>
-        </p:txBody>
-      </p:sp>
+      <p:graphicFrame>
+        <p:nvGraphicFramePr>
+          <p:cNvPr id="4" name="Table 0"/>
+          <p:cNvGraphicFramePr>
+            <a:graphicFrameLocks noGrp="1"/>
+          </p:cNvGraphicFramePr>
+          <p:nvPr>
+            <p:extLst>
+              <p:ext uri="{D42A27DB-BD31-4B8C-83A1-F6EECF244321}">
+                <p14:modId xmlns:p14="http://schemas.microsoft.com/office/powerpoint/2010/main" val="1579011935"/>
+              </p:ext>
+            </p:extLst>
+          </p:nvPr>
+        </p:nvGraphicFramePr>
+        <p:xfrm>
+          <a:off x="457200" y="1097280"/>
+          <a:ext cx="8229600" cy="914400"/>
+        </p:xfrm>
+        <a:graphic>
+          <a:graphicData uri="http://schemas.openxmlformats.org/drawingml/2006/table">
+            <a:tbl>
+              <a:tblPr/>
+              <a:tblGrid>
+                <a:gridCol w="2468880"/>
+                <a:gridCol w="640080"/>
+                <a:gridCol w="5120640"/>
+              </a:tblGrid>
+              <a:tr h="457200">
+                <a:tc>
+                  <a:txBody>
+                    <a:bodyPr/>
+                    <a:lstStyle/>
+                    <a:p>
+                      <a:pPr indent="0" marL="0">
+                        <a:buNone/>
+                      </a:pPr>
+                      <a:r>
+                        <a:rPr lang="en-US" sz="1300" b="1" dirty="0">
+                          <a:solidFill>
+                            <a:srgbClr val="FFFFFF"/>
+                          </a:solidFill>
+                          <a:latin typeface="Calibri" pitchFamily="34" charset="0"/>
+                          <a:ea typeface="Calibri" pitchFamily="34" charset="-122"/>
+                          <a:cs typeface="Calibri" pitchFamily="34" charset="-120"/>
+                        </a:rPr>
+                        <a:t>Concept</a:t>
+                      </a:r>
+                      <a:endParaRPr lang="en-US" sz="1300" dirty="0">
+                        <a:latin typeface="Calibri" charset="0"/>
+                        <a:ea typeface="Calibri" charset="0"/>
+                        <a:cs typeface="Calibri" charset="0"/>
+                      </a:endParaRPr>
+                    </a:p>
+                  </a:txBody>
+                  <a:tcPr marL="91440" marR="91440" marT="45720" marB="45720">
+                    <a:lnL w="9525" cap="flat" cmpd="sng" algn="ctr">
+                      <a:solidFill>
+                        <a:srgbClr val="D5DCE8"/>
+                      </a:solidFill>
+                      <a:prstDash val="solid"/>
+                      <a:round/>
+                      <a:headEnd type="none" w="med" len="med"/>
+                      <a:tailEnd type="none" w="med" len="med"/>
+                    </a:lnL>
+                    <a:lnR w="9525" cap="flat" cmpd="sng" algn="ctr">
+                      <a:solidFill>
+                        <a:srgbClr val="D5DCE8"/>
+                      </a:solidFill>
+                      <a:prstDash val="solid"/>
+                      <a:round/>
+                      <a:headEnd type="none" w="med" len="med"/>
+                      <a:tailEnd type="none" w="med" len="med"/>
+                    </a:lnR>
+                    <a:lnT w="9525" cap="flat" cmpd="sng" algn="ctr">
+                      <a:solidFill>
+                        <a:srgbClr val="D5DCE8"/>
+                      </a:solidFill>
+                      <a:prstDash val="solid"/>
+                      <a:round/>
+                      <a:headEnd type="none" w="med" len="med"/>
+                      <a:tailEnd type="none" w="med" len="med"/>
+                    </a:lnT>
+                    <a:lnB w="9525" cap="flat" cmpd="sng" algn="ctr">
+                      <a:solidFill>
+                        <a:srgbClr val="D5DCE8"/>
+                      </a:solidFill>
+                      <a:prstDash val="solid"/>
+                      <a:round/>
+                      <a:headEnd type="none" w="med" len="med"/>
+                      <a:tailEnd type="none" w="med" len="med"/>
+                    </a:lnB>
+                    <a:solidFill>
+                      <a:srgbClr val="14213D"/>
+                    </a:solidFill>
+                  </a:tcPr>
+                </a:tc>
+                <a:tc>
+                  <a:txBody>
+                    <a:bodyPr/>
+                    <a:lstStyle/>
+                    <a:p>
+                      <a:pPr indent="0" marL="0">
+                        <a:buNone/>
+                      </a:pPr>
+                      <a:r>
+                        <a:rPr lang="en-US" sz="1300" b="1" dirty="0">
+                          <a:solidFill>
+                            <a:srgbClr val="FFFFFF"/>
+                          </a:solidFill>
+                          <a:latin typeface="Calibri" pitchFamily="34" charset="0"/>
+                          <a:ea typeface="Calibri" pitchFamily="34" charset="-122"/>
+                          <a:cs typeface="Calibri" pitchFamily="34" charset="-120"/>
+                        </a:rPr>
+                        <a:t>Exp.</a:t>
+                      </a:r>
+                      <a:endParaRPr lang="en-US" sz="1300" dirty="0">
+                        <a:latin typeface="Calibri" charset="0"/>
+                        <a:ea typeface="Calibri" charset="0"/>
+                        <a:cs typeface="Calibri" charset="0"/>
+                      </a:endParaRPr>
+                    </a:p>
+                  </a:txBody>
+                  <a:tcPr marL="91440" marR="91440" marT="45720" marB="45720">
+                    <a:lnL w="9525" cap="flat" cmpd="sng" algn="ctr">
+                      <a:solidFill>
+                        <a:srgbClr val="D5DCE8"/>
+                      </a:solidFill>
+                      <a:prstDash val="solid"/>
+                      <a:round/>
+                      <a:headEnd type="none" w="med" len="med"/>
+                      <a:tailEnd type="none" w="med" len="med"/>
+                    </a:lnL>
+                    <a:lnR w="9525" cap="flat" cmpd="sng" algn="ctr">
+                      <a:solidFill>
+                        <a:srgbClr val="D5DCE8"/>
+                      </a:solidFill>
+                      <a:prstDash val="solid"/>
+                      <a:round/>
+                      <a:headEnd type="none" w="med" len="med"/>
+                      <a:tailEnd type="none" w="med" len="med"/>
+                    </a:lnR>
+                    <a:lnT w="9525" cap="flat" cmpd="sng" algn="ctr">
+                      <a:solidFill>
+                        <a:srgbClr val="D5DCE8"/>
+                      </a:solidFill>
+                      <a:prstDash val="solid"/>
+                      <a:round/>
+                      <a:headEnd type="none" w="med" len="med"/>
+                      <a:tailEnd type="none" w="med" len="med"/>
+                    </a:lnT>
+                    <a:lnB w="9525" cap="flat" cmpd="sng" algn="ctr">
+                      <a:solidFill>
+                        <a:srgbClr val="D5DCE8"/>
+                      </a:solidFill>
+                      <a:prstDash val="solid"/>
+                      <a:round/>
+                      <a:headEnd type="none" w="med" len="med"/>
+                      <a:tailEnd type="none" w="med" len="med"/>
+                    </a:lnB>
+                    <a:solidFill>
+                      <a:srgbClr val="14213D"/>
+                    </a:solidFill>
+                  </a:tcPr>
+                </a:tc>
+                <a:tc>
+                  <a:txBody>
+                    <a:bodyPr/>
+                    <a:lstStyle/>
+                    <a:p>
+                      <a:pPr indent="0" marL="0">
+                        <a:buNone/>
+                      </a:pPr>
+                      <a:r>
+                        <a:rPr lang="en-US" sz="1300" b="1" dirty="0">
+                          <a:solidFill>
+                            <a:srgbClr val="FFFFFF"/>
+                          </a:solidFill>
+                          <a:latin typeface="Calibri" pitchFamily="34" charset="0"/>
+                          <a:ea typeface="Calibri" pitchFamily="34" charset="-122"/>
+                          <a:cs typeface="Calibri" pitchFamily="34" charset="-120"/>
+                        </a:rPr>
+                        <a:t>Result</a:t>
+                      </a:r>
+                      <a:endParaRPr lang="en-US" sz="1300" dirty="0">
+                        <a:latin typeface="Calibri" charset="0"/>
+                        <a:ea typeface="Calibri" charset="0"/>
+                        <a:cs typeface="Calibri" charset="0"/>
+                      </a:endParaRPr>
+                    </a:p>
+                  </a:txBody>
+                  <a:tcPr marL="91440" marR="91440" marT="45720" marB="45720">
+                    <a:lnL w="9525" cap="flat" cmpd="sng" algn="ctr">
+                      <a:solidFill>
+                        <a:srgbClr val="D5DCE8"/>
+                      </a:solidFill>
+                      <a:prstDash val="solid"/>
+                      <a:round/>
+                      <a:headEnd type="none" w="med" len="med"/>
+                      <a:tailEnd type="none" w="med" len="med"/>
+                    </a:lnL>
+                    <a:lnR w="9525" cap="flat" cmpd="sng" algn="ctr">
+                      <a:solidFill>
+                        <a:srgbClr val="D5DCE8"/>
+                      </a:solidFill>
+                      <a:prstDash val="solid"/>
+                      <a:round/>
+                      <a:headEnd type="none" w="med" len="med"/>
+                      <a:tailEnd type="none" w="med" len="med"/>
+                    </a:lnR>
+                    <a:lnT w="9525" cap="flat" cmpd="sng" algn="ctr">
+                      <a:solidFill>
+                        <a:srgbClr val="D5DCE8"/>
+                      </a:solidFill>
+                      <a:prstDash val="solid"/>
+                      <a:round/>
+                      <a:headEnd type="none" w="med" len="med"/>
+                      <a:tailEnd type="none" w="med" len="med"/>
+                    </a:lnT>
+                    <a:lnB w="9525" cap="flat" cmpd="sng" algn="ctr">
+                      <a:solidFill>
+                        <a:srgbClr val="D5DCE8"/>
+                      </a:solidFill>
+                      <a:prstDash val="solid"/>
+                      <a:round/>
+                      <a:headEnd type="none" w="med" len="med"/>
+                      <a:tailEnd type="none" w="med" len="med"/>
+                    </a:lnB>
+                    <a:solidFill>
+                      <a:srgbClr val="14213D"/>
+                    </a:solidFill>
+                  </a:tcPr>
+                </a:tc>
+              </a:tr>
+              <a:tr h="457200">
+                <a:tc>
+                  <a:txBody>
+                    <a:bodyPr/>
+                    <a:lstStyle/>
+                    <a:p>
+                      <a:pPr indent="0" marL="0">
+                        <a:buNone/>
+                      </a:pPr>
+                      <a:r>
+                        <a:rPr lang="en-US" sz="1300" b="1" dirty="0">
+                          <a:solidFill>
+                            <a:srgbClr val="14213D"/>
+                          </a:solidFill>
+                          <a:latin typeface="Calibri" pitchFamily="34" charset="0"/>
+                          <a:ea typeface="Calibri" pitchFamily="34" charset="-122"/>
+                          <a:cs typeface="Calibri" pitchFamily="34" charset="-120"/>
+                        </a:rPr>
+                        <a:t>Iron law (IC × CPI × clock)</a:t>
+                      </a:r>
+                      <a:endParaRPr lang="en-US" sz="1300" dirty="0">
+                        <a:latin typeface="Calibri" charset="0"/>
+                        <a:ea typeface="Calibri" charset="0"/>
+                        <a:cs typeface="Calibri" charset="0"/>
+                      </a:endParaRPr>
+                    </a:p>
+                  </a:txBody>
+                  <a:tcPr marL="91440" marR="91440" marT="45720" marB="45720" anchor="ctr">
+                    <a:lnL w="9525" cap="flat" cmpd="sng" algn="ctr">
+                      <a:solidFill>
+                        <a:srgbClr val="D5DCE8"/>
+                      </a:solidFill>
+                      <a:prstDash val="solid"/>
+                      <a:round/>
+                      <a:headEnd type="none" w="med" len="med"/>
+                      <a:tailEnd type="none" w="med" len="med"/>
+                    </a:lnL>
+                    <a:lnR w="9525" cap="flat" cmpd="sng" algn="ctr">
+                      <a:solidFill>
+                        <a:srgbClr val="D5DCE8"/>
+                      </a:solidFill>
+                      <a:prstDash val="solid"/>
+                      <a:round/>
+                      <a:headEnd type="none" w="med" len="med"/>
+                      <a:tailEnd type="none" w="med" len="med"/>
+                    </a:lnR>
+                    <a:lnT w="9525" cap="flat" cmpd="sng" algn="ctr">
+                      <a:solidFill>
+                        <a:srgbClr val="D5DCE8"/>
+                      </a:solidFill>
+                      <a:prstDash val="solid"/>
+                      <a:round/>
+                      <a:headEnd type="none" w="med" len="med"/>
+                      <a:tailEnd type="none" w="med" len="med"/>
+                    </a:lnT>
+                    <a:lnB w="9525" cap="flat" cmpd="sng" algn="ctr">
+                      <a:solidFill>
+                        <a:srgbClr val="D5DCE8"/>
+                      </a:solidFill>
+                      <a:prstDash val="solid"/>
+                      <a:round/>
+                      <a:headEnd type="none" w="med" len="med"/>
+                      <a:tailEnd type="none" w="med" len="med"/>
+                    </a:lnB>
+                  </a:tcPr>
+                </a:tc>
+                <a:tc>
+                  <a:txBody>
+                    <a:bodyPr/>
+                    <a:lstStyle/>
+                    <a:p>
+                      <a:pPr algn="ctr" indent="0" marL="0">
+                        <a:buNone/>
+                      </a:pPr>
+                      <a:r>
+                        <a:rPr lang="en-US" sz="1300" dirty="0">
+                          <a:solidFill>
+                            <a:srgbClr val="1F2937"/>
+                          </a:solidFill>
+                          <a:latin typeface="Calibri" pitchFamily="34" charset="0"/>
+                          <a:ea typeface="Calibri" pitchFamily="34" charset="-122"/>
+                          <a:cs typeface="Calibri" pitchFamily="34" charset="-120"/>
+                        </a:rPr>
+                        <a:t>E1</a:t>
+                      </a:r>
+                      <a:endParaRPr lang="en-US" sz="1300" dirty="0">
+                        <a:latin typeface="Calibri" charset="0"/>
+                        <a:ea typeface="Calibri" charset="0"/>
+                        <a:cs typeface="Calibri" charset="0"/>
+                      </a:endParaRPr>
+                    </a:p>
+                  </a:txBody>
+                  <a:tcPr marL="91440" marR="91440" marT="45720" marB="45720" anchor="ctr">
+                    <a:lnL w="9525" cap="flat" cmpd="sng" algn="ctr">
+                      <a:solidFill>
+                        <a:srgbClr val="D5DCE8"/>
+                      </a:solidFill>
+                      <a:prstDash val="solid"/>
+                      <a:round/>
+                      <a:headEnd type="none" w="med" len="med"/>
+                      <a:tailEnd type="none" w="med" len="med"/>
+                    </a:lnL>
+                    <a:lnR w="9525" cap="flat" cmpd="sng" algn="ctr">
+                      <a:solidFill>
+                        <a:srgbClr val="D5DCE8"/>
+                      </a:solidFill>
+                      <a:prstDash val="solid"/>
+                      <a:round/>
+                      <a:headEnd type="none" w="med" len="med"/>
+                      <a:tailEnd type="none" w="med" len="med"/>
+                    </a:lnR>
+                    <a:lnT w="9525" cap="flat" cmpd="sng" algn="ctr">
+                      <a:solidFill>
+                        <a:srgbClr val="D5DCE8"/>
+                      </a:solidFill>
+                      <a:prstDash val="solid"/>
+                      <a:round/>
+                      <a:headEnd type="none" w="med" len="med"/>
+                      <a:tailEnd type="none" w="med" len="med"/>
+                    </a:lnT>
+                    <a:lnB w="9525" cap="flat" cmpd="sng" algn="ctr">
+                      <a:solidFill>
+                        <a:srgbClr val="D5DCE8"/>
+                      </a:solidFill>
+                      <a:prstDash val="solid"/>
+                      <a:round/>
+                      <a:headEnd type="none" w="med" len="med"/>
+                      <a:tailEnd type="none" w="med" len="med"/>
+                    </a:lnB>
+                  </a:tcPr>
+                </a:tc>
+                <a:tc>
+                  <a:txBody>
+                    <a:bodyPr/>
+                    <a:lstStyle/>
+                    <a:p>
+                      <a:pPr indent="0" marL="0">
+                        <a:buNone/>
+                      </a:pPr>
+                      <a:r>
+                        <a:rPr lang="en-US" sz="1300" dirty="0">
+                          <a:solidFill>
+                            <a:srgbClr val="1F2937"/>
+                          </a:solidFill>
+                          <a:latin typeface="Calibri" pitchFamily="34" charset="0"/>
+                          <a:ea typeface="Calibri" pitchFamily="34" charset="-122"/>
+                          <a:cs typeface="Calibri" pitchFamily="34" charset="-120"/>
+                        </a:rPr>
+                        <a:t>Instructions 114 → 6 per activation; CPI alone misleads</a:t>
+                      </a:r>
+                      <a:endParaRPr lang="en-US" sz="1300" dirty="0">
+                        <a:latin typeface="Calibri" charset="0"/>
+                        <a:ea typeface="Calibri" charset="0"/>
+                        <a:cs typeface="Calibri" charset="0"/>
+                      </a:endParaRPr>
+                    </a:p>
+                  </a:txBody>
+                  <a:tcPr marL="91440" marR="91440" marT="45720" marB="45720" anchor="ctr">
+                    <a:lnL w="9525" cap="flat" cmpd="sng" algn="ctr">
+                      <a:solidFill>
+                        <a:srgbClr val="D5DCE8"/>
+                      </a:solidFill>
+                      <a:prstDash val="solid"/>
+                      <a:round/>
+                      <a:headEnd type="none" w="med" len="med"/>
+                      <a:tailEnd type="none" w="med" len="med"/>
+                    </a:lnL>
+                    <a:lnR w="9525" cap="flat" cmpd="sng" algn="ctr">
+                      <a:solidFill>
+                        <a:srgbClr val="D5DCE8"/>
+                      </a:solidFill>
+                      <a:prstDash val="solid"/>
+                      <a:round/>
+                      <a:headEnd type="none" w="med" len="med"/>
+                      <a:tailEnd type="none" w="med" len="med"/>
+                    </a:lnR>
+                    <a:lnT w="9525" cap="flat" cmpd="sng" algn="ctr">
+                      <a:solidFill>
+                        <a:srgbClr val="D5DCE8"/>
+                      </a:solidFill>
+                      <a:prstDash val="solid"/>
+                      <a:round/>
+                      <a:headEnd type="none" w="med" len="med"/>
+                      <a:tailEnd type="none" w="med" len="med"/>
+                    </a:lnT>
+                    <a:lnB w="9525" cap="flat" cmpd="sng" algn="ctr">
+                      <a:solidFill>
+                        <a:srgbClr val="D5DCE8"/>
+                      </a:solidFill>
+                      <a:prstDash val="solid"/>
+                      <a:round/>
+                      <a:headEnd type="none" w="med" len="med"/>
+                      <a:tailEnd type="none" w="med" len="med"/>
+                    </a:lnB>
+                  </a:tcPr>
+                </a:tc>
+              </a:tr>
+              <a:tr h="457200">
+                <a:tc>
+                  <a:txBody>
+                    <a:bodyPr/>
+                    <a:lstStyle/>
+                    <a:p>
+                      <a:pPr indent="0" marL="0">
+                        <a:buNone/>
+                      </a:pPr>
+                      <a:r>
+                        <a:rPr lang="en-US" sz="1300" b="1" dirty="0">
+                          <a:solidFill>
+                            <a:srgbClr val="14213D"/>
+                          </a:solidFill>
+                          <a:latin typeface="Calibri" pitchFamily="34" charset="0"/>
+                          <a:ea typeface="Calibri" pitchFamily="34" charset="-122"/>
+                          <a:cs typeface="Calibri" pitchFamily="34" charset="-120"/>
+                        </a:rPr>
+                        <a:t>Amdahl's law</a:t>
+                      </a:r>
+                      <a:endParaRPr lang="en-US" sz="1300" dirty="0">
+                        <a:latin typeface="Calibri" charset="0"/>
+                        <a:ea typeface="Calibri" charset="0"/>
+                        <a:cs typeface="Calibri" charset="0"/>
+                      </a:endParaRPr>
+                    </a:p>
+                  </a:txBody>
+                  <a:tcPr marL="91440" marR="91440" marT="45720" marB="45720" anchor="ctr">
+                    <a:lnL w="9525" cap="flat" cmpd="sng" algn="ctr">
+                      <a:solidFill>
+                        <a:srgbClr val="D5DCE8"/>
+                      </a:solidFill>
+                      <a:prstDash val="solid"/>
+                      <a:round/>
+                      <a:headEnd type="none" w="med" len="med"/>
+                      <a:tailEnd type="none" w="med" len="med"/>
+                    </a:lnL>
+                    <a:lnR w="9525" cap="flat" cmpd="sng" algn="ctr">
+                      <a:solidFill>
+                        <a:srgbClr val="D5DCE8"/>
+                      </a:solidFill>
+                      <a:prstDash val="solid"/>
+                      <a:round/>
+                      <a:headEnd type="none" w="med" len="med"/>
+                      <a:tailEnd type="none" w="med" len="med"/>
+                    </a:lnR>
+                    <a:lnT w="9525" cap="flat" cmpd="sng" algn="ctr">
+                      <a:solidFill>
+                        <a:srgbClr val="D5DCE8"/>
+                      </a:solidFill>
+                      <a:prstDash val="solid"/>
+                      <a:round/>
+                      <a:headEnd type="none" w="med" len="med"/>
+                      <a:tailEnd type="none" w="med" len="med"/>
+                    </a:lnT>
+                    <a:lnB w="9525" cap="flat" cmpd="sng" algn="ctr">
+                      <a:solidFill>
+                        <a:srgbClr val="D5DCE8"/>
+                      </a:solidFill>
+                      <a:prstDash val="solid"/>
+                      <a:round/>
+                      <a:headEnd type="none" w="med" len="med"/>
+                      <a:tailEnd type="none" w="med" len="med"/>
+                    </a:lnB>
+                  </a:tcPr>
+                </a:tc>
+                <a:tc>
+                  <a:txBody>
+                    <a:bodyPr/>
+                    <a:lstStyle/>
+                    <a:p>
+                      <a:pPr algn="ctr" indent="0" marL="0">
+                        <a:buNone/>
+                      </a:pPr>
+                      <a:r>
+                        <a:rPr lang="en-US" sz="1300" dirty="0">
+                          <a:solidFill>
+                            <a:srgbClr val="1F2937"/>
+                          </a:solidFill>
+                          <a:latin typeface="Calibri" pitchFamily="34" charset="0"/>
+                          <a:ea typeface="Calibri" pitchFamily="34" charset="-122"/>
+                          <a:cs typeface="Calibri" pitchFamily="34" charset="-120"/>
+                        </a:rPr>
+                        <a:t>E5</a:t>
+                      </a:r>
+                      <a:endParaRPr lang="en-US" sz="1300" dirty="0">
+                        <a:latin typeface="Calibri" charset="0"/>
+                        <a:ea typeface="Calibri" charset="0"/>
+                        <a:cs typeface="Calibri" charset="0"/>
+                      </a:endParaRPr>
+                    </a:p>
+                  </a:txBody>
+                  <a:tcPr marL="91440" marR="91440" marT="45720" marB="45720" anchor="ctr">
+                    <a:lnL w="9525" cap="flat" cmpd="sng" algn="ctr">
+                      <a:solidFill>
+                        <a:srgbClr val="D5DCE8"/>
+                      </a:solidFill>
+                      <a:prstDash val="solid"/>
+                      <a:round/>
+                      <a:headEnd type="none" w="med" len="med"/>
+                      <a:tailEnd type="none" w="med" len="med"/>
+                    </a:lnL>
+                    <a:lnR w="9525" cap="flat" cmpd="sng" algn="ctr">
+                      <a:solidFill>
+                        <a:srgbClr val="D5DCE8"/>
+                      </a:solidFill>
+                      <a:prstDash val="solid"/>
+                      <a:round/>
+                      <a:headEnd type="none" w="med" len="med"/>
+                      <a:tailEnd type="none" w="med" len="med"/>
+                    </a:lnR>
+                    <a:lnT w="9525" cap="flat" cmpd="sng" algn="ctr">
+                      <a:solidFill>
+                        <a:srgbClr val="D5DCE8"/>
+                      </a:solidFill>
+                      <a:prstDash val="solid"/>
+                      <a:round/>
+                      <a:headEnd type="none" w="med" len="med"/>
+                      <a:tailEnd type="none" w="med" len="med"/>
+                    </a:lnT>
+                    <a:lnB w="9525" cap="flat" cmpd="sng" algn="ctr">
+                      <a:solidFill>
+                        <a:srgbClr val="D5DCE8"/>
+                      </a:solidFill>
+                      <a:prstDash val="solid"/>
+                      <a:round/>
+                      <a:headEnd type="none" w="med" len="med"/>
+                      <a:tailEnd type="none" w="med" len="med"/>
+                    </a:lnB>
+                  </a:tcPr>
+                </a:tc>
+                <a:tc>
+                  <a:txBody>
+                    <a:bodyPr/>
+                    <a:lstStyle/>
+                    <a:p>
+                      <a:pPr indent="0" marL="0">
+                        <a:buNone/>
+                      </a:pPr>
+                      <a:r>
+                        <a:rPr lang="en-US" sz="1300" dirty="0">
+                          <a:solidFill>
+                            <a:srgbClr val="1F2937"/>
+                          </a:solidFill>
+                          <a:latin typeface="Calibri" pitchFamily="34" charset="0"/>
+                          <a:ea typeface="Calibri" pitchFamily="34" charset="-122"/>
+                          <a:cs typeface="Calibri" pitchFamily="34" charset="-120"/>
+                        </a:rPr>
+                        <a:t>Whole YOLOv8n ≈ 1.1× on a scalar core; 2.5–2.7× if MACs are 16× faster</a:t>
+                      </a:r>
+                      <a:endParaRPr lang="en-US" sz="1300" dirty="0">
+                        <a:latin typeface="Calibri" charset="0"/>
+                        <a:ea typeface="Calibri" charset="0"/>
+                        <a:cs typeface="Calibri" charset="0"/>
+                      </a:endParaRPr>
+                    </a:p>
+                  </a:txBody>
+                  <a:tcPr marL="91440" marR="91440" marT="45720" marB="45720" anchor="ctr">
+                    <a:lnL w="9525" cap="flat" cmpd="sng" algn="ctr">
+                      <a:solidFill>
+                        <a:srgbClr val="D5DCE8"/>
+                      </a:solidFill>
+                      <a:prstDash val="solid"/>
+                      <a:round/>
+                      <a:headEnd type="none" w="med" len="med"/>
+                      <a:tailEnd type="none" w="med" len="med"/>
+                    </a:lnL>
+                    <a:lnR w="9525" cap="flat" cmpd="sng" algn="ctr">
+                      <a:solidFill>
+                        <a:srgbClr val="D5DCE8"/>
+                      </a:solidFill>
+                      <a:prstDash val="solid"/>
+                      <a:round/>
+                      <a:headEnd type="none" w="med" len="med"/>
+                      <a:tailEnd type="none" w="med" len="med"/>
+                    </a:lnR>
+                    <a:lnT w="9525" cap="flat" cmpd="sng" algn="ctr">
+                      <a:solidFill>
+                        <a:srgbClr val="D5DCE8"/>
+                      </a:solidFill>
+                      <a:prstDash val="solid"/>
+                      <a:round/>
+                      <a:headEnd type="none" w="med" len="med"/>
+                      <a:tailEnd type="none" w="med" len="med"/>
+                    </a:lnT>
+                    <a:lnB w="9525" cap="flat" cmpd="sng" algn="ctr">
+                      <a:solidFill>
+                        <a:srgbClr val="D5DCE8"/>
+                      </a:solidFill>
+                      <a:prstDash val="solid"/>
+                      <a:round/>
+                      <a:headEnd type="none" w="med" len="med"/>
+                      <a:tailEnd type="none" w="med" len="med"/>
+                    </a:lnB>
+                  </a:tcPr>
+                </a:tc>
+              </a:tr>
+              <a:tr h="457200">
+                <a:tc>
+                  <a:txBody>
+                    <a:bodyPr/>
+                    <a:lstStyle/>
+                    <a:p>
+                      <a:pPr indent="0" marL="0">
+                        <a:buNone/>
+                      </a:pPr>
+                      <a:r>
+                        <a:rPr lang="en-US" sz="1300" b="1" dirty="0">
+                          <a:solidFill>
+                            <a:srgbClr val="14213D"/>
+                          </a:solidFill>
+                          <a:latin typeface="Calibri" pitchFamily="34" charset="0"/>
+                          <a:ea typeface="Calibri" pitchFamily="34" charset="-122"/>
+                          <a:cs typeface="Calibri" pitchFamily="34" charset="-120"/>
+                        </a:rPr>
+                        <a:t>ISA design</a:t>
+                      </a:r>
+                      <a:endParaRPr lang="en-US" sz="1300" dirty="0">
+                        <a:latin typeface="Calibri" charset="0"/>
+                        <a:ea typeface="Calibri" charset="0"/>
+                        <a:cs typeface="Calibri" charset="0"/>
+                      </a:endParaRPr>
+                    </a:p>
+                  </a:txBody>
+                  <a:tcPr marL="91440" marR="91440" marT="45720" marB="45720" anchor="ctr">
+                    <a:lnL w="9525" cap="flat" cmpd="sng" algn="ctr">
+                      <a:solidFill>
+                        <a:srgbClr val="D5DCE8"/>
+                      </a:solidFill>
+                      <a:prstDash val="solid"/>
+                      <a:round/>
+                      <a:headEnd type="none" w="med" len="med"/>
+                      <a:tailEnd type="none" w="med" len="med"/>
+                    </a:lnL>
+                    <a:lnR w="9525" cap="flat" cmpd="sng" algn="ctr">
+                      <a:solidFill>
+                        <a:srgbClr val="D5DCE8"/>
+                      </a:solidFill>
+                      <a:prstDash val="solid"/>
+                      <a:round/>
+                      <a:headEnd type="none" w="med" len="med"/>
+                      <a:tailEnd type="none" w="med" len="med"/>
+                    </a:lnR>
+                    <a:lnT w="9525" cap="flat" cmpd="sng" algn="ctr">
+                      <a:solidFill>
+                        <a:srgbClr val="D5DCE8"/>
+                      </a:solidFill>
+                      <a:prstDash val="solid"/>
+                      <a:round/>
+                      <a:headEnd type="none" w="med" len="med"/>
+                      <a:tailEnd type="none" w="med" len="med"/>
+                    </a:lnT>
+                    <a:lnB w="9525" cap="flat" cmpd="sng" algn="ctr">
+                      <a:solidFill>
+                        <a:srgbClr val="D5DCE8"/>
+                      </a:solidFill>
+                      <a:prstDash val="solid"/>
+                      <a:round/>
+                      <a:headEnd type="none" w="med" len="med"/>
+                      <a:tailEnd type="none" w="med" len="med"/>
+                    </a:lnB>
+                  </a:tcPr>
+                </a:tc>
+                <a:tc>
+                  <a:txBody>
+                    <a:bodyPr/>
+                    <a:lstStyle/>
+                    <a:p>
+                      <a:pPr algn="ctr" indent="0" marL="0">
+                        <a:buNone/>
+                      </a:pPr>
+                      <a:r>
+                        <a:rPr lang="en-US" sz="1300" dirty="0">
+                          <a:solidFill>
+                            <a:srgbClr val="1F2937"/>
+                          </a:solidFill>
+                          <a:latin typeface="Calibri" pitchFamily="34" charset="0"/>
+                          <a:ea typeface="Calibri" pitchFamily="34" charset="-122"/>
+                          <a:cs typeface="Calibri" pitchFamily="34" charset="-120"/>
+                        </a:rPr>
+                        <a:t>—</a:t>
+                      </a:r>
+                      <a:endParaRPr lang="en-US" sz="1300" dirty="0">
+                        <a:latin typeface="Calibri" charset="0"/>
+                        <a:ea typeface="Calibri" charset="0"/>
+                        <a:cs typeface="Calibri" charset="0"/>
+                      </a:endParaRPr>
+                    </a:p>
+                  </a:txBody>
+                  <a:tcPr marL="91440" marR="91440" marT="45720" marB="45720" anchor="ctr">
+                    <a:lnL w="9525" cap="flat" cmpd="sng" algn="ctr">
+                      <a:solidFill>
+                        <a:srgbClr val="D5DCE8"/>
+                      </a:solidFill>
+                      <a:prstDash val="solid"/>
+                      <a:round/>
+                      <a:headEnd type="none" w="med" len="med"/>
+                      <a:tailEnd type="none" w="med" len="med"/>
+                    </a:lnL>
+                    <a:lnR w="9525" cap="flat" cmpd="sng" algn="ctr">
+                      <a:solidFill>
+                        <a:srgbClr val="D5DCE8"/>
+                      </a:solidFill>
+                      <a:prstDash val="solid"/>
+                      <a:round/>
+                      <a:headEnd type="none" w="med" len="med"/>
+                      <a:tailEnd type="none" w="med" len="med"/>
+                    </a:lnR>
+                    <a:lnT w="9525" cap="flat" cmpd="sng" algn="ctr">
+                      <a:solidFill>
+                        <a:srgbClr val="D5DCE8"/>
+                      </a:solidFill>
+                      <a:prstDash val="solid"/>
+                      <a:round/>
+                      <a:headEnd type="none" w="med" len="med"/>
+                      <a:tailEnd type="none" w="med" len="med"/>
+                    </a:lnT>
+                    <a:lnB w="9525" cap="flat" cmpd="sng" algn="ctr">
+                      <a:solidFill>
+                        <a:srgbClr val="D5DCE8"/>
+                      </a:solidFill>
+                      <a:prstDash val="solid"/>
+                      <a:round/>
+                      <a:headEnd type="none" w="med" len="med"/>
+                      <a:tailEnd type="none" w="med" len="med"/>
+                    </a:lnB>
+                  </a:tcPr>
+                </a:tc>
+                <a:tc>
+                  <a:txBody>
+                    <a:bodyPr/>
+                    <a:lstStyle/>
+                    <a:p>
+                      <a:pPr indent="0" marL="0">
+                        <a:buNone/>
+                      </a:pPr>
+                      <a:r>
+                        <a:rPr lang="en-US" sz="1300" dirty="0">
+                          <a:solidFill>
+                            <a:srgbClr val="1F2937"/>
+                          </a:solidFill>
+                          <a:latin typeface="Calibri" pitchFamily="34" charset="0"/>
+                          <a:ea typeface="Calibri" pitchFamily="34" charset="-122"/>
+                          <a:cs typeface="Calibri" pitchFamily="34" charset="-120"/>
+                        </a:rPr>
+                        <a:t>Custom-0 R-type, rd = f4(rs1), 16-bit Q6.10 operand</a:t>
+                      </a:r>
+                      <a:endParaRPr lang="en-US" sz="1300" dirty="0">
+                        <a:latin typeface="Calibri" charset="0"/>
+                        <a:ea typeface="Calibri" charset="0"/>
+                        <a:cs typeface="Calibri" charset="0"/>
+                      </a:endParaRPr>
+                    </a:p>
+                  </a:txBody>
+                  <a:tcPr marL="91440" marR="91440" marT="45720" marB="45720" anchor="ctr">
+                    <a:lnL w="9525" cap="flat" cmpd="sng" algn="ctr">
+                      <a:solidFill>
+                        <a:srgbClr val="D5DCE8"/>
+                      </a:solidFill>
+                      <a:prstDash val="solid"/>
+                      <a:round/>
+                      <a:headEnd type="none" w="med" len="med"/>
+                      <a:tailEnd type="none" w="med" len="med"/>
+                    </a:lnL>
+                    <a:lnR w="9525" cap="flat" cmpd="sng" algn="ctr">
+                      <a:solidFill>
+                        <a:srgbClr val="D5DCE8"/>
+                      </a:solidFill>
+                      <a:prstDash val="solid"/>
+                      <a:round/>
+                      <a:headEnd type="none" w="med" len="med"/>
+                      <a:tailEnd type="none" w="med" len="med"/>
+                    </a:lnR>
+                    <a:lnT w="9525" cap="flat" cmpd="sng" algn="ctr">
+                      <a:solidFill>
+                        <a:srgbClr val="D5DCE8"/>
+                      </a:solidFill>
+                      <a:prstDash val="solid"/>
+                      <a:round/>
+                      <a:headEnd type="none" w="med" len="med"/>
+                      <a:tailEnd type="none" w="med" len="med"/>
+                    </a:lnT>
+                    <a:lnB w="9525" cap="flat" cmpd="sng" algn="ctr">
+                      <a:solidFill>
+                        <a:srgbClr val="D5DCE8"/>
+                      </a:solidFill>
+                      <a:prstDash val="solid"/>
+                      <a:round/>
+                      <a:headEnd type="none" w="med" len="med"/>
+                      <a:tailEnd type="none" w="med" len="med"/>
+                    </a:lnB>
+                  </a:tcPr>
+                </a:tc>
+              </a:tr>
+              <a:tr h="457200">
+                <a:tc>
+                  <a:txBody>
+                    <a:bodyPr/>
+                    <a:lstStyle/>
+                    <a:p>
+                      <a:pPr indent="0" marL="0">
+                        <a:buNone/>
+                      </a:pPr>
+                      <a:r>
+                        <a:rPr lang="en-US" sz="1300" b="1" dirty="0">
+                          <a:solidFill>
+                            <a:srgbClr val="14213D"/>
+                          </a:solidFill>
+                          <a:latin typeface="Calibri" pitchFamily="34" charset="0"/>
+                          <a:ea typeface="Calibri" pitchFamily="34" charset="-122"/>
+                          <a:cs typeface="Calibri" pitchFamily="34" charset="-120"/>
+                        </a:rPr>
+                        <a:t>Structural / data hazards</a:t>
+                      </a:r>
+                      <a:endParaRPr lang="en-US" sz="1300" dirty="0">
+                        <a:latin typeface="Calibri" charset="0"/>
+                        <a:ea typeface="Calibri" charset="0"/>
+                        <a:cs typeface="Calibri" charset="0"/>
+                      </a:endParaRPr>
+                    </a:p>
+                  </a:txBody>
+                  <a:tcPr marL="91440" marR="91440" marT="45720" marB="45720" anchor="ctr">
+                    <a:lnL w="9525" cap="flat" cmpd="sng" algn="ctr">
+                      <a:solidFill>
+                        <a:srgbClr val="D5DCE8"/>
+                      </a:solidFill>
+                      <a:prstDash val="solid"/>
+                      <a:round/>
+                      <a:headEnd type="none" w="med" len="med"/>
+                      <a:tailEnd type="none" w="med" len="med"/>
+                    </a:lnL>
+                    <a:lnR w="9525" cap="flat" cmpd="sng" algn="ctr">
+                      <a:solidFill>
+                        <a:srgbClr val="D5DCE8"/>
+                      </a:solidFill>
+                      <a:prstDash val="solid"/>
+                      <a:round/>
+                      <a:headEnd type="none" w="med" len="med"/>
+                      <a:tailEnd type="none" w="med" len="med"/>
+                    </a:lnR>
+                    <a:lnT w="9525" cap="flat" cmpd="sng" algn="ctr">
+                      <a:solidFill>
+                        <a:srgbClr val="D5DCE8"/>
+                      </a:solidFill>
+                      <a:prstDash val="solid"/>
+                      <a:round/>
+                      <a:headEnd type="none" w="med" len="med"/>
+                      <a:tailEnd type="none" w="med" len="med"/>
+                    </a:lnT>
+                    <a:lnB w="9525" cap="flat" cmpd="sng" algn="ctr">
+                      <a:solidFill>
+                        <a:srgbClr val="D5DCE8"/>
+                      </a:solidFill>
+                      <a:prstDash val="solid"/>
+                      <a:round/>
+                      <a:headEnd type="none" w="med" len="med"/>
+                      <a:tailEnd type="none" w="med" len="med"/>
+                    </a:lnB>
+                  </a:tcPr>
+                </a:tc>
+                <a:tc>
+                  <a:txBody>
+                    <a:bodyPr/>
+                    <a:lstStyle/>
+                    <a:p>
+                      <a:pPr algn="ctr" indent="0" marL="0">
+                        <a:buNone/>
+                      </a:pPr>
+                      <a:r>
+                        <a:rPr lang="en-US" sz="1300" dirty="0">
+                          <a:solidFill>
+                            <a:srgbClr val="1F2937"/>
+                          </a:solidFill>
+                          <a:latin typeface="Calibri" pitchFamily="34" charset="0"/>
+                          <a:ea typeface="Calibri" pitchFamily="34" charset="-122"/>
+                          <a:cs typeface="Calibri" pitchFamily="34" charset="-120"/>
+                        </a:rPr>
+                        <a:t>E2</a:t>
+                      </a:r>
+                      <a:endParaRPr lang="en-US" sz="1300" dirty="0">
+                        <a:latin typeface="Calibri" charset="0"/>
+                        <a:ea typeface="Calibri" charset="0"/>
+                        <a:cs typeface="Calibri" charset="0"/>
+                      </a:endParaRPr>
+                    </a:p>
+                  </a:txBody>
+                  <a:tcPr marL="91440" marR="91440" marT="45720" marB="45720" anchor="ctr">
+                    <a:lnL w="9525" cap="flat" cmpd="sng" algn="ctr">
+                      <a:solidFill>
+                        <a:srgbClr val="D5DCE8"/>
+                      </a:solidFill>
+                      <a:prstDash val="solid"/>
+                      <a:round/>
+                      <a:headEnd type="none" w="med" len="med"/>
+                      <a:tailEnd type="none" w="med" len="med"/>
+                    </a:lnL>
+                    <a:lnR w="9525" cap="flat" cmpd="sng" algn="ctr">
+                      <a:solidFill>
+                        <a:srgbClr val="D5DCE8"/>
+                      </a:solidFill>
+                      <a:prstDash val="solid"/>
+                      <a:round/>
+                      <a:headEnd type="none" w="med" len="med"/>
+                      <a:tailEnd type="none" w="med" len="med"/>
+                    </a:lnR>
+                    <a:lnT w="9525" cap="flat" cmpd="sng" algn="ctr">
+                      <a:solidFill>
+                        <a:srgbClr val="D5DCE8"/>
+                      </a:solidFill>
+                      <a:prstDash val="solid"/>
+                      <a:round/>
+                      <a:headEnd type="none" w="med" len="med"/>
+                      <a:tailEnd type="none" w="med" len="med"/>
+                    </a:lnT>
+                    <a:lnB w="9525" cap="flat" cmpd="sng" algn="ctr">
+                      <a:solidFill>
+                        <a:srgbClr val="D5DCE8"/>
+                      </a:solidFill>
+                      <a:prstDash val="solid"/>
+                      <a:round/>
+                      <a:headEnd type="none" w="med" len="med"/>
+                      <a:tailEnd type="none" w="med" len="med"/>
+                    </a:lnB>
+                  </a:tcPr>
+                </a:tc>
+                <a:tc>
+                  <a:txBody>
+                    <a:bodyPr/>
+                    <a:lstStyle/>
+                    <a:p>
+                      <a:pPr indent="0" marL="0">
+                        <a:buNone/>
+                      </a:pPr>
+                      <a:r>
+                        <a:rPr lang="en-US" sz="1300" dirty="0">
+                          <a:solidFill>
+                            <a:srgbClr val="1F2937"/>
+                          </a:solidFill>
+                          <a:latin typeface="Calibri" pitchFamily="34" charset="0"/>
+                          <a:ea typeface="Calibri" pitchFamily="34" charset="-122"/>
+                          <a:cs typeface="Calibri" pitchFamily="34" charset="-120"/>
+                        </a:rPr>
+                        <a:t>Unpipelined 5-cycle unit is slower than integer C out-of-order</a:t>
+                      </a:r>
+                      <a:endParaRPr lang="en-US" sz="1300" dirty="0">
+                        <a:latin typeface="Calibri" charset="0"/>
+                        <a:ea typeface="Calibri" charset="0"/>
+                        <a:cs typeface="Calibri" charset="0"/>
+                      </a:endParaRPr>
+                    </a:p>
+                  </a:txBody>
+                  <a:tcPr marL="91440" marR="91440" marT="45720" marB="45720" anchor="ctr">
+                    <a:lnL w="9525" cap="flat" cmpd="sng" algn="ctr">
+                      <a:solidFill>
+                        <a:srgbClr val="D5DCE8"/>
+                      </a:solidFill>
+                      <a:prstDash val="solid"/>
+                      <a:round/>
+                      <a:headEnd type="none" w="med" len="med"/>
+                      <a:tailEnd type="none" w="med" len="med"/>
+                    </a:lnL>
+                    <a:lnR w="9525" cap="flat" cmpd="sng" algn="ctr">
+                      <a:solidFill>
+                        <a:srgbClr val="D5DCE8"/>
+                      </a:solidFill>
+                      <a:prstDash val="solid"/>
+                      <a:round/>
+                      <a:headEnd type="none" w="med" len="med"/>
+                      <a:tailEnd type="none" w="med" len="med"/>
+                    </a:lnR>
+                    <a:lnT w="9525" cap="flat" cmpd="sng" algn="ctr">
+                      <a:solidFill>
+                        <a:srgbClr val="D5DCE8"/>
+                      </a:solidFill>
+                      <a:prstDash val="solid"/>
+                      <a:round/>
+                      <a:headEnd type="none" w="med" len="med"/>
+                      <a:tailEnd type="none" w="med" len="med"/>
+                    </a:lnT>
+                    <a:lnB w="9525" cap="flat" cmpd="sng" algn="ctr">
+                      <a:solidFill>
+                        <a:srgbClr val="D5DCE8"/>
+                      </a:solidFill>
+                      <a:prstDash val="solid"/>
+                      <a:round/>
+                      <a:headEnd type="none" w="med" len="med"/>
+                      <a:tailEnd type="none" w="med" len="med"/>
+                    </a:lnB>
+                  </a:tcPr>
+                </a:tc>
+              </a:tr>
+              <a:tr h="457200">
+                <a:tc>
+                  <a:txBody>
+                    <a:bodyPr/>
+                    <a:lstStyle/>
+                    <a:p>
+                      <a:pPr indent="0" marL="0">
+                        <a:buNone/>
+                      </a:pPr>
+                      <a:r>
+                        <a:rPr lang="en-US" sz="1300" b="1" dirty="0">
+                          <a:solidFill>
+                            <a:srgbClr val="14213D"/>
+                          </a:solidFill>
+                          <a:latin typeface="Calibri" pitchFamily="34" charset="0"/>
+                          <a:ea typeface="Calibri" pitchFamily="34" charset="-122"/>
+                          <a:cs typeface="Calibri" pitchFamily="34" charset="-120"/>
+                        </a:rPr>
+                        <a:t>In-order vs out-of-order</a:t>
+                      </a:r>
+                      <a:endParaRPr lang="en-US" sz="1300" dirty="0">
+                        <a:latin typeface="Calibri" charset="0"/>
+                        <a:ea typeface="Calibri" charset="0"/>
+                        <a:cs typeface="Calibri" charset="0"/>
+                      </a:endParaRPr>
+                    </a:p>
+                  </a:txBody>
+                  <a:tcPr marL="91440" marR="91440" marT="45720" marB="45720" anchor="ctr">
+                    <a:lnL w="9525" cap="flat" cmpd="sng" algn="ctr">
+                      <a:solidFill>
+                        <a:srgbClr val="D5DCE8"/>
+                      </a:solidFill>
+                      <a:prstDash val="solid"/>
+                      <a:round/>
+                      <a:headEnd type="none" w="med" len="med"/>
+                      <a:tailEnd type="none" w="med" len="med"/>
+                    </a:lnL>
+                    <a:lnR w="9525" cap="flat" cmpd="sng" algn="ctr">
+                      <a:solidFill>
+                        <a:srgbClr val="D5DCE8"/>
+                      </a:solidFill>
+                      <a:prstDash val="solid"/>
+                      <a:round/>
+                      <a:headEnd type="none" w="med" len="med"/>
+                      <a:tailEnd type="none" w="med" len="med"/>
+                    </a:lnR>
+                    <a:lnT w="9525" cap="flat" cmpd="sng" algn="ctr">
+                      <a:solidFill>
+                        <a:srgbClr val="D5DCE8"/>
+                      </a:solidFill>
+                      <a:prstDash val="solid"/>
+                      <a:round/>
+                      <a:headEnd type="none" w="med" len="med"/>
+                      <a:tailEnd type="none" w="med" len="med"/>
+                    </a:lnT>
+                    <a:lnB w="9525" cap="flat" cmpd="sng" algn="ctr">
+                      <a:solidFill>
+                        <a:srgbClr val="D5DCE8"/>
+                      </a:solidFill>
+                      <a:prstDash val="solid"/>
+                      <a:round/>
+                      <a:headEnd type="none" w="med" len="med"/>
+                      <a:tailEnd type="none" w="med" len="med"/>
+                    </a:lnB>
+                  </a:tcPr>
+                </a:tc>
+                <a:tc>
+                  <a:txBody>
+                    <a:bodyPr/>
+                    <a:lstStyle/>
+                    <a:p>
+                      <a:pPr algn="ctr" indent="0" marL="0">
+                        <a:buNone/>
+                      </a:pPr>
+                      <a:r>
+                        <a:rPr lang="en-US" sz="1300" dirty="0">
+                          <a:solidFill>
+                            <a:srgbClr val="1F2937"/>
+                          </a:solidFill>
+                          <a:latin typeface="Calibri" pitchFamily="34" charset="0"/>
+                          <a:ea typeface="Calibri" pitchFamily="34" charset="-122"/>
+                          <a:cs typeface="Calibri" pitchFamily="34" charset="-120"/>
+                        </a:rPr>
+                        <a:t>E3</a:t>
+                      </a:r>
+                      <a:endParaRPr lang="en-US" sz="1300" dirty="0">
+                        <a:latin typeface="Calibri" charset="0"/>
+                        <a:ea typeface="Calibri" charset="0"/>
+                        <a:cs typeface="Calibri" charset="0"/>
+                      </a:endParaRPr>
+                    </a:p>
+                  </a:txBody>
+                  <a:tcPr marL="91440" marR="91440" marT="45720" marB="45720" anchor="ctr">
+                    <a:lnL w="9525" cap="flat" cmpd="sng" algn="ctr">
+                      <a:solidFill>
+                        <a:srgbClr val="D5DCE8"/>
+                      </a:solidFill>
+                      <a:prstDash val="solid"/>
+                      <a:round/>
+                      <a:headEnd type="none" w="med" len="med"/>
+                      <a:tailEnd type="none" w="med" len="med"/>
+                    </a:lnL>
+                    <a:lnR w="9525" cap="flat" cmpd="sng" algn="ctr">
+                      <a:solidFill>
+                        <a:srgbClr val="D5DCE8"/>
+                      </a:solidFill>
+                      <a:prstDash val="solid"/>
+                      <a:round/>
+                      <a:headEnd type="none" w="med" len="med"/>
+                      <a:tailEnd type="none" w="med" len="med"/>
+                    </a:lnR>
+                    <a:lnT w="9525" cap="flat" cmpd="sng" algn="ctr">
+                      <a:solidFill>
+                        <a:srgbClr val="D5DCE8"/>
+                      </a:solidFill>
+                      <a:prstDash val="solid"/>
+                      <a:round/>
+                      <a:headEnd type="none" w="med" len="med"/>
+                      <a:tailEnd type="none" w="med" len="med"/>
+                    </a:lnT>
+                    <a:lnB w="9525" cap="flat" cmpd="sng" algn="ctr">
+                      <a:solidFill>
+                        <a:srgbClr val="D5DCE8"/>
+                      </a:solidFill>
+                      <a:prstDash val="solid"/>
+                      <a:round/>
+                      <a:headEnd type="none" w="med" len="med"/>
+                      <a:tailEnd type="none" w="med" len="med"/>
+                    </a:lnB>
+                  </a:tcPr>
+                </a:tc>
+                <a:tc>
+                  <a:txBody>
+                    <a:bodyPr/>
+                    <a:lstStyle/>
+                    <a:p>
+                      <a:pPr indent="0" marL="0">
+                        <a:buNone/>
+                      </a:pPr>
+                      <a:r>
+                        <a:rPr lang="en-US" sz="1300" dirty="0">
+                          <a:solidFill>
+                            <a:srgbClr val="1F2937"/>
+                          </a:solidFill>
+                          <a:latin typeface="Calibri" pitchFamily="34" charset="0"/>
+                          <a:ea typeface="Calibri" pitchFamily="34" charset="-122"/>
+                          <a:cs typeface="Calibri" pitchFamily="34" charset="-120"/>
+                        </a:rPr>
+                        <a:t>24× vs 36× over expf; OoO hides any latency if pipelined</a:t>
+                      </a:r>
+                      <a:endParaRPr lang="en-US" sz="1300" dirty="0">
+                        <a:latin typeface="Calibri" charset="0"/>
+                        <a:ea typeface="Calibri" charset="0"/>
+                        <a:cs typeface="Calibri" charset="0"/>
+                      </a:endParaRPr>
+                    </a:p>
+                  </a:txBody>
+                  <a:tcPr marL="91440" marR="91440" marT="45720" marB="45720" anchor="ctr">
+                    <a:lnL w="9525" cap="flat" cmpd="sng" algn="ctr">
+                      <a:solidFill>
+                        <a:srgbClr val="D5DCE8"/>
+                      </a:solidFill>
+                      <a:prstDash val="solid"/>
+                      <a:round/>
+                      <a:headEnd type="none" w="med" len="med"/>
+                      <a:tailEnd type="none" w="med" len="med"/>
+                    </a:lnL>
+                    <a:lnR w="9525" cap="flat" cmpd="sng" algn="ctr">
+                      <a:solidFill>
+                        <a:srgbClr val="D5DCE8"/>
+                      </a:solidFill>
+                      <a:prstDash val="solid"/>
+                      <a:round/>
+                      <a:headEnd type="none" w="med" len="med"/>
+                      <a:tailEnd type="none" w="med" len="med"/>
+                    </a:lnR>
+                    <a:lnT w="9525" cap="flat" cmpd="sng" algn="ctr">
+                      <a:solidFill>
+                        <a:srgbClr val="D5DCE8"/>
+                      </a:solidFill>
+                      <a:prstDash val="solid"/>
+                      <a:round/>
+                      <a:headEnd type="none" w="med" len="med"/>
+                      <a:tailEnd type="none" w="med" len="med"/>
+                    </a:lnT>
+                    <a:lnB w="9525" cap="flat" cmpd="sng" algn="ctr">
+                      <a:solidFill>
+                        <a:srgbClr val="D5DCE8"/>
+                      </a:solidFill>
+                      <a:prstDash val="solid"/>
+                      <a:round/>
+                      <a:headEnd type="none" w="med" len="med"/>
+                      <a:tailEnd type="none" w="med" len="med"/>
+                    </a:lnB>
+                  </a:tcPr>
+                </a:tc>
+              </a:tr>
+              <a:tr h="457200">
+                <a:tc>
+                  <a:txBody>
+                    <a:bodyPr/>
+                    <a:lstStyle/>
+                    <a:p>
+                      <a:pPr indent="0" marL="0">
+                        <a:buNone/>
+                      </a:pPr>
+                      <a:r>
+                        <a:rPr lang="en-US" sz="1300" b="1" dirty="0">
+                          <a:solidFill>
+                            <a:srgbClr val="14213D"/>
+                          </a:solidFill>
+                          <a:latin typeface="Calibri" pitchFamily="34" charset="0"/>
+                          <a:ea typeface="Calibri" pitchFamily="34" charset="-122"/>
+                          <a:cs typeface="Calibri" pitchFamily="34" charset="-120"/>
+                        </a:rPr>
+                        <a:t>Branch prediction</a:t>
+                      </a:r>
+                      <a:endParaRPr lang="en-US" sz="1300" dirty="0">
+                        <a:latin typeface="Calibri" charset="0"/>
+                        <a:ea typeface="Calibri" charset="0"/>
+                        <a:cs typeface="Calibri" charset="0"/>
+                      </a:endParaRPr>
+                    </a:p>
+                  </a:txBody>
+                  <a:tcPr marL="91440" marR="91440" marT="45720" marB="45720" anchor="ctr">
+                    <a:lnL w="9525" cap="flat" cmpd="sng" algn="ctr">
+                      <a:solidFill>
+                        <a:srgbClr val="D5DCE8"/>
+                      </a:solidFill>
+                      <a:prstDash val="solid"/>
+                      <a:round/>
+                      <a:headEnd type="none" w="med" len="med"/>
+                      <a:tailEnd type="none" w="med" len="med"/>
+                    </a:lnL>
+                    <a:lnR w="9525" cap="flat" cmpd="sng" algn="ctr">
+                      <a:solidFill>
+                        <a:srgbClr val="D5DCE8"/>
+                      </a:solidFill>
+                      <a:prstDash val="solid"/>
+                      <a:round/>
+                      <a:headEnd type="none" w="med" len="med"/>
+                      <a:tailEnd type="none" w="med" len="med"/>
+                    </a:lnR>
+                    <a:lnT w="9525" cap="flat" cmpd="sng" algn="ctr">
+                      <a:solidFill>
+                        <a:srgbClr val="D5DCE8"/>
+                      </a:solidFill>
+                      <a:prstDash val="solid"/>
+                      <a:round/>
+                      <a:headEnd type="none" w="med" len="med"/>
+                      <a:tailEnd type="none" w="med" len="med"/>
+                    </a:lnT>
+                    <a:lnB w="9525" cap="flat" cmpd="sng" algn="ctr">
+                      <a:solidFill>
+                        <a:srgbClr val="D5DCE8"/>
+                      </a:solidFill>
+                      <a:prstDash val="solid"/>
+                      <a:round/>
+                      <a:headEnd type="none" w="med" len="med"/>
+                      <a:tailEnd type="none" w="med" len="med"/>
+                    </a:lnB>
+                  </a:tcPr>
+                </a:tc>
+                <a:tc>
+                  <a:txBody>
+                    <a:bodyPr/>
+                    <a:lstStyle/>
+                    <a:p>
+                      <a:pPr algn="ctr" indent="0" marL="0">
+                        <a:buNone/>
+                      </a:pPr>
+                      <a:r>
+                        <a:rPr lang="en-US" sz="1300" dirty="0">
+                          <a:solidFill>
+                            <a:srgbClr val="1F2937"/>
+                          </a:solidFill>
+                          <a:latin typeface="Calibri" pitchFamily="34" charset="0"/>
+                          <a:ea typeface="Calibri" pitchFamily="34" charset="-122"/>
+                          <a:cs typeface="Calibri" pitchFamily="34" charset="-120"/>
+                        </a:rPr>
+                        <a:t>E4</a:t>
+                      </a:r>
+                      <a:endParaRPr lang="en-US" sz="1300" dirty="0">
+                        <a:latin typeface="Calibri" charset="0"/>
+                        <a:ea typeface="Calibri" charset="0"/>
+                        <a:cs typeface="Calibri" charset="0"/>
+                      </a:endParaRPr>
+                    </a:p>
+                  </a:txBody>
+                  <a:tcPr marL="91440" marR="91440" marT="45720" marB="45720" anchor="ctr">
+                    <a:lnL w="9525" cap="flat" cmpd="sng" algn="ctr">
+                      <a:solidFill>
+                        <a:srgbClr val="D5DCE8"/>
+                      </a:solidFill>
+                      <a:prstDash val="solid"/>
+                      <a:round/>
+                      <a:headEnd type="none" w="med" len="med"/>
+                      <a:tailEnd type="none" w="med" len="med"/>
+                    </a:lnL>
+                    <a:lnR w="9525" cap="flat" cmpd="sng" algn="ctr">
+                      <a:solidFill>
+                        <a:srgbClr val="D5DCE8"/>
+                      </a:solidFill>
+                      <a:prstDash val="solid"/>
+                      <a:round/>
+                      <a:headEnd type="none" w="med" len="med"/>
+                      <a:tailEnd type="none" w="med" len="med"/>
+                    </a:lnR>
+                    <a:lnT w="9525" cap="flat" cmpd="sng" algn="ctr">
+                      <a:solidFill>
+                        <a:srgbClr val="D5DCE8"/>
+                      </a:solidFill>
+                      <a:prstDash val="solid"/>
+                      <a:round/>
+                      <a:headEnd type="none" w="med" len="med"/>
+                      <a:tailEnd type="none" w="med" len="med"/>
+                    </a:lnT>
+                    <a:lnB w="9525" cap="flat" cmpd="sng" algn="ctr">
+                      <a:solidFill>
+                        <a:srgbClr val="D5DCE8"/>
+                      </a:solidFill>
+                      <a:prstDash val="solid"/>
+                      <a:round/>
+                      <a:headEnd type="none" w="med" len="med"/>
+                      <a:tailEnd type="none" w="med" len="med"/>
+                    </a:lnB>
+                  </a:tcPr>
+                </a:tc>
+                <a:tc>
+                  <a:txBody>
+                    <a:bodyPr/>
+                    <a:lstStyle/>
+                    <a:p>
+                      <a:pPr indent="0" marL="0">
+                        <a:buNone/>
+                      </a:pPr>
+                      <a:r>
+                        <a:rPr lang="en-US" sz="1300" dirty="0">
+                          <a:solidFill>
+                            <a:srgbClr val="1F2937"/>
+                          </a:solidFill>
+                          <a:latin typeface="Calibri" pitchFamily="34" charset="0"/>
+                          <a:ea typeface="Calibri" pitchFamily="34" charset="-122"/>
+                          <a:cs typeface="Calibri" pitchFamily="34" charset="-120"/>
+                        </a:rPr>
+                        <a:t>Software f4: 0.41 mispredicts per activation, +3.4 / +5.4 cycles</a:t>
+                      </a:r>
+                      <a:endParaRPr lang="en-US" sz="1300" dirty="0">
+                        <a:latin typeface="Calibri" charset="0"/>
+                        <a:ea typeface="Calibri" charset="0"/>
+                        <a:cs typeface="Calibri" charset="0"/>
+                      </a:endParaRPr>
+                    </a:p>
+                  </a:txBody>
+                  <a:tcPr marL="91440" marR="91440" marT="45720" marB="45720" anchor="ctr">
+                    <a:lnL w="9525" cap="flat" cmpd="sng" algn="ctr">
+                      <a:solidFill>
+                        <a:srgbClr val="D5DCE8"/>
+                      </a:solidFill>
+                      <a:prstDash val="solid"/>
+                      <a:round/>
+                      <a:headEnd type="none" w="med" len="med"/>
+                      <a:tailEnd type="none" w="med" len="med"/>
+                    </a:lnL>
+                    <a:lnR w="9525" cap="flat" cmpd="sng" algn="ctr">
+                      <a:solidFill>
+                        <a:srgbClr val="D5DCE8"/>
+                      </a:solidFill>
+                      <a:prstDash val="solid"/>
+                      <a:round/>
+                      <a:headEnd type="none" w="med" len="med"/>
+                      <a:tailEnd type="none" w="med" len="med"/>
+                    </a:lnR>
+                    <a:lnT w="9525" cap="flat" cmpd="sng" algn="ctr">
+                      <a:solidFill>
+                        <a:srgbClr val="D5DCE8"/>
+                      </a:solidFill>
+                      <a:prstDash val="solid"/>
+                      <a:round/>
+                      <a:headEnd type="none" w="med" len="med"/>
+                      <a:tailEnd type="none" w="med" len="med"/>
+                    </a:lnT>
+                    <a:lnB w="9525" cap="flat" cmpd="sng" algn="ctr">
+                      <a:solidFill>
+                        <a:srgbClr val="D5DCE8"/>
+                      </a:solidFill>
+                      <a:prstDash val="solid"/>
+                      <a:round/>
+                      <a:headEnd type="none" w="med" len="med"/>
+                      <a:tailEnd type="none" w="med" len="med"/>
+                    </a:lnB>
+                  </a:tcPr>
+                </a:tc>
+              </a:tr>
+              <a:tr h="457200">
+                <a:tc>
+                  <a:txBody>
+                    <a:bodyPr/>
+                    <a:lstStyle/>
+                    <a:p>
+                      <a:pPr indent="0" marL="0">
+                        <a:buNone/>
+                      </a:pPr>
+                      <a:r>
+                        <a:rPr lang="en-US" sz="1300" b="1" dirty="0">
+                          <a:solidFill>
+                            <a:srgbClr val="14213D"/>
+                          </a:solidFill>
+                          <a:latin typeface="Calibri" pitchFamily="34" charset="0"/>
+                          <a:ea typeface="Calibri" pitchFamily="34" charset="-122"/>
+                          <a:cs typeface="Calibri" pitchFamily="34" charset="-120"/>
+                        </a:rPr>
+                        <a:t>Memory hierarchy</a:t>
+                      </a:r>
+                      <a:endParaRPr lang="en-US" sz="1300" dirty="0">
+                        <a:latin typeface="Calibri" charset="0"/>
+                        <a:ea typeface="Calibri" charset="0"/>
+                        <a:cs typeface="Calibri" charset="0"/>
+                      </a:endParaRPr>
+                    </a:p>
+                  </a:txBody>
+                  <a:tcPr marL="91440" marR="91440" marT="45720" marB="45720" anchor="ctr">
+                    <a:lnL w="9525" cap="flat" cmpd="sng" algn="ctr">
+                      <a:solidFill>
+                        <a:srgbClr val="D5DCE8"/>
+                      </a:solidFill>
+                      <a:prstDash val="solid"/>
+                      <a:round/>
+                      <a:headEnd type="none" w="med" len="med"/>
+                      <a:tailEnd type="none" w="med" len="med"/>
+                    </a:lnL>
+                    <a:lnR w="9525" cap="flat" cmpd="sng" algn="ctr">
+                      <a:solidFill>
+                        <a:srgbClr val="D5DCE8"/>
+                      </a:solidFill>
+                      <a:prstDash val="solid"/>
+                      <a:round/>
+                      <a:headEnd type="none" w="med" len="med"/>
+                      <a:tailEnd type="none" w="med" len="med"/>
+                    </a:lnR>
+                    <a:lnT w="9525" cap="flat" cmpd="sng" algn="ctr">
+                      <a:solidFill>
+                        <a:srgbClr val="D5DCE8"/>
+                      </a:solidFill>
+                      <a:prstDash val="solid"/>
+                      <a:round/>
+                      <a:headEnd type="none" w="med" len="med"/>
+                      <a:tailEnd type="none" w="med" len="med"/>
+                    </a:lnT>
+                    <a:lnB w="9525" cap="flat" cmpd="sng" algn="ctr">
+                      <a:solidFill>
+                        <a:srgbClr val="D5DCE8"/>
+                      </a:solidFill>
+                      <a:prstDash val="solid"/>
+                      <a:round/>
+                      <a:headEnd type="none" w="med" len="med"/>
+                      <a:tailEnd type="none" w="med" len="med"/>
+                    </a:lnB>
+                  </a:tcPr>
+                </a:tc>
+                <a:tc>
+                  <a:txBody>
+                    <a:bodyPr/>
+                    <a:lstStyle/>
+                    <a:p>
+                      <a:pPr algn="ctr" indent="0" marL="0">
+                        <a:buNone/>
+                      </a:pPr>
+                      <a:r>
+                        <a:rPr lang="en-US" sz="1300" dirty="0">
+                          <a:solidFill>
+                            <a:srgbClr val="1F2937"/>
+                          </a:solidFill>
+                          <a:latin typeface="Calibri" pitchFamily="34" charset="0"/>
+                          <a:ea typeface="Calibri" pitchFamily="34" charset="-122"/>
+                          <a:cs typeface="Calibri" pitchFamily="34" charset="-120"/>
+                        </a:rPr>
+                        <a:t>E6</a:t>
+                      </a:r>
+                      <a:endParaRPr lang="en-US" sz="1300" dirty="0">
+                        <a:latin typeface="Calibri" charset="0"/>
+                        <a:ea typeface="Calibri" charset="0"/>
+                        <a:cs typeface="Calibri" charset="0"/>
+                      </a:endParaRPr>
+                    </a:p>
+                  </a:txBody>
+                  <a:tcPr marL="91440" marR="91440" marT="45720" marB="45720" anchor="ctr">
+                    <a:lnL w="9525" cap="flat" cmpd="sng" algn="ctr">
+                      <a:solidFill>
+                        <a:srgbClr val="D5DCE8"/>
+                      </a:solidFill>
+                      <a:prstDash val="solid"/>
+                      <a:round/>
+                      <a:headEnd type="none" w="med" len="med"/>
+                      <a:tailEnd type="none" w="med" len="med"/>
+                    </a:lnL>
+                    <a:lnR w="9525" cap="flat" cmpd="sng" algn="ctr">
+                      <a:solidFill>
+                        <a:srgbClr val="D5DCE8"/>
+                      </a:solidFill>
+                      <a:prstDash val="solid"/>
+                      <a:round/>
+                      <a:headEnd type="none" w="med" len="med"/>
+                      <a:tailEnd type="none" w="med" len="med"/>
+                    </a:lnR>
+                    <a:lnT w="9525" cap="flat" cmpd="sng" algn="ctr">
+                      <a:solidFill>
+                        <a:srgbClr val="D5DCE8"/>
+                      </a:solidFill>
+                      <a:prstDash val="solid"/>
+                      <a:round/>
+                      <a:headEnd type="none" w="med" len="med"/>
+                      <a:tailEnd type="none" w="med" len="med"/>
+                    </a:lnT>
+                    <a:lnB w="9525" cap="flat" cmpd="sng" algn="ctr">
+                      <a:solidFill>
+                        <a:srgbClr val="D5DCE8"/>
+                      </a:solidFill>
+                      <a:prstDash val="solid"/>
+                      <a:round/>
+                      <a:headEnd type="none" w="med" len="med"/>
+                      <a:tailEnd type="none" w="med" len="med"/>
+                    </a:lnB>
+                  </a:tcPr>
+                </a:tc>
+                <a:tc>
+                  <a:txBody>
+                    <a:bodyPr/>
+                    <a:lstStyle/>
+                    <a:p>
+                      <a:pPr indent="0" marL="0">
+                        <a:buNone/>
+                      </a:pPr>
+                      <a:r>
+                        <a:rPr lang="en-US" sz="1300" dirty="0">
+                          <a:solidFill>
+                            <a:srgbClr val="1F2937"/>
+                          </a:solidFill>
+                          <a:latin typeface="Calibri" pitchFamily="34" charset="0"/>
+                          <a:ea typeface="Calibri" pitchFamily="34" charset="-122"/>
+                          <a:cs typeface="Calibri" pitchFamily="34" charset="-120"/>
+                        </a:rPr>
+                        <a:t>Table loses 35% at a 512 B L1D; instruction needs no table</a:t>
+                      </a:r>
+                      <a:endParaRPr lang="en-US" sz="1300" dirty="0">
+                        <a:latin typeface="Calibri" charset="0"/>
+                        <a:ea typeface="Calibri" charset="0"/>
+                        <a:cs typeface="Calibri" charset="0"/>
+                      </a:endParaRPr>
+                    </a:p>
+                  </a:txBody>
+                  <a:tcPr marL="91440" marR="91440" marT="45720" marB="45720" anchor="ctr">
+                    <a:lnL w="9525" cap="flat" cmpd="sng" algn="ctr">
+                      <a:solidFill>
+                        <a:srgbClr val="D5DCE8"/>
+                      </a:solidFill>
+                      <a:prstDash val="solid"/>
+                      <a:round/>
+                      <a:headEnd type="none" w="med" len="med"/>
+                      <a:tailEnd type="none" w="med" len="med"/>
+                    </a:lnL>
+                    <a:lnR w="9525" cap="flat" cmpd="sng" algn="ctr">
+                      <a:solidFill>
+                        <a:srgbClr val="D5DCE8"/>
+                      </a:solidFill>
+                      <a:prstDash val="solid"/>
+                      <a:round/>
+                      <a:headEnd type="none" w="med" len="med"/>
+                      <a:tailEnd type="none" w="med" len="med"/>
+                    </a:lnR>
+                    <a:lnT w="9525" cap="flat" cmpd="sng" algn="ctr">
+                      <a:solidFill>
+                        <a:srgbClr val="D5DCE8"/>
+                      </a:solidFill>
+                      <a:prstDash val="solid"/>
+                      <a:round/>
+                      <a:headEnd type="none" w="med" len="med"/>
+                      <a:tailEnd type="none" w="med" len="med"/>
+                    </a:lnT>
+                    <a:lnB w="9525" cap="flat" cmpd="sng" algn="ctr">
+                      <a:solidFill>
+                        <a:srgbClr val="D5DCE8"/>
+                      </a:solidFill>
+                      <a:prstDash val="solid"/>
+                      <a:round/>
+                      <a:headEnd type="none" w="med" len="med"/>
+                      <a:tailEnd type="none" w="med" len="med"/>
+                    </a:lnB>
+                  </a:tcPr>
+                </a:tc>
+              </a:tr>
+            </a:tbl>
+          </a:graphicData>
+        </a:graphic>
+      </p:graphicFrame>
       <p:sp>
         <p:nvSpPr>
           <p:cNvPr id="25" name="Slide Number Placeholder 0"/>
@@ -5974,7 +7365,7 @@
                 <a:ea typeface="Cambria" pitchFamily="34" charset="-122"/>
                 <a:cs typeface="Cambria" pitchFamily="34" charset="-120"/>
               </a:rPr>
-              <a:t>Synthesis delay to gem5 latency, by script</a:t>
+              <a:t>The approximation: six segments, no multiplier</a:t>
             </a:r>
             <a:endParaRPr lang="en-US" sz="2600" dirty="0"/>
           </a:p>
@@ -5982,14 +7373,14 @@
       </p:sp>
       <p:sp>
         <p:nvSpPr>
-          <p:cNvPr id="4" name="flow box 1"/>
+          <p:cNvPr id="4" name="equation panel"/>
           <p:cNvSpPr/>
           <p:nvPr/>
         </p:nvSpPr>
         <p:spPr>
           <a:xfrm>
-            <a:off x="457200" y="1371600"/>
-            <a:ext cx="1828800" cy="1097280"/>
+            <a:off x="457200" y="1188720"/>
+            <a:ext cx="4572000" cy="3200400"/>
           </a:xfrm>
           <a:prstGeom prst="rect">
             <a:avLst/>
@@ -6013,8 +7404,8 @@
         </p:nvSpPr>
         <p:spPr>
           <a:xfrm>
-            <a:off x="548640" y="1481328"/>
-            <a:ext cx="1645920" cy="365760"/>
+            <a:off x="685800" y="1371600"/>
+            <a:ext cx="4206240" cy="2194560"/>
           </a:xfrm>
           <a:prstGeom prst="rect">
             <a:avLst/>
@@ -6026,112 +7417,176 @@
           <a:bodyPr wrap="square" lIns="0" tIns="0" rIns="0" bIns="0" rtlCol="0" anchor="t"/>
           <a:lstStyle/>
           <a:p>
-            <a:pPr algn="ctr" indent="0" marL="0">
+            <a:pPr indent="0" marL="0">
+              <a:spcAft>
+                <a:spcPts val="600"/>
+              </a:spcAft>
               <a:buNone/>
             </a:pPr>
             <a:r>
-              <a:rPr lang="en-US" sz="1800" b="1" dirty="0">
-                <a:solidFill>
-                  <a:srgbClr val="14213D"/>
+              <a:rPr lang="en-US" sz="1500" dirty="0">
+                <a:solidFill>
+                  <a:srgbClr val="1F2937"/>
+                </a:solidFill>
+                <a:latin typeface="Courier New" pitchFamily="34" charset="0"/>
+                <a:ea typeface="Courier New" pitchFamily="34" charset="-122"/>
+                <a:cs typeface="Courier New" pitchFamily="34" charset="-120"/>
+              </a:rPr>
+              <a:t>x ≤ −4:        0</a:t>
+            </a:r>
+            <a:endParaRPr lang="en-US" sz="1500" dirty="0"/>
+          </a:p>
+          <a:p>
+            <a:pPr indent="0" marL="0">
+              <a:spcAft>
+                <a:spcPts val="600"/>
+              </a:spcAft>
+              <a:buNone/>
+            </a:pPr>
+            <a:r>
+              <a:rPr lang="en-US" sz="1500" dirty="0">
+                <a:solidFill>
+                  <a:srgbClr val="1F2937"/>
+                </a:solidFill>
+                <a:latin typeface="Courier New" pitchFamily="34" charset="0"/>
+                <a:ea typeface="Courier New" pitchFamily="34" charset="-122"/>
+                <a:cs typeface="Courier New" pitchFamily="34" charset="-120"/>
+              </a:rPr>
+              <a:t>−4 &lt; x ≤ −1:   −x/16 − 0.375</a:t>
+            </a:r>
+            <a:endParaRPr lang="en-US" sz="1500" dirty="0"/>
+          </a:p>
+          <a:p>
+            <a:pPr indent="0" marL="0">
+              <a:spcAft>
+                <a:spcPts val="600"/>
+              </a:spcAft>
+              <a:buNone/>
+            </a:pPr>
+            <a:r>
+              <a:rPr lang="en-US" sz="1500" dirty="0">
+                <a:solidFill>
+                  <a:srgbClr val="1F2937"/>
+                </a:solidFill>
+                <a:latin typeface="Courier New" pitchFamily="34" charset="0"/>
+                <a:ea typeface="Courier New" pitchFamily="34" charset="-122"/>
+                <a:cs typeface="Courier New" pitchFamily="34" charset="-120"/>
+              </a:rPr>
+              <a:t>−1 &lt; x ≤ 0:    x/4 − 0.037</a:t>
+            </a:r>
+            <a:endParaRPr lang="en-US" sz="1500" dirty="0"/>
+          </a:p>
+          <a:p>
+            <a:pPr indent="0" marL="0">
+              <a:spcAft>
+                <a:spcPts val="600"/>
+              </a:spcAft>
+              <a:buNone/>
+            </a:pPr>
+            <a:r>
+              <a:rPr lang="en-US" sz="1500" dirty="0">
+                <a:solidFill>
+                  <a:srgbClr val="1F2937"/>
+                </a:solidFill>
+                <a:latin typeface="Courier New" pitchFamily="34" charset="0"/>
+                <a:ea typeface="Courier New" pitchFamily="34" charset="-122"/>
+                <a:cs typeface="Courier New" pitchFamily="34" charset="-120"/>
+              </a:rPr>
+              <a:t>0 &lt; x ≤ 1:     3x/4 − 0.037</a:t>
+            </a:r>
+            <a:endParaRPr lang="en-US" sz="1500" dirty="0"/>
+          </a:p>
+          <a:p>
+            <a:pPr indent="0" marL="0">
+              <a:spcAft>
+                <a:spcPts val="600"/>
+              </a:spcAft>
+              <a:buNone/>
+            </a:pPr>
+            <a:r>
+              <a:rPr lang="en-US" sz="1500" dirty="0">
+                <a:solidFill>
+                  <a:srgbClr val="1F2937"/>
+                </a:solidFill>
+                <a:latin typeface="Courier New" pitchFamily="34" charset="0"/>
+                <a:ea typeface="Courier New" pitchFamily="34" charset="-122"/>
+                <a:cs typeface="Courier New" pitchFamily="34" charset="-120"/>
+              </a:rPr>
+              <a:t>1 &lt; x ≤ 4:     x + x/16 − 0.375</a:t>
+            </a:r>
+            <a:endParaRPr lang="en-US" sz="1500" dirty="0"/>
+          </a:p>
+          <a:p>
+            <a:pPr indent="0" marL="0">
+              <a:spcAft>
+                <a:spcPts val="600"/>
+              </a:spcAft>
+              <a:buNone/>
+            </a:pPr>
+            <a:r>
+              <a:rPr lang="en-US" sz="1500" dirty="0">
+                <a:solidFill>
+                  <a:srgbClr val="1F2937"/>
+                </a:solidFill>
+                <a:latin typeface="Courier New" pitchFamily="34" charset="0"/>
+                <a:ea typeface="Courier New" pitchFamily="34" charset="-122"/>
+                <a:cs typeface="Courier New" pitchFamily="34" charset="-120"/>
+              </a:rPr>
+              <a:t>x &gt; 4:         x</a:t>
+            </a:r>
+            <a:endParaRPr lang="en-US" sz="1500" dirty="0"/>
+          </a:p>
+        </p:txBody>
+      </p:sp>
+      <p:sp>
+        <p:nvSpPr>
+          <p:cNvPr id="6" name="Text 3"/>
+          <p:cNvSpPr txBox="1"/>
+          <p:nvPr/>
+        </p:nvSpPr>
+        <p:spPr>
+          <a:xfrm>
+            <a:off x="685800" y="3657600"/>
+            <a:ext cx="4114800" cy="640080"/>
+          </a:xfrm>
+          <a:prstGeom prst="rect">
+            <a:avLst/>
+          </a:prstGeom>
+          <a:noFill/>
+          <a:ln/>
+        </p:spPr>
+        <p:txBody>
+          <a:bodyPr wrap="square" lIns="0" tIns="0" rIns="0" bIns="0" rtlCol="0" anchor="t"/>
+          <a:lstStyle/>
+          <a:p>
+            <a:pPr indent="0" marL="0">
+              <a:buNone/>
+            </a:pPr>
+            <a:r>
+              <a:rPr lang="en-US" sz="1400" dirty="0">
+                <a:solidFill>
+                  <a:srgbClr val="5B6577"/>
                 </a:solidFill>
                 <a:latin typeface="Calibri" pitchFamily="34" charset="0"/>
                 <a:ea typeface="Calibri" pitchFamily="34" charset="-122"/>
                 <a:cs typeface="Calibri" pitchFamily="34" charset="-120"/>
               </a:rPr>
-              <a:t>RTL</a:t>
-            </a:r>
-            <a:endParaRPr lang="en-US" sz="1800" dirty="0"/>
-          </a:p>
-        </p:txBody>
-      </p:sp>
-      <p:sp>
-        <p:nvSpPr>
-          <p:cNvPr id="6" name="Text 3"/>
-          <p:cNvSpPr txBox="1"/>
-          <p:nvPr/>
-        </p:nvSpPr>
-        <p:spPr>
-          <a:xfrm>
-            <a:off x="548640" y="1892808"/>
-            <a:ext cx="1645920" cy="502920"/>
-          </a:xfrm>
-          <a:prstGeom prst="rect">
-            <a:avLst/>
-          </a:prstGeom>
-          <a:noFill/>
-          <a:ln/>
-        </p:spPr>
-        <p:txBody>
-          <a:bodyPr wrap="square" lIns="0" tIns="0" rIns="0" bIns="0" rtlCol="0" anchor="t"/>
-          <a:lstStyle/>
-          <a:p>
-            <a:pPr algn="ctr" indent="0" marL="0">
-              <a:buNone/>
-            </a:pPr>
-            <a:r>
-              <a:rPr lang="en-US" sz="1200" dirty="0">
-                <a:solidFill>
-                  <a:srgbClr val="5B6577"/>
-                </a:solidFill>
-                <a:latin typeface="Calibri" pitchFamily="34" charset="0"/>
-                <a:ea typeface="Calibri" pitchFamily="34" charset="-122"/>
-                <a:cs typeface="Calibri" pitchFamily="34" charset="-120"/>
-              </a:rPr>
-              <a:t>silu.v, combinational</a:t>
-            </a:r>
-            <a:endParaRPr lang="en-US" sz="1200" dirty="0"/>
-          </a:p>
-        </p:txBody>
-      </p:sp>
-      <p:sp>
-        <p:nvSpPr>
-          <p:cNvPr id="7" name="Text 4"/>
-          <p:cNvSpPr txBox="1"/>
-          <p:nvPr/>
-        </p:nvSpPr>
-        <p:spPr>
-          <a:xfrm>
-            <a:off x="2286000" y="1691640"/>
-            <a:ext cx="320040" cy="457200"/>
-          </a:xfrm>
-          <a:prstGeom prst="rect">
-            <a:avLst/>
-          </a:prstGeom>
-          <a:noFill/>
-          <a:ln/>
-        </p:spPr>
-        <p:txBody>
-          <a:bodyPr wrap="square" lIns="0" tIns="0" rIns="0" bIns="0" rtlCol="0" anchor="t"/>
-          <a:lstStyle/>
-          <a:p>
-            <a:pPr algn="ctr" indent="0" marL="0">
-              <a:buNone/>
-            </a:pPr>
-            <a:r>
-              <a:rPr lang="en-US" sz="2400" dirty="0">
-                <a:solidFill>
-                  <a:srgbClr val="5B6577"/>
-                </a:solidFill>
-                <a:latin typeface="Calibri" pitchFamily="34" charset="0"/>
-                <a:ea typeface="Calibri" pitchFamily="34" charset="-122"/>
-                <a:cs typeface="Calibri" pitchFamily="34" charset="-120"/>
-              </a:rPr>
-              <a:t>→</a:t>
-            </a:r>
-            <a:endParaRPr lang="en-US" sz="2400" dirty="0"/>
-          </a:p>
-        </p:txBody>
-      </p:sp>
-      <p:sp>
-        <p:nvSpPr>
-          <p:cNvPr id="8" name="flow box 2"/>
+              <a:t>Divisions are arithmetic shifts. No multiplier, no table, no memory.</a:t>
+            </a:r>
+            <a:endParaRPr lang="en-US" sz="1400" dirty="0"/>
+          </a:p>
+        </p:txBody>
+      </p:sp>
+      <p:sp>
+        <p:nvSpPr>
+          <p:cNvPr id="7" name="stat card"/>
           <p:cNvSpPr/>
           <p:nvPr/>
         </p:nvSpPr>
         <p:spPr>
           <a:xfrm>
-            <a:off x="2606040" y="1371600"/>
-            <a:ext cx="1828800" cy="1097280"/>
+            <a:off x="5394960" y="1188720"/>
+            <a:ext cx="1600200" cy="1234440"/>
           </a:xfrm>
           <a:prstGeom prst="rect">
             <a:avLst/>
@@ -6149,14 +7604,53 @@
       </p:sp>
       <p:sp>
         <p:nvSpPr>
+          <p:cNvPr id="8" name="Text 5"/>
+          <p:cNvSpPr txBox="1"/>
+          <p:nvPr/>
+        </p:nvSpPr>
+        <p:spPr>
+          <a:xfrm>
+            <a:off x="5532120" y="1298448"/>
+            <a:ext cx="1325880" cy="640080"/>
+          </a:xfrm>
+          <a:prstGeom prst="rect">
+            <a:avLst/>
+          </a:prstGeom>
+          <a:noFill/>
+          <a:ln/>
+        </p:spPr>
+        <p:txBody>
+          <a:bodyPr wrap="square" lIns="0" tIns="0" rIns="0" bIns="0" rtlCol="0" anchor="t"/>
+          <a:lstStyle/>
+          <a:p>
+            <a:pPr indent="0" marL="0">
+              <a:buNone/>
+            </a:pPr>
+            <a:r>
+              <a:rPr lang="en-US" sz="3200" b="1" dirty="0">
+                <a:solidFill>
+                  <a:srgbClr val="2A78D6"/>
+                </a:solidFill>
+                <a:latin typeface="Cambria" pitchFamily="34" charset="0"/>
+                <a:ea typeface="Cambria" pitchFamily="34" charset="-122"/>
+                <a:cs typeface="Cambria" pitchFamily="34" charset="-120"/>
+              </a:rPr>
+              <a:t>0.028</a:t>
+            </a:r>
+            <a:endParaRPr lang="en-US" sz="3200" dirty="0"/>
+          </a:p>
+        </p:txBody>
+      </p:sp>
+      <p:sp>
+        <p:nvSpPr>
           <p:cNvPr id="9" name="Text 6"/>
           <p:cNvSpPr txBox="1"/>
           <p:nvPr/>
         </p:nvSpPr>
         <p:spPr>
           <a:xfrm>
-            <a:off x="2697480" y="1481328"/>
-            <a:ext cx="1645920" cy="365760"/>
+            <a:off x="5532120" y="1938528"/>
+            <a:ext cx="1325880" cy="457200"/>
           </a:xfrm>
           <a:prstGeom prst="rect">
             <a:avLst/>
@@ -6168,58 +7662,19 @@
           <a:bodyPr wrap="square" lIns="0" tIns="0" rIns="0" bIns="0" rtlCol="0" anchor="t"/>
           <a:lstStyle/>
           <a:p>
-            <a:pPr algn="ctr" indent="0" marL="0">
+            <a:pPr indent="0" marL="0">
               <a:buNone/>
             </a:pPr>
             <a:r>
-              <a:rPr lang="en-US" sz="1800" b="1" dirty="0">
-                <a:solidFill>
-                  <a:srgbClr val="14213D"/>
+              <a:rPr lang="en-US" sz="1200" dirty="0">
+                <a:solidFill>
+                  <a:srgbClr val="5B6577"/>
                 </a:solidFill>
                 <a:latin typeface="Calibri" pitchFamily="34" charset="0"/>
                 <a:ea typeface="Calibri" pitchFamily="34" charset="-122"/>
                 <a:cs typeface="Calibri" pitchFamily="34" charset="-120"/>
               </a:rPr>
-              <a:t>Quartus</a:t>
-            </a:r>
-            <a:endParaRPr lang="en-US" sz="1800" dirty="0"/>
-          </a:p>
-        </p:txBody>
-      </p:sp>
-      <p:sp>
-        <p:nvSpPr>
-          <p:cNvPr id="10" name="Text 7"/>
-          <p:cNvSpPr txBox="1"/>
-          <p:nvPr/>
-        </p:nvSpPr>
-        <p:spPr>
-          <a:xfrm>
-            <a:off x="2697480" y="1892808"/>
-            <a:ext cx="1645920" cy="502920"/>
-          </a:xfrm>
-          <a:prstGeom prst="rect">
-            <a:avLst/>
-          </a:prstGeom>
-          <a:noFill/>
-          <a:ln/>
-        </p:spPr>
-        <p:txBody>
-          <a:bodyPr wrap="square" lIns="0" tIns="0" rIns="0" bIns="0" rtlCol="0" anchor="t"/>
-          <a:lstStyle/>
-          <a:p>
-            <a:pPr algn="ctr" indent="0" marL="0">
-              <a:buNone/>
-            </a:pPr>
-            <a:r>
-              <a:rPr lang="en-US" sz="1200" dirty="0">
-                <a:solidFill>
-                  <a:srgbClr val="5B6577"/>
-                </a:solidFill>
-                <a:latin typeface="Calibri" pitchFamily="34" charset="0"/>
-                <a:ea typeface="Calibri" pitchFamily="34" charset="-122"/>
-                <a:cs typeface="Calibri" pitchFamily="34" charset="-120"/>
-              </a:rPr>
-              <a:t>8.058 ns, 191 LEs</a:t>
+              <a:t>mean abs. error on (−4,4)</a:t>
             </a:r>
             <a:endParaRPr lang="en-US" sz="1200" dirty="0"/>
           </a:p>
@@ -6227,195 +7682,14 @@
       </p:sp>
       <p:sp>
         <p:nvSpPr>
-          <p:cNvPr id="11" name="Text 8"/>
-          <p:cNvSpPr txBox="1"/>
-          <p:nvPr/>
-        </p:nvSpPr>
-        <p:spPr>
-          <a:xfrm>
-            <a:off x="4434840" y="1691640"/>
-            <a:ext cx="320040" cy="457200"/>
-          </a:xfrm>
-          <a:prstGeom prst="rect">
-            <a:avLst/>
-          </a:prstGeom>
-          <a:noFill/>
-          <a:ln/>
-        </p:spPr>
-        <p:txBody>
-          <a:bodyPr wrap="square" lIns="0" tIns="0" rIns="0" bIns="0" rtlCol="0" anchor="t"/>
-          <a:lstStyle/>
-          <a:p>
-            <a:pPr algn="ctr" indent="0" marL="0">
-              <a:buNone/>
-            </a:pPr>
-            <a:r>
-              <a:rPr lang="en-US" sz="2400" dirty="0">
-                <a:solidFill>
-                  <a:srgbClr val="5B6577"/>
-                </a:solidFill>
-                <a:latin typeface="Calibri" pitchFamily="34" charset="0"/>
-                <a:ea typeface="Calibri" pitchFamily="34" charset="-122"/>
-                <a:cs typeface="Calibri" pitchFamily="34" charset="-120"/>
-              </a:rPr>
-              <a:t>→</a:t>
-            </a:r>
-            <a:endParaRPr lang="en-US" sz="2400" dirty="0"/>
-          </a:p>
-        </p:txBody>
-      </p:sp>
-      <p:sp>
-        <p:nvSpPr>
-          <p:cNvPr id="12" name="flow box 3"/>
+          <p:cNvPr id="10" name="stat card"/>
           <p:cNvSpPr/>
           <p:nvPr/>
         </p:nvSpPr>
         <p:spPr>
           <a:xfrm>
-            <a:off x="4754880" y="1371600"/>
-            <a:ext cx="1828800" cy="1097280"/>
-          </a:xfrm>
-          <a:prstGeom prst="rect">
-            <a:avLst/>
-          </a:prstGeom>
-          <a:solidFill>
-            <a:srgbClr val="2A78D6"/>
-          </a:solidFill>
-          <a:ln w="12700">
-            <a:solidFill>
-              <a:srgbClr val="2A78D6"/>
-            </a:solidFill>
-            <a:prstDash val="solid"/>
-          </a:ln>
-        </p:spPr>
-      </p:sp>
-      <p:sp>
-        <p:nvSpPr>
-          <p:cNvPr id="13" name="Text 10"/>
-          <p:cNvSpPr txBox="1"/>
-          <p:nvPr/>
-        </p:nvSpPr>
-        <p:spPr>
-          <a:xfrm>
-            <a:off x="4846320" y="1481328"/>
-            <a:ext cx="1645920" cy="365760"/>
-          </a:xfrm>
-          <a:prstGeom prst="rect">
-            <a:avLst/>
-          </a:prstGeom>
-          <a:noFill/>
-          <a:ln/>
-        </p:spPr>
-        <p:txBody>
-          <a:bodyPr wrap="square" lIns="0" tIns="0" rIns="0" bIns="0" rtlCol="0" anchor="t"/>
-          <a:lstStyle/>
-          <a:p>
-            <a:pPr algn="ctr" indent="0" marL="0">
-              <a:buNone/>
-            </a:pPr>
-            <a:r>
-              <a:rPr lang="en-US" sz="1800" b="1" dirty="0">
-                <a:solidFill>
-                  <a:srgbClr val="FFFFFF"/>
-                </a:solidFill>
-                <a:latin typeface="Calibri" pitchFamily="34" charset="0"/>
-                <a:ea typeface="Calibri" pitchFamily="34" charset="-122"/>
-                <a:cs typeface="Calibri" pitchFamily="34" charset="-120"/>
-              </a:rPr>
-              <a:t>run_gem5.py</a:t>
-            </a:r>
-            <a:endParaRPr lang="en-US" sz="1800" dirty="0"/>
-          </a:p>
-        </p:txBody>
-      </p:sp>
-      <p:sp>
-        <p:nvSpPr>
-          <p:cNvPr id="14" name="Text 11"/>
-          <p:cNvSpPr txBox="1"/>
-          <p:nvPr/>
-        </p:nvSpPr>
-        <p:spPr>
-          <a:xfrm>
-            <a:off x="4846320" y="1892808"/>
-            <a:ext cx="1645920" cy="502920"/>
-          </a:xfrm>
-          <a:prstGeom prst="rect">
-            <a:avLst/>
-          </a:prstGeom>
-          <a:noFill/>
-          <a:ln/>
-        </p:spPr>
-        <p:txBody>
-          <a:bodyPr wrap="square" lIns="0" tIns="0" rIns="0" bIns="0" rtlCol="0" anchor="t"/>
-          <a:lstStyle/>
-          <a:p>
-            <a:pPr algn="ctr" indent="0" marL="0">
-              <a:buNone/>
-            </a:pPr>
-            <a:r>
-              <a:rPr lang="en-US" sz="1200" dirty="0">
-                <a:solidFill>
-                  <a:srgbClr val="FFFFFF"/>
-                </a:solidFill>
-                <a:latin typeface="Calibri" pitchFamily="34" charset="0"/>
-                <a:ea typeface="Calibri" pitchFamily="34" charset="-122"/>
-                <a:cs typeface="Calibri" pitchFamily="34" charset="-120"/>
-              </a:rPr>
-              <a:t>latency = ceil(d / T)</a:t>
-            </a:r>
-            <a:endParaRPr lang="en-US" sz="1200" dirty="0"/>
-          </a:p>
-        </p:txBody>
-      </p:sp>
-      <p:sp>
-        <p:nvSpPr>
-          <p:cNvPr id="15" name="Text 12"/>
-          <p:cNvSpPr txBox="1"/>
-          <p:nvPr/>
-        </p:nvSpPr>
-        <p:spPr>
-          <a:xfrm>
-            <a:off x="6583680" y="1691640"/>
-            <a:ext cx="320040" cy="457200"/>
-          </a:xfrm>
-          <a:prstGeom prst="rect">
-            <a:avLst/>
-          </a:prstGeom>
-          <a:noFill/>
-          <a:ln/>
-        </p:spPr>
-        <p:txBody>
-          <a:bodyPr wrap="square" lIns="0" tIns="0" rIns="0" bIns="0" rtlCol="0" anchor="t"/>
-          <a:lstStyle/>
-          <a:p>
-            <a:pPr algn="ctr" indent="0" marL="0">
-              <a:buNone/>
-            </a:pPr>
-            <a:r>
-              <a:rPr lang="en-US" sz="2400" dirty="0">
-                <a:solidFill>
-                  <a:srgbClr val="5B6577"/>
-                </a:solidFill>
-                <a:latin typeface="Calibri" pitchFamily="34" charset="0"/>
-                <a:ea typeface="Calibri" pitchFamily="34" charset="-122"/>
-                <a:cs typeface="Calibri" pitchFamily="34" charset="-120"/>
-              </a:rPr>
-              <a:t>→</a:t>
-            </a:r>
-            <a:endParaRPr lang="en-US" sz="2400" dirty="0"/>
-          </a:p>
-        </p:txBody>
-      </p:sp>
-      <p:sp>
-        <p:nvSpPr>
-          <p:cNvPr id="16" name="flow box 4"/>
-          <p:cNvSpPr/>
-          <p:nvPr/>
-        </p:nvSpPr>
-        <p:spPr>
-          <a:xfrm>
-            <a:off x="6903720" y="1371600"/>
-            <a:ext cx="1828800" cy="1097280"/>
+            <a:off x="7086600" y="1188720"/>
+            <a:ext cx="1600200" cy="1234440"/>
           </a:xfrm>
           <a:prstGeom prst="rect">
             <a:avLst/>
@@ -6433,14 +7707,14 @@
       </p:sp>
       <p:sp>
         <p:nvSpPr>
-          <p:cNvPr id="17" name="Text 14"/>
+          <p:cNvPr id="11" name="Text 8"/>
           <p:cNvSpPr txBox="1"/>
           <p:nvPr/>
         </p:nvSpPr>
         <p:spPr>
           <a:xfrm>
-            <a:off x="6995160" y="1481328"/>
-            <a:ext cx="1645920" cy="365760"/>
+            <a:off x="7223760" y="1298448"/>
+            <a:ext cx="1325880" cy="640080"/>
           </a:xfrm>
           <a:prstGeom prst="rect">
             <a:avLst/>
@@ -6452,34 +7726,98 @@
           <a:bodyPr wrap="square" lIns="0" tIns="0" rIns="0" bIns="0" rtlCol="0" anchor="t"/>
           <a:lstStyle/>
           <a:p>
-            <a:pPr algn="ctr" indent="0" marL="0">
+            <a:pPr indent="0" marL="0">
               <a:buNone/>
             </a:pPr>
             <a:r>
-              <a:rPr lang="en-US" sz="1800" b="1" dirty="0">
-                <a:solidFill>
-                  <a:srgbClr val="14213D"/>
+              <a:rPr lang="en-US" sz="3200" b="1" dirty="0">
+                <a:solidFill>
+                  <a:srgbClr val="EB6834"/>
+                </a:solidFill>
+                <a:latin typeface="Cambria" pitchFamily="34" charset="0"/>
+                <a:ea typeface="Cambria" pitchFamily="34" charset="-122"/>
+                <a:cs typeface="Cambria" pitchFamily="34" charset="-120"/>
+              </a:rPr>
+              <a:t>0.072</a:t>
+            </a:r>
+            <a:endParaRPr lang="en-US" sz="3200" dirty="0"/>
+          </a:p>
+        </p:txBody>
+      </p:sp>
+      <p:sp>
+        <p:nvSpPr>
+          <p:cNvPr id="12" name="Text 9"/>
+          <p:cNvSpPr txBox="1"/>
+          <p:nvPr/>
+        </p:nvSpPr>
+        <p:spPr>
+          <a:xfrm>
+            <a:off x="7223760" y="1938528"/>
+            <a:ext cx="1325880" cy="457200"/>
+          </a:xfrm>
+          <a:prstGeom prst="rect">
+            <a:avLst/>
+          </a:prstGeom>
+          <a:noFill/>
+          <a:ln/>
+        </p:spPr>
+        <p:txBody>
+          <a:bodyPr wrap="square" lIns="0" tIns="0" rIns="0" bIns="0" rtlCol="0" anchor="t"/>
+          <a:lstStyle/>
+          <a:p>
+            <a:pPr indent="0" marL="0">
+              <a:buNone/>
+            </a:pPr>
+            <a:r>
+              <a:rPr lang="en-US" sz="1200" dirty="0">
+                <a:solidFill>
+                  <a:srgbClr val="5B6577"/>
                 </a:solidFill>
                 <a:latin typeface="Calibri" pitchFamily="34" charset="0"/>
                 <a:ea typeface="Calibri" pitchFamily="34" charset="-122"/>
                 <a:cs typeface="Calibri" pitchFamily="34" charset="-120"/>
               </a:rPr>
-              <a:t>gem5</a:t>
-            </a:r>
-            <a:endParaRPr lang="en-US" sz="1800" dirty="0"/>
-          </a:p>
-        </p:txBody>
-      </p:sp>
-      <p:sp>
-        <p:nvSpPr>
-          <p:cNvPr id="18" name="Text 15"/>
+              <a:t>max error at the edges</a:t>
+            </a:r>
+            <a:endParaRPr lang="en-US" sz="1200" dirty="0"/>
+          </a:p>
+        </p:txBody>
+      </p:sp>
+      <p:sp>
+        <p:nvSpPr>
+          <p:cNvPr id="13" name="stat card"/>
+          <p:cNvSpPr/>
+          <p:nvPr/>
+        </p:nvSpPr>
+        <p:spPr>
+          <a:xfrm>
+            <a:off x="5394960" y="2606040"/>
+            <a:ext cx="1600200" cy="1234440"/>
+          </a:xfrm>
+          <a:prstGeom prst="rect">
+            <a:avLst/>
+          </a:prstGeom>
+          <a:solidFill>
+            <a:srgbClr val="EEF2F8"/>
+          </a:solidFill>
+          <a:ln w="12700">
+            <a:solidFill>
+              <a:srgbClr val="EEF2F8"/>
+            </a:solidFill>
+            <a:prstDash val="solid"/>
+          </a:ln>
+        </p:spPr>
+      </p:sp>
+      <p:sp>
+        <p:nvSpPr>
+          <p:cNvPr id="14" name="Text 11"/>
           <p:cNvSpPr txBox="1"/>
           <p:nvPr/>
         </p:nvSpPr>
         <p:spPr>
           <a:xfrm>
-            <a:off x="6995160" y="1892808"/>
-            <a:ext cx="1645920" cy="502920"/>
+            <a:off x="5532120" y="2715768"/>
+            <a:ext cx="1325880" cy="640080"/>
           </a:xfrm>
           <a:prstGeom prst="rect">
             <a:avLst/>
@@ -6491,7 +7829,46 @@
           <a:bodyPr wrap="square" lIns="0" tIns="0" rIns="0" bIns="0" rtlCol="0" anchor="t"/>
           <a:lstStyle/>
           <a:p>
-            <a:pPr algn="ctr" indent="0" marL="0">
+            <a:pPr indent="0" marL="0">
+              <a:buNone/>
+            </a:pPr>
+            <a:r>
+              <a:rPr lang="en-US" sz="3200" b="1" dirty="0">
+                <a:solidFill>
+                  <a:srgbClr val="1BAF7A"/>
+                </a:solidFill>
+                <a:latin typeface="Cambria" pitchFamily="34" charset="0"/>
+                <a:ea typeface="Cambria" pitchFamily="34" charset="-122"/>
+                <a:cs typeface="Cambria" pitchFamily="34" charset="-120"/>
+              </a:rPr>
+              <a:t>191</a:t>
+            </a:r>
+            <a:endParaRPr lang="en-US" sz="3200" dirty="0"/>
+          </a:p>
+        </p:txBody>
+      </p:sp>
+      <p:sp>
+        <p:nvSpPr>
+          <p:cNvPr id="15" name="Text 12"/>
+          <p:cNvSpPr txBox="1"/>
+          <p:nvPr/>
+        </p:nvSpPr>
+        <p:spPr>
+          <a:xfrm>
+            <a:off x="5532120" y="3355848"/>
+            <a:ext cx="1325880" cy="457200"/>
+          </a:xfrm>
+          <a:prstGeom prst="rect">
+            <a:avLst/>
+          </a:prstGeom>
+          <a:noFill/>
+          <a:ln/>
+        </p:spPr>
+        <p:txBody>
+          <a:bodyPr wrap="square" lIns="0" tIns="0" rIns="0" bIns="0" rtlCol="0" anchor="t"/>
+          <a:lstStyle/>
+          <a:p>
+            <a:pPr indent="0" marL="0">
               <a:buNone/>
             </a:pPr>
             <a:r>
@@ -6503,7 +7880,7 @@
                 <a:ea typeface="Calibri" pitchFamily="34" charset="-122"/>
                 <a:cs typeface="Calibri" pitchFamily="34" charset="-120"/>
               </a:rPr>
-              <a:t>custom op class + own FU</a:t>
+              <a:t>logic elements, 0 multipliers</a:t>
             </a:r>
             <a:endParaRPr lang="en-US" sz="1200" dirty="0"/>
           </a:p>
@@ -6511,14 +7888,39 @@
       </p:sp>
       <p:sp>
         <p:nvSpPr>
-          <p:cNvPr id="19" name="Text 16"/>
+          <p:cNvPr id="16" name="stat card"/>
+          <p:cNvSpPr/>
+          <p:nvPr/>
+        </p:nvSpPr>
+        <p:spPr>
+          <a:xfrm>
+            <a:off x="7086600" y="2606040"/>
+            <a:ext cx="1600200" cy="1234440"/>
+          </a:xfrm>
+          <a:prstGeom prst="rect">
+            <a:avLst/>
+          </a:prstGeom>
+          <a:solidFill>
+            <a:srgbClr val="EEF2F8"/>
+          </a:solidFill>
+          <a:ln w="12700">
+            <a:solidFill>
+              <a:srgbClr val="EEF2F8"/>
+            </a:solidFill>
+            <a:prstDash val="solid"/>
+          </a:ln>
+        </p:spPr>
+      </p:sp>
+      <p:sp>
+        <p:nvSpPr>
+          <p:cNvPr id="17" name="Text 14"/>
           <p:cNvSpPr txBox="1"/>
           <p:nvPr/>
         </p:nvSpPr>
         <p:spPr>
           <a:xfrm>
-            <a:off x="457200" y="2834640"/>
-            <a:ext cx="4754880" cy="1371600"/>
+            <a:off x="7223760" y="2715768"/>
+            <a:ext cx="1325880" cy="640080"/>
           </a:xfrm>
           <a:prstGeom prst="rect">
             <a:avLst/>
@@ -6531,102 +7933,98 @@
           <a:lstStyle/>
           <a:p>
             <a:pPr indent="0" marL="0">
-              <a:spcAft>
-                <a:spcPts val="600"/>
-              </a:spcAft>
               <a:buNone/>
             </a:pPr>
             <a:r>
-              <a:rPr lang="en-US" sz="1600" b="1" dirty="0">
-                <a:solidFill>
-                  <a:srgbClr val="14213D"/>
+              <a:rPr lang="en-US" sz="2600" b="1" dirty="0">
+                <a:solidFill>
+                  <a:srgbClr val="2A78D6"/>
+                </a:solidFill>
+                <a:latin typeface="Cambria" pitchFamily="34" charset="0"/>
+                <a:ea typeface="Cambria" pitchFamily="34" charset="-122"/>
+                <a:cs typeface="Cambria" pitchFamily="34" charset="-120"/>
+              </a:rPr>
+              <a:t>8.06 ns</a:t>
+            </a:r>
+            <a:endParaRPr lang="en-US" sz="2600" dirty="0"/>
+          </a:p>
+        </p:txBody>
+      </p:sp>
+      <p:sp>
+        <p:nvSpPr>
+          <p:cNvPr id="18" name="Text 15"/>
+          <p:cNvSpPr txBox="1"/>
+          <p:nvPr/>
+        </p:nvSpPr>
+        <p:spPr>
+          <a:xfrm>
+            <a:off x="7223760" y="3355848"/>
+            <a:ext cx="1325880" cy="457200"/>
+          </a:xfrm>
+          <a:prstGeom prst="rect">
+            <a:avLst/>
+          </a:prstGeom>
+          <a:noFill/>
+          <a:ln/>
+        </p:spPr>
+        <p:txBody>
+          <a:bodyPr wrap="square" lIns="0" tIns="0" rIns="0" bIns="0" rtlCol="0" anchor="t"/>
+          <a:lstStyle/>
+          <a:p>
+            <a:pPr indent="0" marL="0">
+              <a:buNone/>
+            </a:pPr>
+            <a:r>
+              <a:rPr lang="en-US" sz="1200" dirty="0">
+                <a:solidFill>
+                  <a:srgbClr val="5B6577"/>
                 </a:solidFill>
                 <a:latin typeface="Calibri" pitchFamily="34" charset="0"/>
                 <a:ea typeface="Calibri" pitchFamily="34" charset="-122"/>
                 <a:cs typeface="Calibri" pitchFamily="34" charset="-120"/>
               </a:rPr>
-              <a:t>Latency at each clock (8.058 ns delay)</a:t>
-            </a:r>
-            <a:endParaRPr lang="en-US" sz="1600" dirty="0"/>
-          </a:p>
+              <a:t>data delay (Quartus)</a:t>
+            </a:r>
+            <a:endParaRPr lang="en-US" sz="1200" dirty="0"/>
+          </a:p>
+        </p:txBody>
+      </p:sp>
+      <p:sp>
+        <p:nvSpPr>
+          <p:cNvPr id="19" name="Text 16"/>
+          <p:cNvSpPr txBox="1"/>
+          <p:nvPr/>
+        </p:nvSpPr>
+        <p:spPr>
+          <a:xfrm>
+            <a:off x="5394960" y="4023360"/>
+            <a:ext cx="3291840" cy="640080"/>
+          </a:xfrm>
+          <a:prstGeom prst="rect">
+            <a:avLst/>
+          </a:prstGeom>
+          <a:noFill/>
+          <a:ln/>
+        </p:spPr>
+        <p:txBody>
+          <a:bodyPr wrap="square" lIns="0" tIns="0" rIns="0" bIns="0" rtlCol="0" anchor="t"/>
+          <a:lstStyle/>
           <a:p>
             <a:pPr indent="0" marL="0">
-              <a:spcAft>
-                <a:spcPts val="600"/>
-              </a:spcAft>
               <a:buNone/>
             </a:pPr>
             <a:r>
-              <a:rPr lang="en-US" sz="1500" dirty="0">
-                <a:solidFill>
-                  <a:srgbClr val="1F2937"/>
+              <a:rPr lang="en-US" sz="1300" dirty="0">
+                <a:solidFill>
+                  <a:srgbClr val="5B6577"/>
                 </a:solidFill>
                 <a:latin typeface="Calibri" pitchFamily="34" charset="0"/>
                 <a:ea typeface="Calibri" pitchFamily="34" charset="-122"/>
                 <a:cs typeface="Calibri" pitchFamily="34" charset="-120"/>
               </a:rPr>
-              <a:t>100 MHz → 1 cycle    200 MHz → 2    500 MHz → 5</a:t>
-            </a:r>
-            <a:endParaRPr lang="en-US" sz="1600" dirty="0"/>
-          </a:p>
-          <a:p>
-            <a:pPr indent="0" marL="0">
-              <a:spcAft>
-                <a:spcPts val="600"/>
-              </a:spcAft>
-              <a:buNone/>
-            </a:pPr>
-            <a:r>
-              <a:rPr lang="en-US" sz="1500" dirty="0">
-                <a:solidFill>
-                  <a:srgbClr val="1F2937"/>
-                </a:solidFill>
-                <a:latin typeface="Calibri" pitchFamily="34" charset="0"/>
-                <a:ea typeface="Calibri" pitchFamily="34" charset="-122"/>
-                <a:cs typeface="Calibri" pitchFamily="34" charset="-120"/>
-              </a:rPr>
-              <a:t>1 GHz → 12 stages (pipelined) or 9 cycles (multi-cycle)</a:t>
-            </a:r>
-            <a:endParaRPr lang="en-US" sz="1600" dirty="0"/>
-          </a:p>
-        </p:txBody>
-      </p:sp>
-      <p:sp>
-        <p:nvSpPr>
-          <p:cNvPr id="20" name="Text 17"/>
-          <p:cNvSpPr txBox="1"/>
-          <p:nvPr/>
-        </p:nvSpPr>
-        <p:spPr>
-          <a:xfrm>
-            <a:off x="5577840" y="2834640"/>
-            <a:ext cx="3108960" cy="1371600"/>
-          </a:xfrm>
-          <a:prstGeom prst="rect">
-            <a:avLst/>
-          </a:prstGeom>
-          <a:noFill/>
-          <a:ln/>
-        </p:spPr>
-        <p:txBody>
-          <a:bodyPr wrap="square" lIns="0" tIns="0" rIns="0" bIns="0" rtlCol="0" anchor="t"/>
-          <a:lstStyle/>
-          <a:p>
-            <a:pPr indent="0" marL="0">
-              <a:buNone/>
-            </a:pPr>
-            <a:r>
-              <a:rPr lang="en-US" sz="1400" dirty="0">
-                <a:solidFill>
-                  <a:srgbClr val="5B6577"/>
-                </a:solidFill>
-                <a:latin typeface="Calibri" pitchFamily="34" charset="0"/>
-                <a:ea typeface="Calibri" pitchFamily="34" charset="-122"/>
-                <a:cs typeface="Calibri" pitchFamily="34" charset="-120"/>
-              </a:rPr>
-              <a:t>Custom-0 opcode 0x0B, rd = f4(rs1). Same binaries run on MinorCPU (in-order) and O3CPU (out-of-order). 296 gem5 runs.</a:t>
-            </a:r>
-            <a:endParaRPr lang="en-US" sz="1600" dirty="0"/>
+              <a:t>Checked on all 65,536 inputs: RTL, C, PyTorch and the gem5 instruction agree with the golden model, 0 mismatches.</a:t>
+            </a:r>
+            <a:endParaRPr lang="en-US" sz="1300" dirty="0"/>
           </a:p>
         </p:txBody>
       </p:sp>
@@ -6738,46 +8136,22 @@
                 <a:ea typeface="Cambria" pitchFamily="34" charset="-122"/>
                 <a:cs typeface="Cambria" pitchFamily="34" charset="-120"/>
               </a:rPr>
-              <a:t>Iron law: the loop is 24–36× faster than expf</a:t>
+              <a:t>Synthesis delay to gem5 latency, by script</a:t>
             </a:r>
             <a:endParaRPr lang="en-US" sz="2600" dirty="0"/>
           </a:p>
         </p:txBody>
       </p:sp>
-      <p:pic>
-        <p:nvPicPr>
-          <p:cNvPr id="4" name="Image 0" descr="Cycles per activation for five variants on two cores">    </p:cNvPr>
-          <p:cNvPicPr>
-            <a:picLocks noChangeAspect="1"/>
-          </p:cNvPicPr>
-          <p:nvPr/>
-        </p:nvPicPr>
-        <p:blipFill>
-          <a:blip r:embed="rId1"/>
-          <a:stretch>
-            <a:fillRect/>
-          </a:stretch>
-        </p:blipFill>
-        <p:spPr>
-          <a:xfrm>
-            <a:off x="457200" y="1143000"/>
-            <a:ext cx="4754880" cy="2523744"/>
-          </a:xfrm>
-          <a:prstGeom prst="rect">
-            <a:avLst/>
-          </a:prstGeom>
-        </p:spPr>
-      </p:pic>
-      <p:sp>
-        <p:nvSpPr>
-          <p:cNvPr id="5" name="stat card"/>
+      <p:sp>
+        <p:nvSpPr>
+          <p:cNvPr id="4" name="flow box 1"/>
           <p:cNvSpPr/>
           <p:nvPr/>
         </p:nvSpPr>
         <p:spPr>
           <a:xfrm>
-            <a:off x="5486400" y="1143000"/>
-            <a:ext cx="1600200" cy="1234440"/>
+            <a:off x="457200" y="1371600"/>
+            <a:ext cx="1828800" cy="1097280"/>
           </a:xfrm>
           <a:prstGeom prst="rect">
             <a:avLst/>
@@ -6795,14 +8169,14 @@
       </p:sp>
       <p:sp>
         <p:nvSpPr>
-          <p:cNvPr id="6" name="Text 2"/>
+          <p:cNvPr id="5" name="Text 2"/>
           <p:cNvSpPr txBox="1"/>
           <p:nvPr/>
         </p:nvSpPr>
         <p:spPr>
           <a:xfrm>
-            <a:off x="5623560" y="1252728"/>
-            <a:ext cx="1325880" cy="640080"/>
+            <a:off x="548640" y="1481328"/>
+            <a:ext cx="1645920" cy="365760"/>
           </a:xfrm>
           <a:prstGeom prst="rect">
             <a:avLst/>
@@ -6814,58 +8188,58 @@
           <a:bodyPr wrap="square" lIns="0" tIns="0" rIns="0" bIns="0" rtlCol="0" anchor="t"/>
           <a:lstStyle/>
           <a:p>
-            <a:pPr indent="0" marL="0">
+            <a:pPr algn="ctr" indent="0" marL="0">
               <a:buNone/>
             </a:pPr>
             <a:r>
-              <a:rPr lang="en-US" sz="3200" b="1" dirty="0">
-                <a:solidFill>
-                  <a:srgbClr val="2A78D6"/>
-                </a:solidFill>
-                <a:latin typeface="Cambria" pitchFamily="34" charset="0"/>
-                <a:ea typeface="Cambria" pitchFamily="34" charset="-122"/>
-                <a:cs typeface="Cambria" pitchFamily="34" charset="-120"/>
-              </a:rPr>
-              <a:t>24×</a:t>
-            </a:r>
-            <a:endParaRPr lang="en-US" sz="3200" dirty="0"/>
-          </a:p>
-        </p:txBody>
-      </p:sp>
-      <p:sp>
-        <p:nvSpPr>
-          <p:cNvPr id="7" name="Text 3"/>
-          <p:cNvSpPr txBox="1"/>
-          <p:nvPr/>
-        </p:nvSpPr>
-        <p:spPr>
-          <a:xfrm>
-            <a:off x="5623560" y="1892808"/>
-            <a:ext cx="1325880" cy="457200"/>
-          </a:xfrm>
-          <a:prstGeom prst="rect">
-            <a:avLst/>
-          </a:prstGeom>
-          <a:noFill/>
-          <a:ln/>
-        </p:spPr>
-        <p:txBody>
-          <a:bodyPr wrap="square" lIns="0" tIns="0" rIns="0" bIns="0" rtlCol="0" anchor="t"/>
-          <a:lstStyle/>
-          <a:p>
-            <a:pPr indent="0" marL="0">
-              <a:buNone/>
-            </a:pPr>
-            <a:r>
-              <a:rPr lang="en-US" sz="1200" dirty="0">
-                <a:solidFill>
-                  <a:srgbClr val="5B6577"/>
+              <a:rPr lang="en-US" sz="1800" b="1" dirty="0">
+                <a:solidFill>
+                  <a:srgbClr val="14213D"/>
                 </a:solidFill>
                 <a:latin typeface="Calibri" pitchFamily="34" charset="0"/>
                 <a:ea typeface="Calibri" pitchFamily="34" charset="-122"/>
                 <a:cs typeface="Calibri" pitchFamily="34" charset="-120"/>
               </a:rPr>
-              <a:t>vs expf, in-order</a:t>
+              <a:t>RTL</a:t>
+            </a:r>
+            <a:endParaRPr lang="en-US" sz="1800" dirty="0"/>
+          </a:p>
+        </p:txBody>
+      </p:sp>
+      <p:sp>
+        <p:nvSpPr>
+          <p:cNvPr id="6" name="Text 3"/>
+          <p:cNvSpPr txBox="1"/>
+          <p:nvPr/>
+        </p:nvSpPr>
+        <p:spPr>
+          <a:xfrm>
+            <a:off x="548640" y="1892808"/>
+            <a:ext cx="1645920" cy="502920"/>
+          </a:xfrm>
+          <a:prstGeom prst="rect">
+            <a:avLst/>
+          </a:prstGeom>
+          <a:noFill/>
+          <a:ln/>
+        </p:spPr>
+        <p:txBody>
+          <a:bodyPr wrap="square" lIns="0" tIns="0" rIns="0" bIns="0" rtlCol="0" anchor="t"/>
+          <a:lstStyle/>
+          <a:p>
+            <a:pPr algn="ctr" indent="0" marL="0">
+              <a:buNone/>
+            </a:pPr>
+            <a:r>
+              <a:rPr lang="en-US" sz="1200" dirty="0">
+                <a:solidFill>
+                  <a:srgbClr val="5B6577"/>
+                </a:solidFill>
+                <a:latin typeface="Calibri" pitchFamily="34" charset="0"/>
+                <a:ea typeface="Calibri" pitchFamily="34" charset="-122"/>
+                <a:cs typeface="Calibri" pitchFamily="34" charset="-120"/>
+              </a:rPr>
+              <a:t>silu.v, combinational</a:t>
             </a:r>
             <a:endParaRPr lang="en-US" sz="1200" dirty="0"/>
           </a:p>
@@ -6873,14 +8247,53 @@
       </p:sp>
       <p:sp>
         <p:nvSpPr>
-          <p:cNvPr id="8" name="stat card"/>
+          <p:cNvPr id="7" name="Text 4"/>
+          <p:cNvSpPr txBox="1"/>
+          <p:nvPr/>
+        </p:nvSpPr>
+        <p:spPr>
+          <a:xfrm>
+            <a:off x="2286000" y="1691640"/>
+            <a:ext cx="320040" cy="457200"/>
+          </a:xfrm>
+          <a:prstGeom prst="rect">
+            <a:avLst/>
+          </a:prstGeom>
+          <a:noFill/>
+          <a:ln/>
+        </p:spPr>
+        <p:txBody>
+          <a:bodyPr wrap="square" lIns="0" tIns="0" rIns="0" bIns="0" rtlCol="0" anchor="t"/>
+          <a:lstStyle/>
+          <a:p>
+            <a:pPr algn="ctr" indent="0" marL="0">
+              <a:buNone/>
+            </a:pPr>
+            <a:r>
+              <a:rPr lang="en-US" sz="2400" dirty="0">
+                <a:solidFill>
+                  <a:srgbClr val="5B6577"/>
+                </a:solidFill>
+                <a:latin typeface="Calibri" pitchFamily="34" charset="0"/>
+                <a:ea typeface="Calibri" pitchFamily="34" charset="-122"/>
+                <a:cs typeface="Calibri" pitchFamily="34" charset="-120"/>
+              </a:rPr>
+              <a:t>→</a:t>
+            </a:r>
+            <a:endParaRPr lang="en-US" sz="2400" dirty="0"/>
+          </a:p>
+        </p:txBody>
+      </p:sp>
+      <p:sp>
+        <p:nvSpPr>
+          <p:cNvPr id="8" name="flow box 2"/>
           <p:cNvSpPr/>
           <p:nvPr/>
         </p:nvSpPr>
         <p:spPr>
           <a:xfrm>
-            <a:off x="7086600" y="1143000"/>
-            <a:ext cx="1600200" cy="1234440"/>
+            <a:off x="2606040" y="1371600"/>
+            <a:ext cx="1828800" cy="1097280"/>
           </a:xfrm>
           <a:prstGeom prst="rect">
             <a:avLst/>
@@ -6898,14 +8311,14 @@
       </p:sp>
       <p:sp>
         <p:nvSpPr>
-          <p:cNvPr id="9" name="Text 5"/>
+          <p:cNvPr id="9" name="Text 6"/>
           <p:cNvSpPr txBox="1"/>
           <p:nvPr/>
         </p:nvSpPr>
         <p:spPr>
           <a:xfrm>
-            <a:off x="7223760" y="1252728"/>
-            <a:ext cx="1325880" cy="640080"/>
+            <a:off x="2697480" y="1481328"/>
+            <a:ext cx="1645920" cy="365760"/>
           </a:xfrm>
           <a:prstGeom prst="rect">
             <a:avLst/>
@@ -6917,58 +8330,58 @@
           <a:bodyPr wrap="square" lIns="0" tIns="0" rIns="0" bIns="0" rtlCol="0" anchor="t"/>
           <a:lstStyle/>
           <a:p>
-            <a:pPr indent="0" marL="0">
+            <a:pPr algn="ctr" indent="0" marL="0">
               <a:buNone/>
             </a:pPr>
             <a:r>
-              <a:rPr lang="en-US" sz="3200" b="1" dirty="0">
-                <a:solidFill>
-                  <a:srgbClr val="1BAF7A"/>
-                </a:solidFill>
-                <a:latin typeface="Cambria" pitchFamily="34" charset="0"/>
-                <a:ea typeface="Cambria" pitchFamily="34" charset="-122"/>
-                <a:cs typeface="Cambria" pitchFamily="34" charset="-120"/>
-              </a:rPr>
-              <a:t>36×</a:t>
-            </a:r>
-            <a:endParaRPr lang="en-US" sz="3200" dirty="0"/>
-          </a:p>
-        </p:txBody>
-      </p:sp>
-      <p:sp>
-        <p:nvSpPr>
-          <p:cNvPr id="10" name="Text 6"/>
-          <p:cNvSpPr txBox="1"/>
-          <p:nvPr/>
-        </p:nvSpPr>
-        <p:spPr>
-          <a:xfrm>
-            <a:off x="7223760" y="1892808"/>
-            <a:ext cx="1325880" cy="457200"/>
-          </a:xfrm>
-          <a:prstGeom prst="rect">
-            <a:avLst/>
-          </a:prstGeom>
-          <a:noFill/>
-          <a:ln/>
-        </p:spPr>
-        <p:txBody>
-          <a:bodyPr wrap="square" lIns="0" tIns="0" rIns="0" bIns="0" rtlCol="0" anchor="t"/>
-          <a:lstStyle/>
-          <a:p>
-            <a:pPr indent="0" marL="0">
-              <a:buNone/>
-            </a:pPr>
-            <a:r>
-              <a:rPr lang="en-US" sz="1200" dirty="0">
-                <a:solidFill>
-                  <a:srgbClr val="5B6577"/>
+              <a:rPr lang="en-US" sz="1800" b="1" dirty="0">
+                <a:solidFill>
+                  <a:srgbClr val="14213D"/>
                 </a:solidFill>
                 <a:latin typeface="Calibri" pitchFamily="34" charset="0"/>
                 <a:ea typeface="Calibri" pitchFamily="34" charset="-122"/>
                 <a:cs typeface="Calibri" pitchFamily="34" charset="-120"/>
               </a:rPr>
-              <a:t>vs expf, out-of-order</a:t>
+              <a:t>Quartus</a:t>
+            </a:r>
+            <a:endParaRPr lang="en-US" sz="1800" dirty="0"/>
+          </a:p>
+        </p:txBody>
+      </p:sp>
+      <p:sp>
+        <p:nvSpPr>
+          <p:cNvPr id="10" name="Text 7"/>
+          <p:cNvSpPr txBox="1"/>
+          <p:nvPr/>
+        </p:nvSpPr>
+        <p:spPr>
+          <a:xfrm>
+            <a:off x="2697480" y="1892808"/>
+            <a:ext cx="1645920" cy="502920"/>
+          </a:xfrm>
+          <a:prstGeom prst="rect">
+            <a:avLst/>
+          </a:prstGeom>
+          <a:noFill/>
+          <a:ln/>
+        </p:spPr>
+        <p:txBody>
+          <a:bodyPr wrap="square" lIns="0" tIns="0" rIns="0" bIns="0" rtlCol="0" anchor="t"/>
+          <a:lstStyle/>
+          <a:p>
+            <a:pPr algn="ctr" indent="0" marL="0">
+              <a:buNone/>
+            </a:pPr>
+            <a:r>
+              <a:rPr lang="en-US" sz="1200" dirty="0">
+                <a:solidFill>
+                  <a:srgbClr val="5B6577"/>
+                </a:solidFill>
+                <a:latin typeface="Calibri" pitchFamily="34" charset="0"/>
+                <a:ea typeface="Calibri" pitchFamily="34" charset="-122"/>
+                <a:cs typeface="Calibri" pitchFamily="34" charset="-120"/>
+              </a:rPr>
+              <a:t>8.058 ns, 191 LEs</a:t>
             </a:r>
             <a:endParaRPr lang="en-US" sz="1200" dirty="0"/>
           </a:p>
@@ -6976,14 +8389,195 @@
       </p:sp>
       <p:sp>
         <p:nvSpPr>
-          <p:cNvPr id="11" name="stat card"/>
+          <p:cNvPr id="11" name="Text 8"/>
+          <p:cNvSpPr txBox="1"/>
+          <p:nvPr/>
+        </p:nvSpPr>
+        <p:spPr>
+          <a:xfrm>
+            <a:off x="4434840" y="1691640"/>
+            <a:ext cx="320040" cy="457200"/>
+          </a:xfrm>
+          <a:prstGeom prst="rect">
+            <a:avLst/>
+          </a:prstGeom>
+          <a:noFill/>
+          <a:ln/>
+        </p:spPr>
+        <p:txBody>
+          <a:bodyPr wrap="square" lIns="0" tIns="0" rIns="0" bIns="0" rtlCol="0" anchor="t"/>
+          <a:lstStyle/>
+          <a:p>
+            <a:pPr algn="ctr" indent="0" marL="0">
+              <a:buNone/>
+            </a:pPr>
+            <a:r>
+              <a:rPr lang="en-US" sz="2400" dirty="0">
+                <a:solidFill>
+                  <a:srgbClr val="5B6577"/>
+                </a:solidFill>
+                <a:latin typeface="Calibri" pitchFamily="34" charset="0"/>
+                <a:ea typeface="Calibri" pitchFamily="34" charset="-122"/>
+                <a:cs typeface="Calibri" pitchFamily="34" charset="-120"/>
+              </a:rPr>
+              <a:t>→</a:t>
+            </a:r>
+            <a:endParaRPr lang="en-US" sz="2400" dirty="0"/>
+          </a:p>
+        </p:txBody>
+      </p:sp>
+      <p:sp>
+        <p:nvSpPr>
+          <p:cNvPr id="12" name="flow box 3"/>
           <p:cNvSpPr/>
           <p:nvPr/>
         </p:nvSpPr>
         <p:spPr>
           <a:xfrm>
-            <a:off x="5486400" y="2514600"/>
-            <a:ext cx="1600200" cy="1234440"/>
+            <a:off x="4754880" y="1371600"/>
+            <a:ext cx="1828800" cy="1097280"/>
+          </a:xfrm>
+          <a:prstGeom prst="rect">
+            <a:avLst/>
+          </a:prstGeom>
+          <a:solidFill>
+            <a:srgbClr val="2A78D6"/>
+          </a:solidFill>
+          <a:ln w="12700">
+            <a:solidFill>
+              <a:srgbClr val="2A78D6"/>
+            </a:solidFill>
+            <a:prstDash val="solid"/>
+          </a:ln>
+        </p:spPr>
+      </p:sp>
+      <p:sp>
+        <p:nvSpPr>
+          <p:cNvPr id="13" name="Text 10"/>
+          <p:cNvSpPr txBox="1"/>
+          <p:nvPr/>
+        </p:nvSpPr>
+        <p:spPr>
+          <a:xfrm>
+            <a:off x="4846320" y="1481328"/>
+            <a:ext cx="1645920" cy="365760"/>
+          </a:xfrm>
+          <a:prstGeom prst="rect">
+            <a:avLst/>
+          </a:prstGeom>
+          <a:noFill/>
+          <a:ln/>
+        </p:spPr>
+        <p:txBody>
+          <a:bodyPr wrap="square" lIns="0" tIns="0" rIns="0" bIns="0" rtlCol="0" anchor="t"/>
+          <a:lstStyle/>
+          <a:p>
+            <a:pPr algn="ctr" indent="0" marL="0">
+              <a:buNone/>
+            </a:pPr>
+            <a:r>
+              <a:rPr lang="en-US" sz="1800" b="1" dirty="0">
+                <a:solidFill>
+                  <a:srgbClr val="FFFFFF"/>
+                </a:solidFill>
+                <a:latin typeface="Calibri" pitchFamily="34" charset="0"/>
+                <a:ea typeface="Calibri" pitchFamily="34" charset="-122"/>
+                <a:cs typeface="Calibri" pitchFamily="34" charset="-120"/>
+              </a:rPr>
+              <a:t>run_gem5.py</a:t>
+            </a:r>
+            <a:endParaRPr lang="en-US" sz="1800" dirty="0"/>
+          </a:p>
+        </p:txBody>
+      </p:sp>
+      <p:sp>
+        <p:nvSpPr>
+          <p:cNvPr id="14" name="Text 11"/>
+          <p:cNvSpPr txBox="1"/>
+          <p:nvPr/>
+        </p:nvSpPr>
+        <p:spPr>
+          <a:xfrm>
+            <a:off x="4846320" y="1892808"/>
+            <a:ext cx="1645920" cy="502920"/>
+          </a:xfrm>
+          <a:prstGeom prst="rect">
+            <a:avLst/>
+          </a:prstGeom>
+          <a:noFill/>
+          <a:ln/>
+        </p:spPr>
+        <p:txBody>
+          <a:bodyPr wrap="square" lIns="0" tIns="0" rIns="0" bIns="0" rtlCol="0" anchor="t"/>
+          <a:lstStyle/>
+          <a:p>
+            <a:pPr algn="ctr" indent="0" marL="0">
+              <a:buNone/>
+            </a:pPr>
+            <a:r>
+              <a:rPr lang="en-US" sz="1200" dirty="0">
+                <a:solidFill>
+                  <a:srgbClr val="FFFFFF"/>
+                </a:solidFill>
+                <a:latin typeface="Calibri" pitchFamily="34" charset="0"/>
+                <a:ea typeface="Calibri" pitchFamily="34" charset="-122"/>
+                <a:cs typeface="Calibri" pitchFamily="34" charset="-120"/>
+              </a:rPr>
+              <a:t>latency = ceil(d / T)</a:t>
+            </a:r>
+            <a:endParaRPr lang="en-US" sz="1200" dirty="0"/>
+          </a:p>
+        </p:txBody>
+      </p:sp>
+      <p:sp>
+        <p:nvSpPr>
+          <p:cNvPr id="15" name="Text 12"/>
+          <p:cNvSpPr txBox="1"/>
+          <p:nvPr/>
+        </p:nvSpPr>
+        <p:spPr>
+          <a:xfrm>
+            <a:off x="6583680" y="1691640"/>
+            <a:ext cx="320040" cy="457200"/>
+          </a:xfrm>
+          <a:prstGeom prst="rect">
+            <a:avLst/>
+          </a:prstGeom>
+          <a:noFill/>
+          <a:ln/>
+        </p:spPr>
+        <p:txBody>
+          <a:bodyPr wrap="square" lIns="0" tIns="0" rIns="0" bIns="0" rtlCol="0" anchor="t"/>
+          <a:lstStyle/>
+          <a:p>
+            <a:pPr algn="ctr" indent="0" marL="0">
+              <a:buNone/>
+            </a:pPr>
+            <a:r>
+              <a:rPr lang="en-US" sz="2400" dirty="0">
+                <a:solidFill>
+                  <a:srgbClr val="5B6577"/>
+                </a:solidFill>
+                <a:latin typeface="Calibri" pitchFamily="34" charset="0"/>
+                <a:ea typeface="Calibri" pitchFamily="34" charset="-122"/>
+                <a:cs typeface="Calibri" pitchFamily="34" charset="-120"/>
+              </a:rPr>
+              <a:t>→</a:t>
+            </a:r>
+            <a:endParaRPr lang="en-US" sz="2400" dirty="0"/>
+          </a:p>
+        </p:txBody>
+      </p:sp>
+      <p:sp>
+        <p:nvSpPr>
+          <p:cNvPr id="16" name="flow box 4"/>
+          <p:cNvSpPr/>
+          <p:nvPr/>
+        </p:nvSpPr>
+        <p:spPr>
+          <a:xfrm>
+            <a:off x="6903720" y="1371600"/>
+            <a:ext cx="1828800" cy="1097280"/>
           </a:xfrm>
           <a:prstGeom prst="rect">
             <a:avLst/>
@@ -7001,14 +8595,14 @@
       </p:sp>
       <p:sp>
         <p:nvSpPr>
-          <p:cNvPr id="12" name="Text 8"/>
+          <p:cNvPr id="17" name="Text 14"/>
           <p:cNvSpPr txBox="1"/>
           <p:nvPr/>
         </p:nvSpPr>
         <p:spPr>
           <a:xfrm>
-            <a:off x="5623560" y="2624328"/>
-            <a:ext cx="1325880" cy="640080"/>
+            <a:off x="6995160" y="1481328"/>
+            <a:ext cx="1645920" cy="365760"/>
           </a:xfrm>
           <a:prstGeom prst="rect">
             <a:avLst/>
@@ -7020,98 +8614,34 @@
           <a:bodyPr wrap="square" lIns="0" tIns="0" rIns="0" bIns="0" rtlCol="0" anchor="t"/>
           <a:lstStyle/>
           <a:p>
-            <a:pPr indent="0" marL="0">
+            <a:pPr algn="ctr" indent="0" marL="0">
               <a:buNone/>
             </a:pPr>
             <a:r>
-              <a:rPr lang="en-US" sz="3200" b="1" dirty="0">
-                <a:solidFill>
-                  <a:srgbClr val="EB6834"/>
-                </a:solidFill>
-                <a:latin typeface="Cambria" pitchFamily="34" charset="0"/>
-                <a:ea typeface="Cambria" pitchFamily="34" charset="-122"/>
-                <a:cs typeface="Cambria" pitchFamily="34" charset="-120"/>
-              </a:rPr>
-              <a:t>2.4×</a:t>
-            </a:r>
-            <a:endParaRPr lang="en-US" sz="3200" dirty="0"/>
-          </a:p>
-        </p:txBody>
-      </p:sp>
-      <p:sp>
-        <p:nvSpPr>
-          <p:cNvPr id="13" name="Text 9"/>
-          <p:cNvSpPr txBox="1"/>
-          <p:nvPr/>
-        </p:nvSpPr>
-        <p:spPr>
-          <a:xfrm>
-            <a:off x="5623560" y="3264408"/>
-            <a:ext cx="1325880" cy="457200"/>
-          </a:xfrm>
-          <a:prstGeom prst="rect">
-            <a:avLst/>
-          </a:prstGeom>
-          <a:noFill/>
-          <a:ln/>
-        </p:spPr>
-        <p:txBody>
-          <a:bodyPr wrap="square" lIns="0" tIns="0" rIns="0" bIns="0" rtlCol="0" anchor="t"/>
-          <a:lstStyle/>
-          <a:p>
-            <a:pPr indent="0" marL="0">
-              <a:buNone/>
-            </a:pPr>
-            <a:r>
-              <a:rPr lang="en-US" sz="1200" dirty="0">
-                <a:solidFill>
-                  <a:srgbClr val="5B6577"/>
+              <a:rPr lang="en-US" sz="1800" b="1" dirty="0">
+                <a:solidFill>
+                  <a:srgbClr val="14213D"/>
                 </a:solidFill>
                 <a:latin typeface="Calibri" pitchFamily="34" charset="0"/>
                 <a:ea typeface="Calibri" pitchFamily="34" charset="-122"/>
                 <a:cs typeface="Calibri" pitchFamily="34" charset="-120"/>
               </a:rPr>
-              <a:t>vs integer f4, in-order</a:t>
-            </a:r>
-            <a:endParaRPr lang="en-US" sz="1200" dirty="0"/>
-          </a:p>
-        </p:txBody>
-      </p:sp>
-      <p:sp>
-        <p:nvSpPr>
-          <p:cNvPr id="14" name="stat card"/>
-          <p:cNvSpPr/>
-          <p:nvPr/>
-        </p:nvSpPr>
-        <p:spPr>
-          <a:xfrm>
-            <a:off x="7086600" y="2514600"/>
-            <a:ext cx="1600200" cy="1234440"/>
-          </a:xfrm>
-          <a:prstGeom prst="rect">
-            <a:avLst/>
-          </a:prstGeom>
-          <a:solidFill>
-            <a:srgbClr val="EEF2F8"/>
-          </a:solidFill>
-          <a:ln w="12700">
-            <a:solidFill>
-              <a:srgbClr val="EEF2F8"/>
-            </a:solidFill>
-            <a:prstDash val="solid"/>
-          </a:ln>
-        </p:spPr>
-      </p:sp>
-      <p:sp>
-        <p:nvSpPr>
-          <p:cNvPr id="15" name="Text 11"/>
+              <a:t>gem5</a:t>
+            </a:r>
+            <a:endParaRPr lang="en-US" sz="1800" dirty="0"/>
+          </a:p>
+        </p:txBody>
+      </p:sp>
+      <p:sp>
+        <p:nvSpPr>
+          <p:cNvPr id="18" name="Text 15"/>
           <p:cNvSpPr txBox="1"/>
           <p:nvPr/>
         </p:nvSpPr>
         <p:spPr>
           <a:xfrm>
-            <a:off x="7223760" y="2624328"/>
-            <a:ext cx="1325880" cy="640080"/>
+            <a:off x="6995160" y="1892808"/>
+            <a:ext cx="1645920" cy="502920"/>
           </a:xfrm>
           <a:prstGeom prst="rect">
             <a:avLst/>
@@ -7123,46 +8653,7 @@
           <a:bodyPr wrap="square" lIns="0" tIns="0" rIns="0" bIns="0" rtlCol="0" anchor="t"/>
           <a:lstStyle/>
           <a:p>
-            <a:pPr indent="0" marL="0">
-              <a:buNone/>
-            </a:pPr>
-            <a:r>
-              <a:rPr lang="en-US" sz="3200" b="1" dirty="0">
-                <a:solidFill>
-                  <a:srgbClr val="EB6834"/>
-                </a:solidFill>
-                <a:latin typeface="Cambria" pitchFamily="34" charset="0"/>
-                <a:ea typeface="Cambria" pitchFamily="34" charset="-122"/>
-                <a:cs typeface="Cambria" pitchFamily="34" charset="-120"/>
-              </a:rPr>
-              <a:t>3.7×</a:t>
-            </a:r>
-            <a:endParaRPr lang="en-US" sz="3200" dirty="0"/>
-          </a:p>
-        </p:txBody>
-      </p:sp>
-      <p:sp>
-        <p:nvSpPr>
-          <p:cNvPr id="16" name="Text 12"/>
-          <p:cNvSpPr txBox="1"/>
-          <p:nvPr/>
-        </p:nvSpPr>
-        <p:spPr>
-          <a:xfrm>
-            <a:off x="7223760" y="3264408"/>
-            <a:ext cx="1325880" cy="457200"/>
-          </a:xfrm>
-          <a:prstGeom prst="rect">
-            <a:avLst/>
-          </a:prstGeom>
-          <a:noFill/>
-          <a:ln/>
-        </p:spPr>
-        <p:txBody>
-          <a:bodyPr wrap="square" lIns="0" tIns="0" rIns="0" bIns="0" rtlCol="0" anchor="t"/>
-          <a:lstStyle/>
-          <a:p>
-            <a:pPr indent="0" marL="0">
+            <a:pPr algn="ctr" indent="0" marL="0">
               <a:buNone/>
             </a:pPr>
             <a:r>
@@ -7174,7 +8665,7 @@
                 <a:ea typeface="Calibri" pitchFamily="34" charset="-122"/>
                 <a:cs typeface="Calibri" pitchFamily="34" charset="-120"/>
               </a:rPr>
-              <a:t>vs integer f4, out-of-order</a:t>
+              <a:t>custom op class + own FU</a:t>
             </a:r>
             <a:endParaRPr lang="en-US" sz="1200" dirty="0"/>
           </a:p>
@@ -7182,14 +8673,14 @@
       </p:sp>
       <p:sp>
         <p:nvSpPr>
-          <p:cNvPr id="17" name="Text 13"/>
+          <p:cNvPr id="19" name="Text 16"/>
           <p:cNvSpPr txBox="1"/>
           <p:nvPr/>
         </p:nvSpPr>
         <p:spPr>
           <a:xfrm>
-            <a:off x="457200" y="3840480"/>
-            <a:ext cx="8229600" cy="822960"/>
+            <a:off x="457200" y="2834640"/>
+            <a:ext cx="4754880" cy="1371600"/>
           </a:xfrm>
           <a:prstGeom prst="rect">
             <a:avLst/>
@@ -7202,20 +8693,102 @@
           <a:lstStyle/>
           <a:p>
             <a:pPr indent="0" marL="0">
+              <a:spcAft>
+                <a:spcPts val="600"/>
+              </a:spcAft>
               <a:buNone/>
             </a:pPr>
             <a:r>
-              <a:rPr lang="en-US" sz="1400" dirty="0">
-                <a:solidFill>
-                  <a:srgbClr val="5B6577"/>
+              <a:rPr lang="en-US" sz="1600" b="1" dirty="0">
+                <a:solidFill>
+                  <a:srgbClr val="14213D"/>
                 </a:solidFill>
                 <a:latin typeface="Calibri" pitchFamily="34" charset="0"/>
                 <a:ea typeface="Calibri" pitchFamily="34" charset="-122"/>
                 <a:cs typeface="Calibri" pitchFamily="34" charset="-120"/>
               </a:rPr>
-              <a:t>6 instructions per activation (5 are loop overhead) vs 12.8 for integer f4 and 114 for expf. Out-of-order reaches 1.03 cycles: the front end is the limit. CPI alone misleads: in-order CPI rises vs the table (1.17 vs 1.00) yet it is 3× faster.</a:t>
-            </a:r>
-            <a:endParaRPr lang="en-US" sz="1400" dirty="0"/>
+              <a:t>Latency at each clock (8.058 ns delay)</a:t>
+            </a:r>
+            <a:endParaRPr lang="en-US" sz="1600" dirty="0"/>
+          </a:p>
+          <a:p>
+            <a:pPr indent="0" marL="0">
+              <a:spcAft>
+                <a:spcPts val="600"/>
+              </a:spcAft>
+              <a:buNone/>
+            </a:pPr>
+            <a:r>
+              <a:rPr lang="en-US" sz="1500" dirty="0">
+                <a:solidFill>
+                  <a:srgbClr val="1F2937"/>
+                </a:solidFill>
+                <a:latin typeface="Calibri" pitchFamily="34" charset="0"/>
+                <a:ea typeface="Calibri" pitchFamily="34" charset="-122"/>
+                <a:cs typeface="Calibri" pitchFamily="34" charset="-120"/>
+              </a:rPr>
+              <a:t>100 MHz → 1 cycle    200 MHz → 2    500 MHz → 5</a:t>
+            </a:r>
+            <a:endParaRPr lang="en-US" sz="1600" dirty="0"/>
+          </a:p>
+          <a:p>
+            <a:pPr indent="0" marL="0">
+              <a:spcAft>
+                <a:spcPts val="600"/>
+              </a:spcAft>
+              <a:buNone/>
+            </a:pPr>
+            <a:r>
+              <a:rPr lang="en-US" sz="1500" dirty="0">
+                <a:solidFill>
+                  <a:srgbClr val="1F2937"/>
+                </a:solidFill>
+                <a:latin typeface="Calibri" pitchFamily="34" charset="0"/>
+                <a:ea typeface="Calibri" pitchFamily="34" charset="-122"/>
+                <a:cs typeface="Calibri" pitchFamily="34" charset="-120"/>
+              </a:rPr>
+              <a:t>1 GHz → 12 stages (pipelined) or 9 cycles (multi-cycle)</a:t>
+            </a:r>
+            <a:endParaRPr lang="en-US" sz="1600" dirty="0"/>
+          </a:p>
+        </p:txBody>
+      </p:sp>
+      <p:sp>
+        <p:nvSpPr>
+          <p:cNvPr id="20" name="Text 17"/>
+          <p:cNvSpPr txBox="1"/>
+          <p:nvPr/>
+        </p:nvSpPr>
+        <p:spPr>
+          <a:xfrm>
+            <a:off x="5577840" y="2834640"/>
+            <a:ext cx="3108960" cy="1371600"/>
+          </a:xfrm>
+          <a:prstGeom prst="rect">
+            <a:avLst/>
+          </a:prstGeom>
+          <a:noFill/>
+          <a:ln/>
+        </p:spPr>
+        <p:txBody>
+          <a:bodyPr wrap="square" lIns="0" tIns="0" rIns="0" bIns="0" rtlCol="0" anchor="t"/>
+          <a:lstStyle/>
+          <a:p>
+            <a:pPr indent="0" marL="0">
+              <a:buNone/>
+            </a:pPr>
+            <a:r>
+              <a:rPr lang="en-US" sz="1400" dirty="0">
+                <a:solidFill>
+                  <a:srgbClr val="5B6577"/>
+                </a:solidFill>
+                <a:latin typeface="Calibri" pitchFamily="34" charset="0"/>
+                <a:ea typeface="Calibri" pitchFamily="34" charset="-122"/>
+                <a:cs typeface="Calibri" pitchFamily="34" charset="-120"/>
+              </a:rPr>
+              <a:t>Custom-0 opcode 0x0B, rd = f4(rs1). Same binaries run on MinorCPU (in-order) and O3CPU (out-of-order). 296 gem5 runs.</a:t>
+            </a:r>
+            <a:endParaRPr lang="en-US" sz="1600" dirty="0"/>
           </a:p>
         </p:txBody>
       </p:sp>
@@ -7327,7 +8900,7 @@
                 <a:ea typeface="Cambria" pitchFamily="34" charset="-122"/>
                 <a:cs typeface="Cambria" pitchFamily="34" charset="-120"/>
               </a:rPr>
-              <a:t>Hazards: pipeline the unit for out-of-order</a:t>
+              <a:t>Iron law: the loop is 24–36× faster than expf</a:t>
             </a:r>
             <a:endParaRPr lang="en-US" sz="2600" dirty="0"/>
           </a:p>
@@ -7335,7 +8908,7 @@
       </p:sp>
       <p:pic>
         <p:nvPicPr>
-          <p:cNvPr id="4" name="Image 0" descr="Cycles per activation vs unit latency">    </p:cNvPr>
+          <p:cNvPr id="4" name="Image 0" descr="Cycles per activation for five variants on two cores">    </p:cNvPr>
           <p:cNvPicPr>
             <a:picLocks noChangeAspect="1"/>
           </p:cNvPicPr>
@@ -7349,8 +8922,8 @@
         </p:blipFill>
         <p:spPr>
           <a:xfrm>
-            <a:off x="457200" y="1097280"/>
-            <a:ext cx="8229600" cy="3209544"/>
+            <a:off x="457200" y="1143000"/>
+            <a:ext cx="4754880" cy="2523744"/>
           </a:xfrm>
           <a:prstGeom prst="rect">
             <a:avLst/>
@@ -7359,14 +8932,39 @@
       </p:pic>
       <p:sp>
         <p:nvSpPr>
-          <p:cNvPr id="5" name="Text 1"/>
+          <p:cNvPr id="5" name="stat card"/>
+          <p:cNvSpPr/>
+          <p:nvPr/>
+        </p:nvSpPr>
+        <p:spPr>
+          <a:xfrm>
+            <a:off x="5486400" y="1143000"/>
+            <a:ext cx="1600200" cy="1234440"/>
+          </a:xfrm>
+          <a:prstGeom prst="rect">
+            <a:avLst/>
+          </a:prstGeom>
+          <a:solidFill>
+            <a:srgbClr val="EEF2F8"/>
+          </a:solidFill>
+          <a:ln w="12700">
+            <a:solidFill>
+              <a:srgbClr val="EEF2F8"/>
+            </a:solidFill>
+            <a:prstDash val="solid"/>
+          </a:ln>
+        </p:spPr>
+      </p:sp>
+      <p:sp>
+        <p:nvSpPr>
+          <p:cNvPr id="6" name="Text 2"/>
           <p:cNvSpPr txBox="1"/>
           <p:nvPr/>
         </p:nvSpPr>
         <p:spPr>
           <a:xfrm>
-            <a:off x="457200" y="4343400"/>
-            <a:ext cx="7863840" cy="457200"/>
+            <a:off x="5623560" y="1252728"/>
+            <a:ext cx="1325880" cy="640080"/>
           </a:xfrm>
           <a:prstGeom prst="rect">
             <a:avLst/>
@@ -7382,7 +8980,46 @@
               <a:buNone/>
             </a:pPr>
             <a:r>
-              <a:rPr lang="en-US" sz="1400" dirty="0">
+              <a:rPr lang="en-US" sz="3200" b="1" dirty="0">
+                <a:solidFill>
+                  <a:srgbClr val="2A78D6"/>
+                </a:solidFill>
+                <a:latin typeface="Cambria" pitchFamily="34" charset="0"/>
+                <a:ea typeface="Cambria" pitchFamily="34" charset="-122"/>
+                <a:cs typeface="Cambria" pitchFamily="34" charset="-120"/>
+              </a:rPr>
+              <a:t>24×</a:t>
+            </a:r>
+            <a:endParaRPr lang="en-US" sz="3200" dirty="0"/>
+          </a:p>
+        </p:txBody>
+      </p:sp>
+      <p:sp>
+        <p:nvSpPr>
+          <p:cNvPr id="7" name="Text 3"/>
+          <p:cNvSpPr txBox="1"/>
+          <p:nvPr/>
+        </p:nvSpPr>
+        <p:spPr>
+          <a:xfrm>
+            <a:off x="5623560" y="1892808"/>
+            <a:ext cx="1325880" cy="457200"/>
+          </a:xfrm>
+          <a:prstGeom prst="rect">
+            <a:avLst/>
+          </a:prstGeom>
+          <a:noFill/>
+          <a:ln/>
+        </p:spPr>
+        <p:txBody>
+          <a:bodyPr wrap="square" lIns="0" tIns="0" rIns="0" bIns="0" rtlCol="0" anchor="t"/>
+          <a:lstStyle/>
+          <a:p>
+            <a:pPr indent="0" marL="0">
+              <a:buNone/>
+            </a:pPr>
+            <a:r>
+              <a:rPr lang="en-US" sz="1200" dirty="0">
                 <a:solidFill>
                   <a:srgbClr val="5B6577"/>
                 </a:solidFill>
@@ -7390,7 +9027,355 @@
                 <a:ea typeface="Calibri" pitchFamily="34" charset="-122"/>
                 <a:cs typeface="Calibri" pitchFamily="34" charset="-120"/>
               </a:rPr>
-              <a:t>Out-of-order: pipelined hides every latency to 16 cycles (1.03). Unpipelined 5-cycle unit at 500 MHz is 0.76× the speed of integer f4.</a:t>
+              <a:t>vs expf, in-order</a:t>
+            </a:r>
+            <a:endParaRPr lang="en-US" sz="1200" dirty="0"/>
+          </a:p>
+        </p:txBody>
+      </p:sp>
+      <p:sp>
+        <p:nvSpPr>
+          <p:cNvPr id="8" name="stat card"/>
+          <p:cNvSpPr/>
+          <p:nvPr/>
+        </p:nvSpPr>
+        <p:spPr>
+          <a:xfrm>
+            <a:off x="7086600" y="1143000"/>
+            <a:ext cx="1600200" cy="1234440"/>
+          </a:xfrm>
+          <a:prstGeom prst="rect">
+            <a:avLst/>
+          </a:prstGeom>
+          <a:solidFill>
+            <a:srgbClr val="EEF2F8"/>
+          </a:solidFill>
+          <a:ln w="12700">
+            <a:solidFill>
+              <a:srgbClr val="EEF2F8"/>
+            </a:solidFill>
+            <a:prstDash val="solid"/>
+          </a:ln>
+        </p:spPr>
+      </p:sp>
+      <p:sp>
+        <p:nvSpPr>
+          <p:cNvPr id="9" name="Text 5"/>
+          <p:cNvSpPr txBox="1"/>
+          <p:nvPr/>
+        </p:nvSpPr>
+        <p:spPr>
+          <a:xfrm>
+            <a:off x="7223760" y="1252728"/>
+            <a:ext cx="1325880" cy="640080"/>
+          </a:xfrm>
+          <a:prstGeom prst="rect">
+            <a:avLst/>
+          </a:prstGeom>
+          <a:noFill/>
+          <a:ln/>
+        </p:spPr>
+        <p:txBody>
+          <a:bodyPr wrap="square" lIns="0" tIns="0" rIns="0" bIns="0" rtlCol="0" anchor="t"/>
+          <a:lstStyle/>
+          <a:p>
+            <a:pPr indent="0" marL="0">
+              <a:buNone/>
+            </a:pPr>
+            <a:r>
+              <a:rPr lang="en-US" sz="3200" b="1" dirty="0">
+                <a:solidFill>
+                  <a:srgbClr val="1BAF7A"/>
+                </a:solidFill>
+                <a:latin typeface="Cambria" pitchFamily="34" charset="0"/>
+                <a:ea typeface="Cambria" pitchFamily="34" charset="-122"/>
+                <a:cs typeface="Cambria" pitchFamily="34" charset="-120"/>
+              </a:rPr>
+              <a:t>36×</a:t>
+            </a:r>
+            <a:endParaRPr lang="en-US" sz="3200" dirty="0"/>
+          </a:p>
+        </p:txBody>
+      </p:sp>
+      <p:sp>
+        <p:nvSpPr>
+          <p:cNvPr id="10" name="Text 6"/>
+          <p:cNvSpPr txBox="1"/>
+          <p:nvPr/>
+        </p:nvSpPr>
+        <p:spPr>
+          <a:xfrm>
+            <a:off x="7223760" y="1892808"/>
+            <a:ext cx="1325880" cy="457200"/>
+          </a:xfrm>
+          <a:prstGeom prst="rect">
+            <a:avLst/>
+          </a:prstGeom>
+          <a:noFill/>
+          <a:ln/>
+        </p:spPr>
+        <p:txBody>
+          <a:bodyPr wrap="square" lIns="0" tIns="0" rIns="0" bIns="0" rtlCol="0" anchor="t"/>
+          <a:lstStyle/>
+          <a:p>
+            <a:pPr indent="0" marL="0">
+              <a:buNone/>
+            </a:pPr>
+            <a:r>
+              <a:rPr lang="en-US" sz="1200" dirty="0">
+                <a:solidFill>
+                  <a:srgbClr val="5B6577"/>
+                </a:solidFill>
+                <a:latin typeface="Calibri" pitchFamily="34" charset="0"/>
+                <a:ea typeface="Calibri" pitchFamily="34" charset="-122"/>
+                <a:cs typeface="Calibri" pitchFamily="34" charset="-120"/>
+              </a:rPr>
+              <a:t>vs expf, out-of-order</a:t>
+            </a:r>
+            <a:endParaRPr lang="en-US" sz="1200" dirty="0"/>
+          </a:p>
+        </p:txBody>
+      </p:sp>
+      <p:sp>
+        <p:nvSpPr>
+          <p:cNvPr id="11" name="stat card"/>
+          <p:cNvSpPr/>
+          <p:nvPr/>
+        </p:nvSpPr>
+        <p:spPr>
+          <a:xfrm>
+            <a:off x="5486400" y="2514600"/>
+            <a:ext cx="1600200" cy="1234440"/>
+          </a:xfrm>
+          <a:prstGeom prst="rect">
+            <a:avLst/>
+          </a:prstGeom>
+          <a:solidFill>
+            <a:srgbClr val="EEF2F8"/>
+          </a:solidFill>
+          <a:ln w="12700">
+            <a:solidFill>
+              <a:srgbClr val="EEF2F8"/>
+            </a:solidFill>
+            <a:prstDash val="solid"/>
+          </a:ln>
+        </p:spPr>
+      </p:sp>
+      <p:sp>
+        <p:nvSpPr>
+          <p:cNvPr id="12" name="Text 8"/>
+          <p:cNvSpPr txBox="1"/>
+          <p:nvPr/>
+        </p:nvSpPr>
+        <p:spPr>
+          <a:xfrm>
+            <a:off x="5623560" y="2624328"/>
+            <a:ext cx="1325880" cy="640080"/>
+          </a:xfrm>
+          <a:prstGeom prst="rect">
+            <a:avLst/>
+          </a:prstGeom>
+          <a:noFill/>
+          <a:ln/>
+        </p:spPr>
+        <p:txBody>
+          <a:bodyPr wrap="square" lIns="0" tIns="0" rIns="0" bIns="0" rtlCol="0" anchor="t"/>
+          <a:lstStyle/>
+          <a:p>
+            <a:pPr indent="0" marL="0">
+              <a:buNone/>
+            </a:pPr>
+            <a:r>
+              <a:rPr lang="en-US" sz="3200" b="1" dirty="0">
+                <a:solidFill>
+                  <a:srgbClr val="EB6834"/>
+                </a:solidFill>
+                <a:latin typeface="Cambria" pitchFamily="34" charset="0"/>
+                <a:ea typeface="Cambria" pitchFamily="34" charset="-122"/>
+                <a:cs typeface="Cambria" pitchFamily="34" charset="-120"/>
+              </a:rPr>
+              <a:t>2.4×</a:t>
+            </a:r>
+            <a:endParaRPr lang="en-US" sz="3200" dirty="0"/>
+          </a:p>
+        </p:txBody>
+      </p:sp>
+      <p:sp>
+        <p:nvSpPr>
+          <p:cNvPr id="13" name="Text 9"/>
+          <p:cNvSpPr txBox="1"/>
+          <p:nvPr/>
+        </p:nvSpPr>
+        <p:spPr>
+          <a:xfrm>
+            <a:off x="5623560" y="3264408"/>
+            <a:ext cx="1325880" cy="457200"/>
+          </a:xfrm>
+          <a:prstGeom prst="rect">
+            <a:avLst/>
+          </a:prstGeom>
+          <a:noFill/>
+          <a:ln/>
+        </p:spPr>
+        <p:txBody>
+          <a:bodyPr wrap="square" lIns="0" tIns="0" rIns="0" bIns="0" rtlCol="0" anchor="t"/>
+          <a:lstStyle/>
+          <a:p>
+            <a:pPr indent="0" marL="0">
+              <a:buNone/>
+            </a:pPr>
+            <a:r>
+              <a:rPr lang="en-US" sz="1200" dirty="0">
+                <a:solidFill>
+                  <a:srgbClr val="5B6577"/>
+                </a:solidFill>
+                <a:latin typeface="Calibri" pitchFamily="34" charset="0"/>
+                <a:ea typeface="Calibri" pitchFamily="34" charset="-122"/>
+                <a:cs typeface="Calibri" pitchFamily="34" charset="-120"/>
+              </a:rPr>
+              <a:t>vs integer f4, in-order</a:t>
+            </a:r>
+            <a:endParaRPr lang="en-US" sz="1200" dirty="0"/>
+          </a:p>
+        </p:txBody>
+      </p:sp>
+      <p:sp>
+        <p:nvSpPr>
+          <p:cNvPr id="14" name="stat card"/>
+          <p:cNvSpPr/>
+          <p:nvPr/>
+        </p:nvSpPr>
+        <p:spPr>
+          <a:xfrm>
+            <a:off x="7086600" y="2514600"/>
+            <a:ext cx="1600200" cy="1234440"/>
+          </a:xfrm>
+          <a:prstGeom prst="rect">
+            <a:avLst/>
+          </a:prstGeom>
+          <a:solidFill>
+            <a:srgbClr val="EEF2F8"/>
+          </a:solidFill>
+          <a:ln w="12700">
+            <a:solidFill>
+              <a:srgbClr val="EEF2F8"/>
+            </a:solidFill>
+            <a:prstDash val="solid"/>
+          </a:ln>
+        </p:spPr>
+      </p:sp>
+      <p:sp>
+        <p:nvSpPr>
+          <p:cNvPr id="15" name="Text 11"/>
+          <p:cNvSpPr txBox="1"/>
+          <p:nvPr/>
+        </p:nvSpPr>
+        <p:spPr>
+          <a:xfrm>
+            <a:off x="7223760" y="2624328"/>
+            <a:ext cx="1325880" cy="640080"/>
+          </a:xfrm>
+          <a:prstGeom prst="rect">
+            <a:avLst/>
+          </a:prstGeom>
+          <a:noFill/>
+          <a:ln/>
+        </p:spPr>
+        <p:txBody>
+          <a:bodyPr wrap="square" lIns="0" tIns="0" rIns="0" bIns="0" rtlCol="0" anchor="t"/>
+          <a:lstStyle/>
+          <a:p>
+            <a:pPr indent="0" marL="0">
+              <a:buNone/>
+            </a:pPr>
+            <a:r>
+              <a:rPr lang="en-US" sz="3200" b="1" dirty="0">
+                <a:solidFill>
+                  <a:srgbClr val="EB6834"/>
+                </a:solidFill>
+                <a:latin typeface="Cambria" pitchFamily="34" charset="0"/>
+                <a:ea typeface="Cambria" pitchFamily="34" charset="-122"/>
+                <a:cs typeface="Cambria" pitchFamily="34" charset="-120"/>
+              </a:rPr>
+              <a:t>3.7×</a:t>
+            </a:r>
+            <a:endParaRPr lang="en-US" sz="3200" dirty="0"/>
+          </a:p>
+        </p:txBody>
+      </p:sp>
+      <p:sp>
+        <p:nvSpPr>
+          <p:cNvPr id="16" name="Text 12"/>
+          <p:cNvSpPr txBox="1"/>
+          <p:nvPr/>
+        </p:nvSpPr>
+        <p:spPr>
+          <a:xfrm>
+            <a:off x="7223760" y="3264408"/>
+            <a:ext cx="1325880" cy="457200"/>
+          </a:xfrm>
+          <a:prstGeom prst="rect">
+            <a:avLst/>
+          </a:prstGeom>
+          <a:noFill/>
+          <a:ln/>
+        </p:spPr>
+        <p:txBody>
+          <a:bodyPr wrap="square" lIns="0" tIns="0" rIns="0" bIns="0" rtlCol="0" anchor="t"/>
+          <a:lstStyle/>
+          <a:p>
+            <a:pPr indent="0" marL="0">
+              <a:buNone/>
+            </a:pPr>
+            <a:r>
+              <a:rPr lang="en-US" sz="1200" dirty="0">
+                <a:solidFill>
+                  <a:srgbClr val="5B6577"/>
+                </a:solidFill>
+                <a:latin typeface="Calibri" pitchFamily="34" charset="0"/>
+                <a:ea typeface="Calibri" pitchFamily="34" charset="-122"/>
+                <a:cs typeface="Calibri" pitchFamily="34" charset="-120"/>
+              </a:rPr>
+              <a:t>vs integer f4, out-of-order</a:t>
+            </a:r>
+            <a:endParaRPr lang="en-US" sz="1200" dirty="0"/>
+          </a:p>
+        </p:txBody>
+      </p:sp>
+      <p:sp>
+        <p:nvSpPr>
+          <p:cNvPr id="17" name="Text 13"/>
+          <p:cNvSpPr txBox="1"/>
+          <p:nvPr/>
+        </p:nvSpPr>
+        <p:spPr>
+          <a:xfrm>
+            <a:off x="457200" y="3840480"/>
+            <a:ext cx="8229600" cy="822960"/>
+          </a:xfrm>
+          <a:prstGeom prst="rect">
+            <a:avLst/>
+          </a:prstGeom>
+          <a:noFill/>
+          <a:ln/>
+        </p:spPr>
+        <p:txBody>
+          <a:bodyPr wrap="square" lIns="0" tIns="0" rIns="0" bIns="0" rtlCol="0" anchor="t"/>
+          <a:lstStyle/>
+          <a:p>
+            <a:pPr indent="0" marL="0">
+              <a:buNone/>
+            </a:pPr>
+            <a:r>
+              <a:rPr lang="en-US" sz="1400" dirty="0">
+                <a:solidFill>
+                  <a:srgbClr val="5B6577"/>
+                </a:solidFill>
+                <a:latin typeface="Calibri" pitchFamily="34" charset="0"/>
+                <a:ea typeface="Calibri" pitchFamily="34" charset="-122"/>
+                <a:cs typeface="Calibri" pitchFamily="34" charset="-120"/>
+              </a:rPr>
+              <a:t>6 instructions per activation (5 are loop overhead) vs 12.8 for integer f4 and 114 for expf. Out-of-order reaches 1.03 cycles: the front end is the limit. CPI alone misleads: in-order CPI rises vs the table (1.17 vs 1.00) yet it is 3× faster.</a:t>
             </a:r>
             <a:endParaRPr lang="en-US" sz="1400" dirty="0"/>
           </a:p>
@@ -7504,7 +9489,7 @@
                 <a:ea typeface="Cambria" pitchFamily="34" charset="-122"/>
                 <a:cs typeface="Cambria" pitchFamily="34" charset="-120"/>
               </a:rPr>
-              <a:t>Faster clock means more cycles of latency</a:t>
+              <a:t>Hazards: pipeline the unit for out-of-order</a:t>
             </a:r>
             <a:endParaRPr lang="en-US" sz="2600" dirty="0"/>
           </a:p>
@@ -7512,7 +9497,7 @@
       </p:sp>
       <p:pic>
         <p:nvPicPr>
-          <p:cNvPr id="4" name="Image 0" descr="Wall-clock time per activation vs clock">    </p:cNvPr>
+          <p:cNvPr id="4" name="Image 0" descr="Cycles per activation vs unit latency">    </p:cNvPr>
           <p:cNvPicPr>
             <a:picLocks noChangeAspect="1"/>
           </p:cNvPicPr>
@@ -7527,7 +9512,7 @@
         <p:spPr>
           <a:xfrm>
             <a:off x="457200" y="1097280"/>
-            <a:ext cx="8229600" cy="3410712"/>
+            <a:ext cx="8229600" cy="3209544"/>
           </a:xfrm>
           <a:prstGeom prst="rect">
             <a:avLst/>
@@ -7542,8 +9527,8 @@
         </p:nvSpPr>
         <p:spPr>
           <a:xfrm>
-            <a:off x="457200" y="4526280"/>
-            <a:ext cx="7863840" cy="274320"/>
+            <a:off x="457200" y="4343400"/>
+            <a:ext cx="7863840" cy="457200"/>
           </a:xfrm>
           <a:prstGeom prst="rect">
             <a:avLst/>
@@ -7559,7 +9544,7 @@
               <a:buNone/>
             </a:pPr>
             <a:r>
-              <a:rPr lang="en-US" sz="1200" dirty="0">
+              <a:rPr lang="en-US" sz="1400" dirty="0">
                 <a:solidFill>
                   <a:srgbClr val="5B6577"/>
                 </a:solidFill>
@@ -7567,9 +9552,9 @@
                 <a:ea typeface="Calibri" pitchFamily="34" charset="-122"/>
                 <a:cs typeface="Calibri" pitchFamily="34" charset="-120"/>
               </a:rPr>
-              <a:t>Clocks above about 123 MHz extrapolate an FPGA slow-corner delay: illustrative.</a:t>
-            </a:r>
-            <a:endParaRPr lang="en-US" sz="1200" dirty="0"/>
+              <a:t>Out-of-order: pipelined hides every latency to 16 cycles (1.03). Unpipelined 5-cycle unit at 500 MHz is 0.76× the speed of integer f4.</a:t>
+            </a:r>
+            <a:endParaRPr lang="en-US" sz="1400" dirty="0"/>
           </a:p>
         </p:txBody>
       </p:sp>
@@ -7681,7 +9666,7 @@
                 <a:ea typeface="Cambria" pitchFamily="34" charset="-122"/>
                 <a:cs typeface="Cambria" pitchFamily="34" charset="-120"/>
               </a:rPr>
-              <a:t>Branch prediction flatters sorted inputs</a:t>
+              <a:t>Faster clock means more cycles of latency</a:t>
             </a:r>
             <a:endParaRPr lang="en-US" sz="2600" dirty="0"/>
           </a:p>
@@ -7689,7 +9674,7 @@
       </p:sp>
       <p:pic>
         <p:nvPicPr>
-          <p:cNvPr id="4" name="Image 0" descr="Sorted vs shuffled inputs">    </p:cNvPr>
+          <p:cNvPr id="4" name="Image 0" descr="Wall-clock time per activation vs clock">    </p:cNvPr>
           <p:cNvPicPr>
             <a:picLocks noChangeAspect="1"/>
           </p:cNvPicPr>
@@ -7704,7 +9689,7 @@
         <p:spPr>
           <a:xfrm>
             <a:off x="457200" y="1097280"/>
-            <a:ext cx="5394960" cy="2103120"/>
+            <a:ext cx="8229600" cy="3410712"/>
           </a:xfrm>
           <a:prstGeom prst="rect">
             <a:avLst/>
@@ -7713,78 +9698,14 @@
       </p:pic>
       <p:sp>
         <p:nvSpPr>
-          <p:cNvPr id="5" name="stat card"/>
-          <p:cNvSpPr/>
-          <p:nvPr/>
-        </p:nvSpPr>
-        <p:spPr>
-          <a:xfrm>
-            <a:off x="6126480" y="1097280"/>
-            <a:ext cx="1280160" cy="1234440"/>
-          </a:xfrm>
-          <a:prstGeom prst="rect">
-            <a:avLst/>
-          </a:prstGeom>
-          <a:solidFill>
-            <a:srgbClr val="EEF2F8"/>
-          </a:solidFill>
-          <a:ln w="12700">
-            <a:solidFill>
-              <a:srgbClr val="EEF2F8"/>
-            </a:solidFill>
-            <a:prstDash val="solid"/>
-          </a:ln>
-        </p:spPr>
-      </p:sp>
-      <p:sp>
-        <p:nvSpPr>
-          <p:cNvPr id="6" name="Text 2"/>
+          <p:cNvPr id="5" name="Text 1"/>
           <p:cNvSpPr txBox="1"/>
           <p:nvPr/>
         </p:nvSpPr>
         <p:spPr>
           <a:xfrm>
-            <a:off x="6263640" y="1207008"/>
-            <a:ext cx="1005840" cy="640080"/>
-          </a:xfrm>
-          <a:prstGeom prst="rect">
-            <a:avLst/>
-          </a:prstGeom>
-          <a:noFill/>
-          <a:ln/>
-        </p:spPr>
-        <p:txBody>
-          <a:bodyPr wrap="square" lIns="0" tIns="0" rIns="0" bIns="0" rtlCol="0" anchor="t"/>
-          <a:lstStyle/>
-          <a:p>
-            <a:pPr indent="0" marL="0">
-              <a:buNone/>
-            </a:pPr>
-            <a:r>
-              <a:rPr lang="en-US" sz="2800" b="1" dirty="0">
-                <a:solidFill>
-                  <a:srgbClr val="EB6834"/>
-                </a:solidFill>
-                <a:latin typeface="Cambria" pitchFamily="34" charset="0"/>
-                <a:ea typeface="Cambria" pitchFamily="34" charset="-122"/>
-                <a:cs typeface="Cambria" pitchFamily="34" charset="-120"/>
-              </a:rPr>
-              <a:t>0.41</a:t>
-            </a:r>
-            <a:endParaRPr lang="en-US" sz="2800" dirty="0"/>
-          </a:p>
-        </p:txBody>
-      </p:sp>
-      <p:sp>
-        <p:nvSpPr>
-          <p:cNvPr id="7" name="Text 3"/>
-          <p:cNvSpPr txBox="1"/>
-          <p:nvPr/>
-        </p:nvSpPr>
-        <p:spPr>
-          <a:xfrm>
-            <a:off x="6263640" y="1847088"/>
-            <a:ext cx="1005840" cy="457200"/>
+            <a:off x="457200" y="4526280"/>
+            <a:ext cx="7863840" cy="274320"/>
           </a:xfrm>
           <a:prstGeom prst="rect">
             <a:avLst/>
@@ -7808,151 +9729,9 @@
                 <a:ea typeface="Calibri" pitchFamily="34" charset="-122"/>
                 <a:cs typeface="Calibri" pitchFamily="34" charset="-120"/>
               </a:rPr>
-              <a:t>mispredicts per activation (f4)</a:t>
+              <a:t>Clocks above about 123 MHz extrapolate an FPGA slow-corner delay: illustrative.</a:t>
             </a:r>
             <a:endParaRPr lang="en-US" sz="1200" dirty="0"/>
-          </a:p>
-        </p:txBody>
-      </p:sp>
-      <p:sp>
-        <p:nvSpPr>
-          <p:cNvPr id="8" name="stat card"/>
-          <p:cNvSpPr/>
-          <p:nvPr/>
-        </p:nvSpPr>
-        <p:spPr>
-          <a:xfrm>
-            <a:off x="7498080" y="1097280"/>
-            <a:ext cx="1188720" cy="1234440"/>
-          </a:xfrm>
-          <a:prstGeom prst="rect">
-            <a:avLst/>
-          </a:prstGeom>
-          <a:solidFill>
-            <a:srgbClr val="EEF2F8"/>
-          </a:solidFill>
-          <a:ln w="12700">
-            <a:solidFill>
-              <a:srgbClr val="EEF2F8"/>
-            </a:solidFill>
-            <a:prstDash val="solid"/>
-          </a:ln>
-        </p:spPr>
-      </p:sp>
-      <p:sp>
-        <p:nvSpPr>
-          <p:cNvPr id="9" name="Text 5"/>
-          <p:cNvSpPr txBox="1"/>
-          <p:nvPr/>
-        </p:nvSpPr>
-        <p:spPr>
-          <a:xfrm>
-            <a:off x="7635240" y="1207008"/>
-            <a:ext cx="914400" cy="640080"/>
-          </a:xfrm>
-          <a:prstGeom prst="rect">
-            <a:avLst/>
-          </a:prstGeom>
-          <a:noFill/>
-          <a:ln/>
-        </p:spPr>
-        <p:txBody>
-          <a:bodyPr wrap="square" lIns="0" tIns="0" rIns="0" bIns="0" rtlCol="0" anchor="t"/>
-          <a:lstStyle/>
-          <a:p>
-            <a:pPr indent="0" marL="0">
-              <a:buNone/>
-            </a:pPr>
-            <a:r>
-              <a:rPr lang="en-US" sz="2800" b="1" dirty="0">
-                <a:solidFill>
-                  <a:srgbClr val="1BAF7A"/>
-                </a:solidFill>
-                <a:latin typeface="Cambria" pitchFamily="34" charset="0"/>
-                <a:ea typeface="Cambria" pitchFamily="34" charset="-122"/>
-                <a:cs typeface="Cambria" pitchFamily="34" charset="-120"/>
-              </a:rPr>
-              <a:t>9.0×</a:t>
-            </a:r>
-            <a:endParaRPr lang="en-US" sz="2800" dirty="0"/>
-          </a:p>
-        </p:txBody>
-      </p:sp>
-      <p:sp>
-        <p:nvSpPr>
-          <p:cNvPr id="10" name="Text 6"/>
-          <p:cNvSpPr txBox="1"/>
-          <p:nvPr/>
-        </p:nvSpPr>
-        <p:spPr>
-          <a:xfrm>
-            <a:off x="7635240" y="1847088"/>
-            <a:ext cx="914400" cy="457200"/>
-          </a:xfrm>
-          <a:prstGeom prst="rect">
-            <a:avLst/>
-          </a:prstGeom>
-          <a:noFill/>
-          <a:ln/>
-        </p:spPr>
-        <p:txBody>
-          <a:bodyPr wrap="square" lIns="0" tIns="0" rIns="0" bIns="0" rtlCol="0" anchor="t"/>
-          <a:lstStyle/>
-          <a:p>
-            <a:pPr indent="0" marL="0">
-              <a:buNone/>
-            </a:pPr>
-            <a:r>
-              <a:rPr lang="en-US" sz="1200" dirty="0">
-                <a:solidFill>
-                  <a:srgbClr val="5B6577"/>
-                </a:solidFill>
-                <a:latin typeface="Calibri" pitchFamily="34" charset="0"/>
-                <a:ea typeface="Calibri" pitchFamily="34" charset="-122"/>
-                <a:cs typeface="Calibri" pitchFamily="34" charset="-120"/>
-              </a:rPr>
-              <a:t>instruction vs f4, OoO, shuffled</a:t>
-            </a:r>
-            <a:endParaRPr lang="en-US" sz="1200" dirty="0"/>
-          </a:p>
-        </p:txBody>
-      </p:sp>
-      <p:sp>
-        <p:nvSpPr>
-          <p:cNvPr id="11" name="Text 7"/>
-          <p:cNvSpPr txBox="1"/>
-          <p:nvPr/>
-        </p:nvSpPr>
-        <p:spPr>
-          <a:xfrm>
-            <a:off x="457200" y="3474720"/>
-            <a:ext cx="8229600" cy="1097280"/>
-          </a:xfrm>
-          <a:prstGeom prst="rect">
-            <a:avLst/>
-          </a:prstGeom>
-          <a:noFill/>
-          <a:ln/>
-        </p:spPr>
-        <p:txBody>
-          <a:bodyPr wrap="square" lIns="0" tIns="0" rIns="0" bIns="0" rtlCol="0" anchor="t"/>
-          <a:lstStyle/>
-          <a:p>
-            <a:pPr indent="0" marL="0">
-              <a:buNone/>
-            </a:pPr>
-            <a:r>
-              <a:rPr lang="en-US" sz="1500" dirty="0">
-                <a:solidFill>
-                  <a:srgbClr val="1F2937"/>
-                </a:solidFill>
-                <a:latin typeface="Calibri" pitchFamily="34" charset="0"/>
-                <a:ea typeface="Calibri" pitchFamily="34" charset="-122"/>
-                <a:cs typeface="Calibri" pitchFamily="34" charset="-120"/>
-              </a:rPr>
-              <a:t>The table and the instruction have no data-dependent branch. With shuffled data the OoO core takes 9.2 cycles for software f4 and 1.03 for the instruction: much of the gap is removed mispredictions, not just fewer instructions.</a:t>
-            </a:r>
-            <a:endParaRPr lang="en-US" sz="1500" dirty="0"/>
           </a:p>
         </p:txBody>
       </p:sp>
@@ -8064,7 +9843,7 @@
                 <a:ea typeface="Cambria" pitchFamily="34" charset="-122"/>
                 <a:cs typeface="Cambria" pitchFamily="34" charset="-120"/>
               </a:rPr>
-              <a:t>Controls: code placement and cache pressure</a:t>
+              <a:t>Branch prediction flatters sorted inputs</a:t>
             </a:r>
             <a:endParaRPr lang="en-US" sz="2600" dirty="0"/>
           </a:p>
@@ -8072,7 +9851,7 @@
       </p:sp>
       <p:pic>
         <p:nvPicPr>
-          <p:cNvPr id="4" name="Image 0" descr="Cycles per activation vs L1D size">    </p:cNvPr>
+          <p:cNvPr id="4" name="Image 0" descr="Sorted vs shuffled inputs">    </p:cNvPr>
           <p:cNvPicPr>
             <a:picLocks noChangeAspect="1"/>
           </p:cNvPicPr>
@@ -8103,7 +9882,7 @@
         <p:spPr>
           <a:xfrm>
             <a:off x="6126480" y="1097280"/>
-            <a:ext cx="2560320" cy="1234440"/>
+            <a:ext cx="1280160" cy="1234440"/>
           </a:xfrm>
           <a:prstGeom prst="rect">
             <a:avLst/>
@@ -8128,7 +9907,7 @@
         <p:spPr>
           <a:xfrm>
             <a:off x="6263640" y="1207008"/>
-            <a:ext cx="2286000" cy="640080"/>
+            <a:ext cx="1005840" cy="640080"/>
           </a:xfrm>
           <a:prstGeom prst="rect">
             <a:avLst/>
@@ -8144,7 +9923,7 @@
               <a:buNone/>
             </a:pPr>
             <a:r>
-              <a:rPr lang="en-US" sz="3200" b="1" dirty="0">
+              <a:rPr lang="en-US" sz="2800" b="1" dirty="0">
                 <a:solidFill>
                   <a:srgbClr val="EB6834"/>
                 </a:solidFill>
@@ -8152,9 +9931,9 @@
                 <a:ea typeface="Cambria" pitchFamily="34" charset="-122"/>
                 <a:cs typeface="Cambria" pitchFamily="34" charset="-120"/>
               </a:rPr>
-              <a:t>1–4 cycles</a:t>
-            </a:r>
-            <a:endParaRPr lang="en-US" sz="3200" dirty="0"/>
+              <a:t>0.41</a:t>
+            </a:r>
+            <a:endParaRPr lang="en-US" sz="2800" dirty="0"/>
           </a:p>
         </p:txBody>
       </p:sp>
@@ -8167,7 +9946,7 @@
         <p:spPr>
           <a:xfrm>
             <a:off x="6263640" y="1847088"/>
-            <a:ext cx="2286000" cy="457200"/>
+            <a:ext cx="1005840" cy="457200"/>
           </a:xfrm>
           <a:prstGeom prst="rect">
             <a:avLst/>
@@ -8191,7 +9970,7 @@
                 <a:ea typeface="Calibri" pitchFamily="34" charset="-122"/>
                 <a:cs typeface="Calibri" pitchFamily="34" charset="-120"/>
               </a:rPr>
-              <a:t>OoO instruction loop swings with code alignment alone</a:t>
+              <a:t>mispredicts per activation (f4)</a:t>
             </a:r>
             <a:endParaRPr lang="en-US" sz="1200" dirty="0"/>
           </a:p>
@@ -8199,14 +9978,39 @@
       </p:sp>
       <p:sp>
         <p:nvSpPr>
-          <p:cNvPr id="8" name="Text 4"/>
+          <p:cNvPr id="8" name="stat card"/>
+          <p:cNvSpPr/>
+          <p:nvPr/>
+        </p:nvSpPr>
+        <p:spPr>
+          <a:xfrm>
+            <a:off x="7498080" y="1097280"/>
+            <a:ext cx="1188720" cy="1234440"/>
+          </a:xfrm>
+          <a:prstGeom prst="rect">
+            <a:avLst/>
+          </a:prstGeom>
+          <a:solidFill>
+            <a:srgbClr val="EEF2F8"/>
+          </a:solidFill>
+          <a:ln w="12700">
+            <a:solidFill>
+              <a:srgbClr val="EEF2F8"/>
+            </a:solidFill>
+            <a:prstDash val="solid"/>
+          </a:ln>
+        </p:spPr>
+      </p:sp>
+      <p:sp>
+        <p:nvSpPr>
+          <p:cNvPr id="9" name="Text 5"/>
           <p:cNvSpPr txBox="1"/>
           <p:nvPr/>
         </p:nvSpPr>
         <p:spPr>
           <a:xfrm>
-            <a:off x="457200" y="3383280"/>
-            <a:ext cx="8229600" cy="1371600"/>
+            <a:off x="7635240" y="1207008"/>
+            <a:ext cx="914400" cy="640080"/>
           </a:xfrm>
           <a:prstGeom prst="rect">
             <a:avLst/>
@@ -8219,33 +10023,88 @@
           <a:lstStyle/>
           <a:p>
             <a:pPr indent="0" marL="0">
-              <a:spcAft>
-                <a:spcPts val="400"/>
-              </a:spcAft>
               <a:buNone/>
             </a:pPr>
             <a:r>
-              <a:rPr lang="en-US" sz="1400" b="1" dirty="0">
-                <a:solidFill>
-                  <a:srgbClr val="14213D"/>
+              <a:rPr lang="en-US" sz="2800" b="1" dirty="0">
+                <a:solidFill>
+                  <a:srgbClr val="1BAF7A"/>
+                </a:solidFill>
+                <a:latin typeface="Cambria" pitchFamily="34" charset="0"/>
+                <a:ea typeface="Cambria" pitchFamily="34" charset="-122"/>
+                <a:cs typeface="Cambria" pitchFamily="34" charset="-120"/>
+              </a:rPr>
+              <a:t>9.0×</a:t>
+            </a:r>
+            <a:endParaRPr lang="en-US" sz="2800" dirty="0"/>
+          </a:p>
+        </p:txBody>
+      </p:sp>
+      <p:sp>
+        <p:nvSpPr>
+          <p:cNvPr id="10" name="Text 6"/>
+          <p:cNvSpPr txBox="1"/>
+          <p:nvPr/>
+        </p:nvSpPr>
+        <p:spPr>
+          <a:xfrm>
+            <a:off x="7635240" y="1847088"/>
+            <a:ext cx="914400" cy="457200"/>
+          </a:xfrm>
+          <a:prstGeom prst="rect">
+            <a:avLst/>
+          </a:prstGeom>
+          <a:noFill/>
+          <a:ln/>
+        </p:spPr>
+        <p:txBody>
+          <a:bodyPr wrap="square" lIns="0" tIns="0" rIns="0" bIns="0" rtlCol="0" anchor="t"/>
+          <a:lstStyle/>
+          <a:p>
+            <a:pPr indent="0" marL="0">
+              <a:buNone/>
+            </a:pPr>
+            <a:r>
+              <a:rPr lang="en-US" sz="1200" dirty="0">
+                <a:solidFill>
+                  <a:srgbClr val="5B6577"/>
                 </a:solidFill>
                 <a:latin typeface="Calibri" pitchFamily="34" charset="0"/>
                 <a:ea typeface="Calibri" pitchFamily="34" charset="-122"/>
                 <a:cs typeface="Calibri" pitchFamily="34" charset="-120"/>
               </a:rPr>
-              <a:t>Placement noise</a:t>
-            </a:r>
-            <a:endParaRPr lang="en-US" sz="1400" dirty="0"/>
-          </a:p>
+              <a:t>instruction vs f4, OoO, shuffled</a:t>
+            </a:r>
+            <a:endParaRPr lang="en-US" sz="1200" dirty="0"/>
+          </a:p>
+        </p:txBody>
+      </p:sp>
+      <p:sp>
+        <p:nvSpPr>
+          <p:cNvPr id="11" name="Text 7"/>
+          <p:cNvSpPr txBox="1"/>
+          <p:nvPr/>
+        </p:nvSpPr>
+        <p:spPr>
+          <a:xfrm>
+            <a:off x="457200" y="3474720"/>
+            <a:ext cx="8229600" cy="1097280"/>
+          </a:xfrm>
+          <a:prstGeom prst="rect">
+            <a:avLst/>
+          </a:prstGeom>
+          <a:noFill/>
+          <a:ln/>
+        </p:spPr>
+        <p:txBody>
+          <a:bodyPr wrap="square" lIns="0" tIns="0" rIns="0" bIns="0" rtlCol="0" anchor="t"/>
+          <a:lstStyle/>
           <a:p>
             <a:pPr indent="0" marL="0">
-              <a:spcAft>
-                <a:spcPts val="400"/>
-              </a:spcAft>
               <a:buNone/>
             </a:pPr>
             <a:r>
-              <a:rPr lang="en-US" sz="1400" dirty="0">
+              <a:rPr lang="en-US" sz="1500" dirty="0">
                 <a:solidFill>
                   <a:srgbClr val="1F2937"/>
                 </a:solidFill>
@@ -8253,49 +10112,9 @@
                 <a:ea typeface="Calibri" pitchFamily="34" charset="-122"/>
                 <a:cs typeface="Calibri" pitchFamily="34" charset="-120"/>
               </a:rPr>
-              <a:t>Differences of ±1–3 cycles between cheap variants are not conclusions. Only expf is cleanly separated in the conv layer.</a:t>
-            </a:r>
-            <a:endParaRPr lang="en-US" sz="1400" dirty="0"/>
-          </a:p>
-          <a:p>
-            <a:pPr indent="0" marL="0">
-              <a:spcAft>
-                <a:spcPts val="400"/>
-              </a:spcAft>
-              <a:buNone/>
-            </a:pPr>
-            <a:r>
-              <a:rPr lang="en-US" sz="1400" b="1" dirty="0">
-                <a:solidFill>
-                  <a:srgbClr val="14213D"/>
-                </a:solidFill>
-                <a:latin typeface="Calibri" pitchFamily="34" charset="0"/>
-                <a:ea typeface="Calibri" pitchFamily="34" charset="-122"/>
-                <a:cs typeface="Calibri" pitchFamily="34" charset="-120"/>
-              </a:rPr>
-              <a:t>Cache</a:t>
-            </a:r>
-            <a:endParaRPr lang="en-US" sz="1400" dirty="0"/>
-          </a:p>
-          <a:p>
-            <a:pPr indent="0" marL="0">
-              <a:spcAft>
-                <a:spcPts val="400"/>
-              </a:spcAft>
-              <a:buNone/>
-            </a:pPr>
-            <a:r>
-              <a:rPr lang="en-US" sz="1400" dirty="0">
-                <a:solidFill>
-                  <a:srgbClr val="1F2937"/>
-                </a:solidFill>
-                <a:latin typeface="Calibri" pitchFamily="34" charset="0"/>
-                <a:ea typeface="Calibri" pitchFamily="34" charset="-122"/>
-                <a:cs typeface="Calibri" pitchFamily="34" charset="-120"/>
-              </a:rPr>
-              <a:t>Shrinking L1D to 512 B costs the table 35% in-order, 21% OoO; ≥1 kB costs ≤3%. The win over the table is mainly instruction count.</a:t>
-            </a:r>
-            <a:endParaRPr lang="en-US" sz="1400" dirty="0"/>
+              <a:t>The table and the instruction have no data-dependent branch. With shuffled data the OoO core takes 9.2 cycles for software f4 and 1.03 for the instruction: much of the gap is removed mispredictions, not just fewer instructions.</a:t>
+            </a:r>
+            <a:endParaRPr lang="en-US" sz="1500" dirty="0"/>
           </a:p>
         </p:txBody>
       </p:sp>
